--- a/final/Asian-Digital-Autocallable-Note.pptx
+++ b/final/Asian-Digital-Autocallable-Note.pptx
@@ -3349,7 +3349,7 @@
               <c:strCache>
                 <c:ptCount val="1"/>
                 <c:pt idx="0">
-                  <c:v>Snowball 9%, 65% barrier</c:v>
+                  <c:v>Snowball 13.6%, 65% barrier</c:v>
                 </c:pt>
               </c:strCache>
             </c:strRef>
@@ -4003,247 +4003,247 @@
                   <c:v>100</c:v>
                 </c:pt>
                 <c:pt idx="60">
-                  <c:v>145</c:v>
+                  <c:v>167.8</c:v>
                 </c:pt>
                 <c:pt idx="61">
-                  <c:v>145</c:v>
+                  <c:v>167.8</c:v>
                 </c:pt>
                 <c:pt idx="62">
-                  <c:v>145</c:v>
+                  <c:v>167.8</c:v>
                 </c:pt>
                 <c:pt idx="63">
-                  <c:v>145</c:v>
+                  <c:v>167.8</c:v>
                 </c:pt>
                 <c:pt idx="64">
-                  <c:v>145</c:v>
+                  <c:v>167.8</c:v>
                 </c:pt>
                 <c:pt idx="65">
-                  <c:v>145</c:v>
+                  <c:v>167.8</c:v>
                 </c:pt>
                 <c:pt idx="66">
-                  <c:v>145</c:v>
+                  <c:v>167.8</c:v>
                 </c:pt>
                 <c:pt idx="67">
-                  <c:v>145</c:v>
+                  <c:v>167.8</c:v>
                 </c:pt>
                 <c:pt idx="68">
-                  <c:v>145</c:v>
+                  <c:v>167.8</c:v>
                 </c:pt>
                 <c:pt idx="69">
-                  <c:v>145</c:v>
+                  <c:v>167.8</c:v>
                 </c:pt>
                 <c:pt idx="70">
-                  <c:v>145</c:v>
+                  <c:v>167.8</c:v>
                 </c:pt>
                 <c:pt idx="71">
-                  <c:v>145</c:v>
+                  <c:v>167.8</c:v>
                 </c:pt>
                 <c:pt idx="72">
-                  <c:v>145</c:v>
+                  <c:v>167.8</c:v>
                 </c:pt>
                 <c:pt idx="73">
-                  <c:v>145</c:v>
+                  <c:v>167.8</c:v>
                 </c:pt>
                 <c:pt idx="74">
-                  <c:v>145</c:v>
+                  <c:v>167.8</c:v>
                 </c:pt>
                 <c:pt idx="75">
-                  <c:v>145</c:v>
+                  <c:v>167.8</c:v>
                 </c:pt>
                 <c:pt idx="76">
-                  <c:v>145</c:v>
+                  <c:v>167.8</c:v>
                 </c:pt>
                 <c:pt idx="77">
-                  <c:v>145</c:v>
+                  <c:v>167.8</c:v>
                 </c:pt>
                 <c:pt idx="78">
-                  <c:v>145</c:v>
+                  <c:v>167.8</c:v>
                 </c:pt>
                 <c:pt idx="79">
-                  <c:v>145</c:v>
+                  <c:v>167.8</c:v>
                 </c:pt>
                 <c:pt idx="80">
-                  <c:v>145</c:v>
+                  <c:v>167.8</c:v>
                 </c:pt>
                 <c:pt idx="81">
-                  <c:v>145</c:v>
+                  <c:v>167.8</c:v>
                 </c:pt>
                 <c:pt idx="82">
-                  <c:v>145</c:v>
+                  <c:v>167.8</c:v>
                 </c:pt>
                 <c:pt idx="83">
-                  <c:v>145</c:v>
+                  <c:v>167.8</c:v>
                 </c:pt>
                 <c:pt idx="84">
-                  <c:v>145</c:v>
+                  <c:v>167.8</c:v>
                 </c:pt>
                 <c:pt idx="85">
-                  <c:v>145</c:v>
+                  <c:v>167.8</c:v>
                 </c:pt>
                 <c:pt idx="86">
-                  <c:v>145</c:v>
+                  <c:v>167.8</c:v>
                 </c:pt>
                 <c:pt idx="87">
-                  <c:v>145</c:v>
+                  <c:v>167.8</c:v>
                 </c:pt>
                 <c:pt idx="88">
-                  <c:v>145</c:v>
+                  <c:v>167.8</c:v>
                 </c:pt>
                 <c:pt idx="89">
-                  <c:v>145</c:v>
+                  <c:v>167.8</c:v>
                 </c:pt>
                 <c:pt idx="90">
-                  <c:v>145</c:v>
+                  <c:v>167.8</c:v>
                 </c:pt>
                 <c:pt idx="91">
-                  <c:v>145</c:v>
+                  <c:v>167.8</c:v>
                 </c:pt>
                 <c:pt idx="92">
-                  <c:v>145</c:v>
+                  <c:v>167.8</c:v>
                 </c:pt>
                 <c:pt idx="93">
-                  <c:v>145</c:v>
+                  <c:v>167.8</c:v>
                 </c:pt>
                 <c:pt idx="94">
-                  <c:v>145</c:v>
+                  <c:v>167.8</c:v>
                 </c:pt>
                 <c:pt idx="95">
-                  <c:v>145</c:v>
+                  <c:v>167.8</c:v>
                 </c:pt>
                 <c:pt idx="96">
-                  <c:v>145</c:v>
+                  <c:v>167.8</c:v>
                 </c:pt>
                 <c:pt idx="97">
-                  <c:v>145</c:v>
+                  <c:v>167.8</c:v>
                 </c:pt>
                 <c:pt idx="98">
-                  <c:v>145</c:v>
+                  <c:v>167.8</c:v>
                 </c:pt>
                 <c:pt idx="99">
-                  <c:v>145</c:v>
+                  <c:v>167.8</c:v>
                 </c:pt>
                 <c:pt idx="100">
-                  <c:v>145</c:v>
+                  <c:v>167.8</c:v>
                 </c:pt>
                 <c:pt idx="101">
-                  <c:v>145</c:v>
+                  <c:v>167.8</c:v>
                 </c:pt>
                 <c:pt idx="102">
-                  <c:v>145</c:v>
+                  <c:v>167.8</c:v>
                 </c:pt>
                 <c:pt idx="103">
-                  <c:v>145</c:v>
+                  <c:v>167.8</c:v>
                 </c:pt>
                 <c:pt idx="104">
-                  <c:v>145</c:v>
+                  <c:v>167.8</c:v>
                 </c:pt>
                 <c:pt idx="105">
-                  <c:v>145</c:v>
+                  <c:v>167.8</c:v>
                 </c:pt>
                 <c:pt idx="106">
-                  <c:v>145</c:v>
+                  <c:v>167.8</c:v>
                 </c:pt>
                 <c:pt idx="107">
-                  <c:v>145</c:v>
+                  <c:v>167.8</c:v>
                 </c:pt>
                 <c:pt idx="108">
-                  <c:v>145</c:v>
+                  <c:v>167.8</c:v>
                 </c:pt>
                 <c:pt idx="109">
-                  <c:v>145</c:v>
+                  <c:v>167.8</c:v>
                 </c:pt>
                 <c:pt idx="110">
-                  <c:v>145</c:v>
+                  <c:v>167.8</c:v>
                 </c:pt>
                 <c:pt idx="111">
-                  <c:v>145</c:v>
+                  <c:v>167.8</c:v>
                 </c:pt>
                 <c:pt idx="112">
-                  <c:v>145</c:v>
+                  <c:v>167.8</c:v>
                 </c:pt>
                 <c:pt idx="113">
-                  <c:v>145</c:v>
+                  <c:v>167.8</c:v>
                 </c:pt>
                 <c:pt idx="114">
-                  <c:v>145</c:v>
+                  <c:v>167.8</c:v>
                 </c:pt>
                 <c:pt idx="115">
-                  <c:v>145</c:v>
+                  <c:v>167.8</c:v>
                 </c:pt>
                 <c:pt idx="116">
-                  <c:v>145</c:v>
+                  <c:v>167.8</c:v>
                 </c:pt>
                 <c:pt idx="117">
-                  <c:v>145</c:v>
+                  <c:v>167.8</c:v>
                 </c:pt>
                 <c:pt idx="118">
-                  <c:v>145</c:v>
+                  <c:v>167.8</c:v>
                 </c:pt>
                 <c:pt idx="119">
-                  <c:v>145</c:v>
+                  <c:v>167.8</c:v>
                 </c:pt>
                 <c:pt idx="120">
-                  <c:v>145</c:v>
+                  <c:v>167.8</c:v>
                 </c:pt>
                 <c:pt idx="121">
-                  <c:v>145</c:v>
+                  <c:v>167.8</c:v>
                 </c:pt>
                 <c:pt idx="122">
-                  <c:v>145</c:v>
+                  <c:v>167.8</c:v>
                 </c:pt>
                 <c:pt idx="123">
-                  <c:v>145</c:v>
+                  <c:v>167.8</c:v>
                 </c:pt>
                 <c:pt idx="124">
-                  <c:v>145</c:v>
+                  <c:v>167.8</c:v>
                 </c:pt>
                 <c:pt idx="125">
-                  <c:v>145</c:v>
+                  <c:v>167.8</c:v>
                 </c:pt>
                 <c:pt idx="126">
-                  <c:v>145</c:v>
+                  <c:v>167.8</c:v>
                 </c:pt>
                 <c:pt idx="127">
-                  <c:v>145</c:v>
+                  <c:v>167.8</c:v>
                 </c:pt>
                 <c:pt idx="128">
-                  <c:v>145</c:v>
+                  <c:v>167.8</c:v>
                 </c:pt>
                 <c:pt idx="129">
-                  <c:v>145</c:v>
+                  <c:v>167.8</c:v>
                 </c:pt>
                 <c:pt idx="130">
-                  <c:v>145</c:v>
+                  <c:v>167.8</c:v>
                 </c:pt>
                 <c:pt idx="131">
-                  <c:v>145</c:v>
+                  <c:v>167.8</c:v>
                 </c:pt>
                 <c:pt idx="132">
-                  <c:v>145</c:v>
+                  <c:v>167.8</c:v>
                 </c:pt>
                 <c:pt idx="133">
-                  <c:v>145</c:v>
+                  <c:v>167.8</c:v>
                 </c:pt>
                 <c:pt idx="134">
-                  <c:v>145</c:v>
+                  <c:v>167.8</c:v>
                 </c:pt>
                 <c:pt idx="135">
-                  <c:v>145</c:v>
+                  <c:v>167.8</c:v>
                 </c:pt>
                 <c:pt idx="136">
-                  <c:v>145</c:v>
+                  <c:v>167.8</c:v>
                 </c:pt>
                 <c:pt idx="137">
-                  <c:v>145</c:v>
+                  <c:v>167.8</c:v>
                 </c:pt>
                 <c:pt idx="138">
-                  <c:v>145</c:v>
+                  <c:v>167.8</c:v>
                 </c:pt>
                 <c:pt idx="139">
-                  <c:v>145</c:v>
+                  <c:v>167.8</c:v>
                 </c:pt>
                 <c:pt idx="140">
-                  <c:v>145</c:v>
+                  <c:v>167.8</c:v>
                 </c:pt>
               </c:numCache>
             </c:numRef>
@@ -4916,244 +4916,244 @@
                   <c:v>100</c:v>
                 </c:pt>
                 <c:pt idx="61">
-                  <c:v>100.837</c:v>
+                  <c:v>100.853</c:v>
                 </c:pt>
                 <c:pt idx="62">
-                  <c:v>101.674</c:v>
+                  <c:v>101.706</c:v>
                 </c:pt>
                 <c:pt idx="63">
-                  <c:v>102.511</c:v>
+                  <c:v>102.559</c:v>
                 </c:pt>
                 <c:pt idx="64">
-                  <c:v>103.348</c:v>
+                  <c:v>103.412</c:v>
                 </c:pt>
                 <c:pt idx="65">
-                  <c:v>104.185</c:v>
+                  <c:v>104.265</c:v>
                 </c:pt>
                 <c:pt idx="66">
-                  <c:v>105.022</c:v>
+                  <c:v>105.118</c:v>
                 </c:pt>
                 <c:pt idx="67">
-                  <c:v>105.859</c:v>
+                  <c:v>105.971</c:v>
                 </c:pt>
                 <c:pt idx="68">
-                  <c:v>106.696</c:v>
+                  <c:v>106.824</c:v>
                 </c:pt>
                 <c:pt idx="69">
-                  <c:v>107.533</c:v>
+                  <c:v>107.67699999999999</c:v>
                 </c:pt>
                 <c:pt idx="70">
-                  <c:v>108.37</c:v>
+                  <c:v>108.53</c:v>
                 </c:pt>
                 <c:pt idx="71">
-                  <c:v>109.207</c:v>
+                  <c:v>109.383</c:v>
                 </c:pt>
                 <c:pt idx="72">
-                  <c:v>110.044</c:v>
+                  <c:v>110.236</c:v>
                 </c:pt>
                 <c:pt idx="73">
-                  <c:v>110.881</c:v>
+                  <c:v>111.089</c:v>
                 </c:pt>
                 <c:pt idx="74">
-                  <c:v>111.718</c:v>
+                  <c:v>111.94200000000001</c:v>
                 </c:pt>
                 <c:pt idx="75">
-                  <c:v>112.555</c:v>
+                  <c:v>112.795</c:v>
                 </c:pt>
                 <c:pt idx="76">
-                  <c:v>113.392</c:v>
+                  <c:v>113.648</c:v>
                 </c:pt>
                 <c:pt idx="77">
-                  <c:v>114.229</c:v>
+                  <c:v>114.501</c:v>
                 </c:pt>
                 <c:pt idx="78">
-                  <c:v>115.066</c:v>
+                  <c:v>115.354</c:v>
                 </c:pt>
                 <c:pt idx="79">
-                  <c:v>115.90299999999999</c:v>
+                  <c:v>116.207</c:v>
                 </c:pt>
                 <c:pt idx="80">
-                  <c:v>116.74</c:v>
+                  <c:v>117.06</c:v>
                 </c:pt>
                 <c:pt idx="81">
-                  <c:v>117.577</c:v>
+                  <c:v>117.913</c:v>
                 </c:pt>
                 <c:pt idx="82">
-                  <c:v>118.414</c:v>
+                  <c:v>118.76599999999999</c:v>
                 </c:pt>
                 <c:pt idx="83">
-                  <c:v>119.251</c:v>
+                  <c:v>119.619</c:v>
                 </c:pt>
                 <c:pt idx="84">
-                  <c:v>120.088</c:v>
+                  <c:v>120.47200000000001</c:v>
                 </c:pt>
                 <c:pt idx="85">
-                  <c:v>120.925</c:v>
+                  <c:v>121.325</c:v>
                 </c:pt>
                 <c:pt idx="86">
-                  <c:v>121.762</c:v>
+                  <c:v>122.178</c:v>
                 </c:pt>
                 <c:pt idx="87">
-                  <c:v>122.599</c:v>
+                  <c:v>123.031</c:v>
                 </c:pt>
                 <c:pt idx="88">
-                  <c:v>123.436</c:v>
+                  <c:v>123.884</c:v>
                 </c:pt>
                 <c:pt idx="89">
-                  <c:v>124.273</c:v>
+                  <c:v>124.737</c:v>
                 </c:pt>
                 <c:pt idx="90">
-                  <c:v>125.11</c:v>
+                  <c:v>125.59</c:v>
                 </c:pt>
                 <c:pt idx="91">
-                  <c:v>125.947</c:v>
+                  <c:v>126.443</c:v>
                 </c:pt>
                 <c:pt idx="92">
-                  <c:v>126.78399999999999</c:v>
+                  <c:v>127.29599999999999</c:v>
                 </c:pt>
                 <c:pt idx="93">
-                  <c:v>127.621</c:v>
+                  <c:v>128.149</c:v>
                 </c:pt>
                 <c:pt idx="94">
-                  <c:v>128.458</c:v>
+                  <c:v>129.002</c:v>
                 </c:pt>
                 <c:pt idx="95">
-                  <c:v>129.295</c:v>
+                  <c:v>129.855</c:v>
                 </c:pt>
                 <c:pt idx="96">
-                  <c:v>130.132</c:v>
+                  <c:v>130.708</c:v>
                 </c:pt>
                 <c:pt idx="97">
-                  <c:v>130.969</c:v>
+                  <c:v>131.561</c:v>
                 </c:pt>
                 <c:pt idx="98">
-                  <c:v>131.80599999999998</c:v>
+                  <c:v>132.414</c:v>
                 </c:pt>
                 <c:pt idx="99">
-                  <c:v>132.643</c:v>
+                  <c:v>133.267</c:v>
                 </c:pt>
                 <c:pt idx="100">
-                  <c:v>133.48</c:v>
+                  <c:v>134.12</c:v>
                 </c:pt>
                 <c:pt idx="101">
-                  <c:v>134.317</c:v>
+                  <c:v>134.973</c:v>
                 </c:pt>
                 <c:pt idx="102">
-                  <c:v>135.154</c:v>
+                  <c:v>135.826</c:v>
                 </c:pt>
                 <c:pt idx="103">
-                  <c:v>135.99099999999999</c:v>
+                  <c:v>136.679</c:v>
                 </c:pt>
                 <c:pt idx="104">
-                  <c:v>136.828</c:v>
+                  <c:v>137.53199999999998</c:v>
                 </c:pt>
                 <c:pt idx="105">
-                  <c:v>137.665</c:v>
+                  <c:v>138.385</c:v>
                 </c:pt>
                 <c:pt idx="106">
-                  <c:v>138.502</c:v>
+                  <c:v>139.238</c:v>
                 </c:pt>
                 <c:pt idx="107">
-                  <c:v>139.339</c:v>
+                  <c:v>140.091</c:v>
                 </c:pt>
                 <c:pt idx="108">
-                  <c:v>140.176</c:v>
+                  <c:v>140.94400000000002</c:v>
                 </c:pt>
                 <c:pt idx="109">
-                  <c:v>141.013</c:v>
+                  <c:v>141.797</c:v>
                 </c:pt>
                 <c:pt idx="110">
-                  <c:v>141.85</c:v>
+                  <c:v>142.65</c:v>
                 </c:pt>
                 <c:pt idx="111">
-                  <c:v>142.687</c:v>
+                  <c:v>143.503</c:v>
                 </c:pt>
                 <c:pt idx="112">
-                  <c:v>143.524</c:v>
+                  <c:v>144.356</c:v>
                 </c:pt>
                 <c:pt idx="113">
-                  <c:v>144.361</c:v>
+                  <c:v>145.209</c:v>
                 </c:pt>
                 <c:pt idx="114">
-                  <c:v>145.198</c:v>
+                  <c:v>146.062</c:v>
                 </c:pt>
                 <c:pt idx="115">
-                  <c:v>146.035</c:v>
+                  <c:v>146.915</c:v>
                 </c:pt>
                 <c:pt idx="116">
-                  <c:v>146.872</c:v>
+                  <c:v>147.768</c:v>
                 </c:pt>
                 <c:pt idx="117">
-                  <c:v>147.709</c:v>
+                  <c:v>148.621</c:v>
                 </c:pt>
                 <c:pt idx="118">
-                  <c:v>148.546</c:v>
+                  <c:v>149.474</c:v>
                 </c:pt>
                 <c:pt idx="119">
-                  <c:v>149.38299999999998</c:v>
+                  <c:v>150.327</c:v>
                 </c:pt>
                 <c:pt idx="120">
-                  <c:v>150.22</c:v>
+                  <c:v>151.18</c:v>
                 </c:pt>
                 <c:pt idx="121">
-                  <c:v>151.057</c:v>
+                  <c:v>152.03300000000002</c:v>
                 </c:pt>
                 <c:pt idx="122">
-                  <c:v>151.894</c:v>
+                  <c:v>152.886</c:v>
                 </c:pt>
                 <c:pt idx="123">
-                  <c:v>152.731</c:v>
+                  <c:v>153.739</c:v>
                 </c:pt>
                 <c:pt idx="124">
-                  <c:v>153.56799999999998</c:v>
+                  <c:v>154.59199999999998</c:v>
                 </c:pt>
                 <c:pt idx="125">
-                  <c:v>154.405</c:v>
+                  <c:v>155.445</c:v>
                 </c:pt>
                 <c:pt idx="126">
-                  <c:v>155.242</c:v>
+                  <c:v>156.298</c:v>
                 </c:pt>
                 <c:pt idx="127">
-                  <c:v>156.079</c:v>
+                  <c:v>157.151</c:v>
                 </c:pt>
                 <c:pt idx="128">
-                  <c:v>156.916</c:v>
+                  <c:v>158.004</c:v>
                 </c:pt>
                 <c:pt idx="129">
-                  <c:v>157.753</c:v>
+                  <c:v>158.857</c:v>
                 </c:pt>
                 <c:pt idx="130">
-                  <c:v>158.59</c:v>
+                  <c:v>159.71</c:v>
                 </c:pt>
                 <c:pt idx="131">
-                  <c:v>159.427</c:v>
+                  <c:v>160.563</c:v>
                 </c:pt>
                 <c:pt idx="132">
-                  <c:v>160.264</c:v>
+                  <c:v>161.416</c:v>
                 </c:pt>
                 <c:pt idx="133">
-                  <c:v>161.101</c:v>
+                  <c:v>162.269</c:v>
                 </c:pt>
                 <c:pt idx="134">
-                  <c:v>161.938</c:v>
+                  <c:v>163.122</c:v>
                 </c:pt>
                 <c:pt idx="135">
-                  <c:v>162.775</c:v>
+                  <c:v>163.975</c:v>
                 </c:pt>
                 <c:pt idx="136">
-                  <c:v>163.612</c:v>
+                  <c:v>164.828</c:v>
                 </c:pt>
                 <c:pt idx="137">
-                  <c:v>164.449</c:v>
+                  <c:v>165.68099999999998</c:v>
                 </c:pt>
                 <c:pt idx="138">
-                  <c:v>165.286</c:v>
+                  <c:v>166.534</c:v>
                 </c:pt>
                 <c:pt idx="139">
-                  <c:v>166.123</c:v>
+                  <c:v>167.387</c:v>
                 </c:pt>
                 <c:pt idx="140">
-                  <c:v>166.95999999999998</c:v>
+                  <c:v>168.24</c:v>
                 </c:pt>
               </c:numCache>
             </c:numRef>
@@ -6901,7 +6901,7 @@
             <c:bubble3D val="0"/>
             <c:spPr>
               <a:solidFill>
-                <a:srgbClr val="A6A6A6"/>
+                <a:srgbClr val="4F86AE"/>
               </a:solidFill>
               <a:effectLst/>
             </c:spPr>
@@ -6921,7 +6921,7 @@
             <c:bubble3D val="0"/>
             <c:spPr>
               <a:solidFill>
-                <a:srgbClr val="4F86AE"/>
+                <a:srgbClr val="A6A6A6"/>
               </a:solidFill>
               <a:effectLst/>
             </c:spPr>
@@ -7094,13 +7094,13 @@
                   <c:v>Asia Semiconductor (3119 HK)</c:v>
                 </c:pt>
                 <c:pt idx="1">
-                  <c:v>Japan Semiconductor (2644 JP)</c:v>
+                  <c:v>iShares MSCI South Korea (EWY)</c:v>
                 </c:pt>
                 <c:pt idx="2">
                   <c:v>iShares MSCI Taiwan (EWT)</c:v>
                 </c:pt>
                 <c:pt idx="3">
-                  <c:v>iShares MSCI South Korea (EWY)</c:v>
+                  <c:v>Japan Semiconductor (2644 JP)</c:v>
                 </c:pt>
                 <c:pt idx="4">
                   <c:v>Taiwan ESG High Dividend (00878 TT)</c:v>
@@ -7117,13 +7117,13 @@
                   <c:v>35</c:v>
                 </c:pt>
                 <c:pt idx="1">
-                  <c:v>15</c:v>
+                  <c:v>20</c:v>
                 </c:pt>
                 <c:pt idx="2">
                   <c:v>15</c:v>
                 </c:pt>
                 <c:pt idx="3">
-                  <c:v>20</c:v>
+                  <c:v>15</c:v>
                 </c:pt>
                 <c:pt idx="4">
                   <c:v>15</c:v>
@@ -10673,7 +10673,7 @@
                 </a:solidFill>
                 <a:latin typeface="Arial"/>
               </a:rPr>
-              <a:t>Cumulative autocall probability (risk-neutral)</a:t>
+              <a:t>Cumulative autocall probability (team outlook)</a:t>
             </a:r>
           </a:p>
         </c:rich>
@@ -10765,19 +10765,19 @@
                 <c:formatCode>General</c:formatCode>
                 <c:ptCount val="5"/>
                 <c:pt idx="0">
-                  <c:v>48.6</c:v>
+                  <c:v>78.1</c:v>
                 </c:pt>
                 <c:pt idx="1">
-                  <c:v>66.3</c:v>
+                  <c:v>93</c:v>
                 </c:pt>
                 <c:pt idx="2">
-                  <c:v>72.8</c:v>
+                  <c:v>96.9</c:v>
                 </c:pt>
                 <c:pt idx="3">
-                  <c:v>76.5</c:v>
+                  <c:v>98.5</c:v>
                 </c:pt>
                 <c:pt idx="4">
-                  <c:v>79</c:v>
+                  <c:v>99.3</c:v>
                 </c:pt>
               </c:numCache>
             </c:numRef>
@@ -14800,7 +14800,7 @@
           <a:p>
             <a:r>
               <a:rPr lang="en-US" dirty="0"/>
-              <a:t>The table answers 'what if markets go nowhere?'. Even at 0% equity return the note is called in ~68% of paths, because volatility alone takes the basket back to 100% on some date. The honest cost of the higher coupon: in ~21% of paths (risk-neutral; 16% at 8% equity returns) the basket never gets back to its start and the family is repaid the basket's level, 56% on average.</a:t>
+              <a:t>On the team outlook (the app's returns and volatilities, which reproduce the slide-5 Monte Carlo) the note is called in 99% of paths. The table also answers 'what if markets go nowhere?': at 0% the note is still called in ~67% of paths, because volatility alone takes the basket back to 100% on some date. The honest cost of the higher coupon: if the basket never gets back to its start (0.8% on the team outlook, 33% if flat) the family is repaid the basket's level.</a:t>
             </a:r>
             <a:endParaRPr lang="en-US" dirty="0"/>
           </a:p>
@@ -18407,7 +18407,7 @@
                           <a:ea typeface="Arial" pitchFamily="34" charset="-122"/>
                           <a:cs typeface="Arial" pitchFamily="34" charset="-120"/>
                         </a:rPr>
-                        <a:t>Loss risk</a:t>
+                        <a:t>Loss risk (pricing)</a:t>
                       </a:r>
                       <a:endParaRPr lang="en-US" sz="780" dirty="0">
                         <a:latin typeface="Arial" charset="0"/>
@@ -18613,7 +18613,7 @@
                           <a:ea typeface="Arial" pitchFamily="34" charset="-122"/>
                           <a:cs typeface="Arial" pitchFamily="34" charset="-120"/>
                         </a:rPr>
-                        <a:t>7.4%</a:t>
+                        <a:t>7.2%</a:t>
                       </a:r>
                       <a:endParaRPr lang="en-US" sz="780" dirty="0">
                         <a:latin typeface="Arial" charset="0"/>
@@ -18681,7 +18681,7 @@
                           <a:ea typeface="Arial" pitchFamily="34" charset="-122"/>
                           <a:cs typeface="Arial" pitchFamily="34" charset="-120"/>
                         </a:rPr>
-                        <a:t>15.9%</a:t>
+                        <a:t>15.8%</a:t>
                       </a:r>
                       <a:endParaRPr lang="en-US" sz="780" dirty="0">
                         <a:latin typeface="Arial" charset="0"/>
@@ -18887,7 +18887,7 @@
                           <a:ea typeface="Arial" pitchFamily="34" charset="-122"/>
                           <a:cs typeface="Arial" pitchFamily="34" charset="-120"/>
                         </a:rPr>
-                        <a:t>13.7%</a:t>
+                        <a:t>13.6%</a:t>
                       </a:r>
                       <a:endParaRPr lang="en-US" sz="780" dirty="0">
                         <a:latin typeface="Arial" charset="0"/>
@@ -18955,7 +18955,7 @@
                           <a:ea typeface="Arial" pitchFamily="34" charset="-122"/>
                           <a:cs typeface="Arial" pitchFamily="34" charset="-120"/>
                         </a:rPr>
-                        <a:t>14.3%</a:t>
+                        <a:t>14.0%</a:t>
                       </a:r>
                       <a:endParaRPr lang="en-US" sz="780" dirty="0">
                         <a:latin typeface="Arial" charset="0"/>
@@ -19161,7 +19161,7 @@
                           <a:ea typeface="Arial" pitchFamily="34" charset="-122"/>
                           <a:cs typeface="Arial" pitchFamily="34" charset="-120"/>
                         </a:rPr>
-                        <a:t>11.1%</a:t>
+                        <a:t>11.2%</a:t>
                       </a:r>
                       <a:endParaRPr lang="en-US" sz="780" dirty="0">
                         <a:latin typeface="Arial" charset="0"/>
@@ -19229,7 +19229,7 @@
                           <a:ea typeface="Arial" pitchFamily="34" charset="-122"/>
                           <a:cs typeface="Arial" pitchFamily="34" charset="-120"/>
                         </a:rPr>
-                        <a:t>15.9%</a:t>
+                        <a:t>15.8%</a:t>
                       </a:r>
                       <a:endParaRPr lang="en-US" sz="780" dirty="0">
                         <a:latin typeface="Arial" charset="0"/>
@@ -19435,7 +19435,7 @@
                           <a:ea typeface="Arial" pitchFamily="34" charset="-122"/>
                           <a:cs typeface="Arial" pitchFamily="34" charset="-120"/>
                         </a:rPr>
-                        <a:t>7.8%</a:t>
+                        <a:t>7.9%</a:t>
                       </a:r>
                       <a:endParaRPr lang="en-US" sz="780" dirty="0">
                         <a:latin typeface="Arial" charset="0"/>
@@ -19777,7 +19777,7 @@
                           <a:ea typeface="Arial" pitchFamily="34" charset="-122"/>
                           <a:cs typeface="Arial" pitchFamily="34" charset="-120"/>
                         </a:rPr>
-                        <a:t>21.0%</a:t>
+                        <a:t>21.6%</a:t>
                       </a:r>
                       <a:endParaRPr lang="en-US" sz="780" dirty="0">
                         <a:latin typeface="Arial" charset="0"/>
@@ -19973,7 +19973,7 @@
                 <a:ea typeface="Arial" pitchFamily="34" charset="-122"/>
                 <a:cs typeface="Arial" pitchFamily="34" charset="-120"/>
               </a:rPr>
-              <a:t>The draft's 8.5% fixed coupon is worth 100.3%, so Natixis cannot fund it. Full protection pays only 7.8%; a 70% floor pays 11.1%. Without barrier or floor the classic autocall is worth 14.1%: the family takes the basket's fall if the note is never called. We offer 12.75%.</a:t>
+              <a:t>The draft's 8.5% fixed coupon is worth 100.6%, so Natixis cannot fund it. Full protection pays only 7.9%; a 70% floor pays 11.2%. Without barrier or floor the classic autocall is worth 14.1%: the family takes the basket's fall if the note is never called. We offer 12.75%.</a:t>
             </a:r>
             <a:endParaRPr lang="en-US" sz="870" dirty="0"/>
           </a:p>
@@ -20680,7 +20680,7 @@
                 <a:ea typeface="Arial" pitchFamily="34" charset="-122"/>
                 <a:cs typeface="Arial" pitchFamily="34" charset="-120"/>
               </a:rPr>
-              <a:t>P(called by Y1) 49%</a:t>
+              <a:t>P(called by Y1) 78%</a:t>
             </a:r>
             <a:endParaRPr lang="en-US" sz="740" dirty="0"/>
           </a:p>
@@ -20834,7 +20834,7 @@
                 <a:ea typeface="Arial" pitchFamily="34" charset="-122"/>
                 <a:cs typeface="Arial" pitchFamily="34" charset="-120"/>
               </a:rPr>
-              <a:t>P(called by Y2) 66%</a:t>
+              <a:t>P(called by Y2) 93%</a:t>
             </a:r>
             <a:endParaRPr lang="en-US" sz="740" dirty="0"/>
           </a:p>
@@ -20988,7 +20988,7 @@
                 <a:ea typeface="Arial" pitchFamily="34" charset="-122"/>
                 <a:cs typeface="Arial" pitchFamily="34" charset="-120"/>
               </a:rPr>
-              <a:t>P(called by Y3) 73%</a:t>
+              <a:t>P(called by Y3) 97%</a:t>
             </a:r>
             <a:endParaRPr lang="en-US" sz="740" dirty="0"/>
           </a:p>
@@ -21142,7 +21142,7 @@
                 <a:ea typeface="Arial" pitchFamily="34" charset="-122"/>
                 <a:cs typeface="Arial" pitchFamily="34" charset="-120"/>
               </a:rPr>
-              <a:t>P(called by Y4) 76%</a:t>
+              <a:t>P(called by Y4) 99%</a:t>
             </a:r>
             <a:endParaRPr lang="en-US" sz="740" dirty="0"/>
           </a:p>
@@ -21296,7 +21296,7 @@
                 <a:ea typeface="Arial" pitchFamily="34" charset="-122"/>
                 <a:cs typeface="Arial" pitchFamily="34" charset="-120"/>
               </a:rPr>
-              <a:t>P(called by Y5) 79%</a:t>
+              <a:t>P(called by Y5) 99%</a:t>
             </a:r>
             <a:endParaRPr lang="en-US" sz="740" dirty="0"/>
           </a:p>
@@ -21513,7 +21513,7 @@
                 <a:ea typeface="Arial" pitchFamily="34" charset="-122"/>
                 <a:cs typeface="Arial" pitchFamily="34" charset="-120"/>
               </a:rPr>
-              <a:t>79%</a:t>
+              <a:t>99.3%</a:t>
             </a:r>
             <a:endParaRPr lang="en-US" sz="1010" dirty="0"/>
           </a:p>
@@ -21530,7 +21530,7 @@
                 <a:ea typeface="Arial" pitchFamily="34" charset="-122"/>
                 <a:cs typeface="Arial" pitchFamily="34" charset="-120"/>
               </a:rPr>
-              <a:t>risk-neutral</a:t>
+              <a:t>team outlook</a:t>
             </a:r>
             <a:endParaRPr lang="en-US" sz="1010" dirty="0"/>
           </a:p>
@@ -21731,7 +21731,7 @@
                 <a:ea typeface="Arial" pitchFamily="34" charset="-122"/>
                 <a:cs typeface="Arial" pitchFamily="34" charset="-120"/>
               </a:rPr>
-              <a:t>5%</a:t>
+              <a:t>0.6%</a:t>
             </a:r>
             <a:endParaRPr lang="en-US" sz="1010" dirty="0"/>
           </a:p>
@@ -21748,7 +21748,7 @@
                 <a:ea typeface="Arial" pitchFamily="34" charset="-122"/>
                 <a:cs typeface="Arial" pitchFamily="34" charset="-120"/>
               </a:rPr>
-              <a:t>risk-neutral</a:t>
+              <a:t>team outlook</a:t>
             </a:r>
             <a:endParaRPr lang="en-US" sz="1010" dirty="0"/>
           </a:p>
@@ -21949,7 +21949,7 @@
                 <a:ea typeface="Arial" pitchFamily="34" charset="-122"/>
                 <a:cs typeface="Arial" pitchFamily="34" charset="-120"/>
               </a:rPr>
-              <a:t>16%</a:t>
+              <a:t>0.2%</a:t>
             </a:r>
             <a:endParaRPr lang="en-US" sz="1010" dirty="0"/>
           </a:p>
@@ -21966,7 +21966,7 @@
                 <a:ea typeface="Arial" pitchFamily="34" charset="-122"/>
                 <a:cs typeface="Arial" pitchFamily="34" charset="-120"/>
               </a:rPr>
-              <a:t>risk-neutral</a:t>
+              <a:t>team outlook</a:t>
             </a:r>
             <a:endParaRPr lang="en-US" sz="1010" dirty="0"/>
           </a:p>
@@ -22005,7 +22005,7 @@
                 <a:ea typeface="Arial" pitchFamily="34" charset="-122"/>
                 <a:cs typeface="Arial" pitchFamily="34" charset="-120"/>
               </a:rPr>
-              <a:t>Probabilities are risk-neutral (drift = funding rate − dividends); real-world outcomes are on slide 9. The desk's replication (bond, coupon digitals, short put) is in Appendix C; stress paths in Appendix B.</a:t>
+              <a:t>Probabilities on the team outlook (app returns and vols, slides 4–5); other scenarios and the pricing measure are on slide 9. The desk's replication (bond, coupon digitals, short put) is in Appendix C; stress paths in Appendix B.</a:t>
             </a:r>
             <a:endParaRPr lang="en-US" sz="680" dirty="0"/>
           </a:p>
@@ -22280,7 +22280,7 @@
                 <a:ea typeface="Arial" pitchFamily="34" charset="-122"/>
                 <a:cs typeface="Arial" pitchFamily="34" charset="-120"/>
               </a:rPr>
-              <a:t>Simulation back-test: most paths end early with full coupons</a:t>
+              <a:t>Monte Carlo: on the team outlook the note is called in 99% of paths</a:t>
             </a:r>
             <a:endParaRPr lang="en-US" sz="1650" dirty="0"/>
           </a:p>
@@ -22342,7 +22342,7 @@
                 <a:ea typeface="Arial" pitchFamily="34" charset="-122"/>
                 <a:cs typeface="Arial" pitchFamily="34" charset="-120"/>
               </a:rPr>
-              <a:t>Monte Carlo outcome distribution: risk-neutral and under three real-world equity return assumptions</a:t>
+              <a:t>Note outcomes on the team outlook (slides 4–5), on half that outlook, if markets go nowhere, and under the pricing measure</a:t>
             </a:r>
             <a:endParaRPr lang="en-US" sz="850" dirty="0"/>
           </a:p>
@@ -22479,7 +22479,7 @@
                           <a:ea typeface="Arial" pitchFamily="34" charset="-122"/>
                           <a:cs typeface="Arial" pitchFamily="34" charset="-120"/>
                         </a:rPr>
-                        <a:t>Risk-neutral</a:t>
+                        <a:t>Team outlook</a:t>
                       </a:r>
                       <a:endParaRPr lang="en-US" sz="830" dirty="0">
                         <a:latin typeface="Arial" charset="0"/>
@@ -22547,7 +22547,7 @@
                           <a:ea typeface="Arial" pitchFamily="34" charset="-122"/>
                           <a:cs typeface="Arial" pitchFamily="34" charset="-120"/>
                         </a:rPr>
-                        <a:t>0% equity p.a.</a:t>
+                        <a:t>Half outlook</a:t>
                       </a:r>
                       <a:endParaRPr lang="en-US" sz="830" dirty="0">
                         <a:latin typeface="Arial" charset="0"/>
@@ -22615,7 +22615,7 @@
                           <a:ea typeface="Arial" pitchFamily="34" charset="-122"/>
                           <a:cs typeface="Arial" pitchFamily="34" charset="-120"/>
                         </a:rPr>
-                        <a:t>4% equity p.a.</a:t>
+                        <a:t>0% (flat)</a:t>
                       </a:r>
                       <a:endParaRPr lang="en-US" sz="830" dirty="0">
                         <a:latin typeface="Arial" charset="0"/>
@@ -22683,7 +22683,7 @@
                           <a:ea typeface="Arial" pitchFamily="34" charset="-122"/>
                           <a:cs typeface="Arial" pitchFamily="34" charset="-120"/>
                         </a:rPr>
-                        <a:t>8% equity p.a.</a:t>
+                        <a:t>Pricing (RN)</a:t>
                       </a:r>
                       <a:endParaRPr lang="en-US" sz="830" dirty="0">
                         <a:latin typeface="Arial" charset="0"/>
@@ -22821,7 +22821,7 @@
                           <a:ea typeface="Arial" pitchFamily="34" charset="-122"/>
                           <a:cs typeface="Arial" pitchFamily="34" charset="-120"/>
                         </a:rPr>
-                        <a:t>79%</a:t>
+                        <a:t>99%</a:t>
                       </a:r>
                       <a:endParaRPr lang="en-US" sz="830" dirty="0">
                         <a:latin typeface="Arial" charset="0"/>
@@ -22889,7 +22889,7 @@
                           <a:ea typeface="Arial" pitchFamily="34" charset="-122"/>
                           <a:cs typeface="Arial" pitchFamily="34" charset="-120"/>
                         </a:rPr>
-                        <a:t>68%</a:t>
+                        <a:t>91%</a:t>
                       </a:r>
                       <a:endParaRPr lang="en-US" sz="830" dirty="0">
                         <a:latin typeface="Arial" charset="0"/>
@@ -22957,7 +22957,7 @@
                           <a:ea typeface="Arial" pitchFamily="34" charset="-122"/>
                           <a:cs typeface="Arial" pitchFamily="34" charset="-120"/>
                         </a:rPr>
-                        <a:t>77%</a:t>
+                        <a:t>67%</a:t>
                       </a:r>
                       <a:endParaRPr lang="en-US" sz="830" dirty="0">
                         <a:latin typeface="Arial" charset="0"/>
@@ -23025,7 +23025,7 @@
                           <a:ea typeface="Arial" pitchFamily="34" charset="-122"/>
                           <a:cs typeface="Arial" pitchFamily="34" charset="-120"/>
                         </a:rPr>
-                        <a:t>84%</a:t>
+                        <a:t>78%</a:t>
                       </a:r>
                       <a:endParaRPr lang="en-US" sz="830" dirty="0">
                         <a:latin typeface="Arial" charset="0"/>
@@ -23163,7 +23163,75 @@
                           <a:ea typeface="Arial" pitchFamily="34" charset="-122"/>
                           <a:cs typeface="Arial" pitchFamily="34" charset="-120"/>
                         </a:rPr>
-                        <a:t>2.2</a:t>
+                        <a:t>1.2</a:t>
+                      </a:r>
+                      <a:endParaRPr lang="en-US" sz="830" dirty="0">
+                        <a:latin typeface="Arial" charset="0"/>
+                        <a:ea typeface="Arial" charset="0"/>
+                        <a:cs typeface="Arial" charset="0"/>
+                      </a:endParaRPr>
+                    </a:p>
+                  </a:txBody>
+                  <a:tcPr marL="50800" marR="50800" marT="25400" marB="25400" anchor="ctr">
+                    <a:lnL w="6350" cap="flat" cmpd="sng" algn="ctr">
+                      <a:solidFill>
+                        <a:srgbClr val="E3E3E3"/>
+                      </a:solidFill>
+                      <a:prstDash val="solid"/>
+                      <a:round/>
+                      <a:headEnd type="none" w="med" len="med"/>
+                      <a:tailEnd type="none" w="med" len="med"/>
+                    </a:lnL>
+                    <a:lnR w="6350" cap="flat" cmpd="sng" algn="ctr">
+                      <a:solidFill>
+                        <a:srgbClr val="E3E3E3"/>
+                      </a:solidFill>
+                      <a:prstDash val="solid"/>
+                      <a:round/>
+                      <a:headEnd type="none" w="med" len="med"/>
+                      <a:tailEnd type="none" w="med" len="med"/>
+                    </a:lnR>
+                    <a:lnT w="6350" cap="flat" cmpd="sng" algn="ctr">
+                      <a:solidFill>
+                        <a:srgbClr val="E3E3E3"/>
+                      </a:solidFill>
+                      <a:prstDash val="solid"/>
+                      <a:round/>
+                      <a:headEnd type="none" w="med" len="med"/>
+                      <a:tailEnd type="none" w="med" len="med"/>
+                    </a:lnT>
+                    <a:lnB w="6350" cap="flat" cmpd="sng" algn="ctr">
+                      <a:solidFill>
+                        <a:srgbClr val="E3E3E3"/>
+                      </a:solidFill>
+                      <a:prstDash val="solid"/>
+                      <a:round/>
+                      <a:headEnd type="none" w="med" len="med"/>
+                      <a:tailEnd type="none" w="med" len="med"/>
+                    </a:lnB>
+                    <a:solidFill>
+                      <a:srgbClr val="FFFFFF"/>
+                    </a:solidFill>
+                  </a:tcPr>
+                </a:tc>
+                <a:tc>
+                  <a:txBody>
+                    <a:bodyPr/>
+                    <a:lstStyle/>
+                    <a:p>
+                      <a:pPr algn="ctr" indent="0" marL="0">
+                        <a:buNone/>
+                      </a:pPr>
+                      <a:r>
+                        <a:rPr lang="en-US" sz="830" dirty="0">
+                          <a:solidFill>
+                            <a:srgbClr val="262626"/>
+                          </a:solidFill>
+                          <a:latin typeface="Arial" pitchFamily="34" charset="0"/>
+                          <a:ea typeface="Arial" pitchFamily="34" charset="-122"/>
+                          <a:cs typeface="Arial" pitchFamily="34" charset="-120"/>
+                        </a:rPr>
+                        <a:t>1.7</a:t>
                       </a:r>
                       <a:endParaRPr lang="en-US" sz="830" dirty="0">
                         <a:latin typeface="Arial" charset="0"/>
@@ -23300,74 +23368,6 @@
                           <a:cs typeface="Arial" pitchFamily="34" charset="-120"/>
                         </a:rPr>
                         <a:t>2.3</a:t>
-                      </a:r>
-                      <a:endParaRPr lang="en-US" sz="830" dirty="0">
-                        <a:latin typeface="Arial" charset="0"/>
-                        <a:ea typeface="Arial" charset="0"/>
-                        <a:cs typeface="Arial" charset="0"/>
-                      </a:endParaRPr>
-                    </a:p>
-                  </a:txBody>
-                  <a:tcPr marL="50800" marR="50800" marT="25400" marB="25400" anchor="ctr">
-                    <a:lnL w="6350" cap="flat" cmpd="sng" algn="ctr">
-                      <a:solidFill>
-                        <a:srgbClr val="E3E3E3"/>
-                      </a:solidFill>
-                      <a:prstDash val="solid"/>
-                      <a:round/>
-                      <a:headEnd type="none" w="med" len="med"/>
-                      <a:tailEnd type="none" w="med" len="med"/>
-                    </a:lnL>
-                    <a:lnR w="6350" cap="flat" cmpd="sng" algn="ctr">
-                      <a:solidFill>
-                        <a:srgbClr val="E3E3E3"/>
-                      </a:solidFill>
-                      <a:prstDash val="solid"/>
-                      <a:round/>
-                      <a:headEnd type="none" w="med" len="med"/>
-                      <a:tailEnd type="none" w="med" len="med"/>
-                    </a:lnR>
-                    <a:lnT w="6350" cap="flat" cmpd="sng" algn="ctr">
-                      <a:solidFill>
-                        <a:srgbClr val="E3E3E3"/>
-                      </a:solidFill>
-                      <a:prstDash val="solid"/>
-                      <a:round/>
-                      <a:headEnd type="none" w="med" len="med"/>
-                      <a:tailEnd type="none" w="med" len="med"/>
-                    </a:lnT>
-                    <a:lnB w="6350" cap="flat" cmpd="sng" algn="ctr">
-                      <a:solidFill>
-                        <a:srgbClr val="E3E3E3"/>
-                      </a:solidFill>
-                      <a:prstDash val="solid"/>
-                      <a:round/>
-                      <a:headEnd type="none" w="med" len="med"/>
-                      <a:tailEnd type="none" w="med" len="med"/>
-                    </a:lnB>
-                    <a:solidFill>
-                      <a:srgbClr val="FFFFFF"/>
-                    </a:solidFill>
-                  </a:tcPr>
-                </a:tc>
-                <a:tc>
-                  <a:txBody>
-                    <a:bodyPr/>
-                    <a:lstStyle/>
-                    <a:p>
-                      <a:pPr algn="ctr" indent="0" marL="0">
-                        <a:buNone/>
-                      </a:pPr>
-                      <a:r>
-                        <a:rPr lang="en-US" sz="830" dirty="0">
-                          <a:solidFill>
-                            <a:srgbClr val="262626"/>
-                          </a:solidFill>
-                          <a:latin typeface="Arial" pitchFamily="34" charset="0"/>
-                          <a:ea typeface="Arial" pitchFamily="34" charset="-122"/>
-                          <a:cs typeface="Arial" pitchFamily="34" charset="-120"/>
-                        </a:rPr>
-                        <a:t>2.0</a:t>
                       </a:r>
                       <a:endParaRPr lang="en-US" sz="830" dirty="0">
                         <a:latin typeface="Arial" charset="0"/>
@@ -23505,7 +23505,75 @@
                           <a:ea typeface="Arial" pitchFamily="34" charset="-122"/>
                           <a:cs typeface="Arial" pitchFamily="34" charset="-120"/>
                         </a:rPr>
-                        <a:t>7.8%</a:t>
+                        <a:t>13.0%</a:t>
+                      </a:r>
+                      <a:endParaRPr lang="en-US" sz="830" dirty="0">
+                        <a:latin typeface="Arial" charset="0"/>
+                        <a:ea typeface="Arial" charset="0"/>
+                        <a:cs typeface="Arial" charset="0"/>
+                      </a:endParaRPr>
+                    </a:p>
+                  </a:txBody>
+                  <a:tcPr marL="50800" marR="50800" marT="25400" marB="25400" anchor="ctr">
+                    <a:lnL w="6350" cap="flat" cmpd="sng" algn="ctr">
+                      <a:solidFill>
+                        <a:srgbClr val="E3E3E3"/>
+                      </a:solidFill>
+                      <a:prstDash val="solid"/>
+                      <a:round/>
+                      <a:headEnd type="none" w="med" len="med"/>
+                      <a:tailEnd type="none" w="med" len="med"/>
+                    </a:lnL>
+                    <a:lnR w="6350" cap="flat" cmpd="sng" algn="ctr">
+                      <a:solidFill>
+                        <a:srgbClr val="E3E3E3"/>
+                      </a:solidFill>
+                      <a:prstDash val="solid"/>
+                      <a:round/>
+                      <a:headEnd type="none" w="med" len="med"/>
+                      <a:tailEnd type="none" w="med" len="med"/>
+                    </a:lnR>
+                    <a:lnT w="6350" cap="flat" cmpd="sng" algn="ctr">
+                      <a:solidFill>
+                        <a:srgbClr val="E3E3E3"/>
+                      </a:solidFill>
+                      <a:prstDash val="solid"/>
+                      <a:round/>
+                      <a:headEnd type="none" w="med" len="med"/>
+                      <a:tailEnd type="none" w="med" len="med"/>
+                    </a:lnT>
+                    <a:lnB w="6350" cap="flat" cmpd="sng" algn="ctr">
+                      <a:solidFill>
+                        <a:srgbClr val="E3E3E3"/>
+                      </a:solidFill>
+                      <a:prstDash val="solid"/>
+                      <a:round/>
+                      <a:headEnd type="none" w="med" len="med"/>
+                      <a:tailEnd type="none" w="med" len="med"/>
+                    </a:lnB>
+                    <a:solidFill>
+                      <a:srgbClr val="FFFFFF"/>
+                    </a:solidFill>
+                  </a:tcPr>
+                </a:tc>
+                <a:tc>
+                  <a:txBody>
+                    <a:bodyPr/>
+                    <a:lstStyle/>
+                    <a:p>
+                      <a:pPr algn="ctr" indent="0" marL="0">
+                        <a:buNone/>
+                      </a:pPr>
+                      <a:r>
+                        <a:rPr lang="en-US" sz="830" dirty="0">
+                          <a:solidFill>
+                            <a:srgbClr val="262626"/>
+                          </a:solidFill>
+                          <a:latin typeface="Arial" pitchFamily="34" charset="0"/>
+                          <a:ea typeface="Arial" pitchFamily="34" charset="-122"/>
+                          <a:cs typeface="Arial" pitchFamily="34" charset="-120"/>
+                        </a:rPr>
+                        <a:t>11.1%</a:t>
                       </a:r>
                       <a:endParaRPr lang="en-US" sz="830" dirty="0">
                         <a:latin typeface="Arial" charset="0"/>
@@ -23641,75 +23709,7 @@
                           <a:ea typeface="Arial" pitchFamily="34" charset="-122"/>
                           <a:cs typeface="Arial" pitchFamily="34" charset="-120"/>
                         </a:rPr>
-                        <a:t>7.1%</a:t>
-                      </a:r>
-                      <a:endParaRPr lang="en-US" sz="830" dirty="0">
-                        <a:latin typeface="Arial" charset="0"/>
-                        <a:ea typeface="Arial" charset="0"/>
-                        <a:cs typeface="Arial" charset="0"/>
-                      </a:endParaRPr>
-                    </a:p>
-                  </a:txBody>
-                  <a:tcPr marL="50800" marR="50800" marT="25400" marB="25400" anchor="ctr">
-                    <a:lnL w="6350" cap="flat" cmpd="sng" algn="ctr">
-                      <a:solidFill>
-                        <a:srgbClr val="E3E3E3"/>
-                      </a:solidFill>
-                      <a:prstDash val="solid"/>
-                      <a:round/>
-                      <a:headEnd type="none" w="med" len="med"/>
-                      <a:tailEnd type="none" w="med" len="med"/>
-                    </a:lnL>
-                    <a:lnR w="6350" cap="flat" cmpd="sng" algn="ctr">
-                      <a:solidFill>
-                        <a:srgbClr val="E3E3E3"/>
-                      </a:solidFill>
-                      <a:prstDash val="solid"/>
-                      <a:round/>
-                      <a:headEnd type="none" w="med" len="med"/>
-                      <a:tailEnd type="none" w="med" len="med"/>
-                    </a:lnR>
-                    <a:lnT w="6350" cap="flat" cmpd="sng" algn="ctr">
-                      <a:solidFill>
-                        <a:srgbClr val="E3E3E3"/>
-                      </a:solidFill>
-                      <a:prstDash val="solid"/>
-                      <a:round/>
-                      <a:headEnd type="none" w="med" len="med"/>
-                      <a:tailEnd type="none" w="med" len="med"/>
-                    </a:lnT>
-                    <a:lnB w="6350" cap="flat" cmpd="sng" algn="ctr">
-                      <a:solidFill>
-                        <a:srgbClr val="E3E3E3"/>
-                      </a:solidFill>
-                      <a:prstDash val="solid"/>
-                      <a:round/>
-                      <a:headEnd type="none" w="med" len="med"/>
-                      <a:tailEnd type="none" w="med" len="med"/>
-                    </a:lnB>
-                    <a:solidFill>
-                      <a:srgbClr val="FFFFFF"/>
-                    </a:solidFill>
-                  </a:tcPr>
-                </a:tc>
-                <a:tc>
-                  <a:txBody>
-                    <a:bodyPr/>
-                    <a:lstStyle/>
-                    <a:p>
-                      <a:pPr algn="ctr" indent="0" marL="0">
-                        <a:buNone/>
-                      </a:pPr>
-                      <a:r>
-                        <a:rPr lang="en-US" sz="830" dirty="0">
-                          <a:solidFill>
-                            <a:srgbClr val="262626"/>
-                          </a:solidFill>
-                          <a:latin typeface="Arial" pitchFamily="34" charset="0"/>
-                          <a:ea typeface="Arial" pitchFamily="34" charset="-122"/>
-                          <a:cs typeface="Arial" pitchFamily="34" charset="-120"/>
-                        </a:rPr>
-                        <a:t>9.1%</a:t>
+                        <a:t>7.8%</a:t>
                       </a:r>
                       <a:endParaRPr lang="en-US" sz="830" dirty="0">
                         <a:latin typeface="Arial" charset="0"/>
@@ -23847,7 +23847,75 @@
                           <a:ea typeface="Arial" pitchFamily="34" charset="-122"/>
                           <a:cs typeface="Arial" pitchFamily="34" charset="-120"/>
                         </a:rPr>
-                        <a:t>13.0%</a:t>
+                        <a:t>13.3%</a:t>
+                      </a:r>
+                      <a:endParaRPr lang="en-US" sz="830" dirty="0">
+                        <a:latin typeface="Arial" charset="0"/>
+                        <a:ea typeface="Arial" charset="0"/>
+                        <a:cs typeface="Arial" charset="0"/>
+                      </a:endParaRPr>
+                    </a:p>
+                  </a:txBody>
+                  <a:tcPr marL="50800" marR="50800" marT="25400" marB="25400" anchor="ctr">
+                    <a:lnL w="6350" cap="flat" cmpd="sng" algn="ctr">
+                      <a:solidFill>
+                        <a:srgbClr val="E3E3E3"/>
+                      </a:solidFill>
+                      <a:prstDash val="solid"/>
+                      <a:round/>
+                      <a:headEnd type="none" w="med" len="med"/>
+                      <a:tailEnd type="none" w="med" len="med"/>
+                    </a:lnL>
+                    <a:lnR w="6350" cap="flat" cmpd="sng" algn="ctr">
+                      <a:solidFill>
+                        <a:srgbClr val="E3E3E3"/>
+                      </a:solidFill>
+                      <a:prstDash val="solid"/>
+                      <a:round/>
+                      <a:headEnd type="none" w="med" len="med"/>
+                      <a:tailEnd type="none" w="med" len="med"/>
+                    </a:lnR>
+                    <a:lnT w="6350" cap="flat" cmpd="sng" algn="ctr">
+                      <a:solidFill>
+                        <a:srgbClr val="E3E3E3"/>
+                      </a:solidFill>
+                      <a:prstDash val="solid"/>
+                      <a:round/>
+                      <a:headEnd type="none" w="med" len="med"/>
+                      <a:tailEnd type="none" w="med" len="med"/>
+                    </a:lnT>
+                    <a:lnB w="6350" cap="flat" cmpd="sng" algn="ctr">
+                      <a:solidFill>
+                        <a:srgbClr val="E3E3E3"/>
+                      </a:solidFill>
+                      <a:prstDash val="solid"/>
+                      <a:round/>
+                      <a:headEnd type="none" w="med" len="med"/>
+                      <a:tailEnd type="none" w="med" len="med"/>
+                    </a:lnB>
+                    <a:solidFill>
+                      <a:srgbClr val="FFFFFF"/>
+                    </a:solidFill>
+                  </a:tcPr>
+                </a:tc>
+                <a:tc>
+                  <a:txBody>
+                    <a:bodyPr/>
+                    <a:lstStyle/>
+                    <a:p>
+                      <a:pPr algn="ctr" indent="0" marL="0">
+                        <a:buNone/>
+                      </a:pPr>
+                      <a:r>
+                        <a:rPr lang="en-US" sz="830" dirty="0">
+                          <a:solidFill>
+                            <a:srgbClr val="262626"/>
+                          </a:solidFill>
+                          <a:latin typeface="Arial" pitchFamily="34" charset="0"/>
+                          <a:ea typeface="Arial" pitchFamily="34" charset="-122"/>
+                          <a:cs typeface="Arial" pitchFamily="34" charset="-120"/>
+                        </a:rPr>
+                        <a:t>13.2%</a:t>
                       </a:r>
                       <a:endParaRPr lang="en-US" sz="830" dirty="0">
                         <a:latin typeface="Arial" charset="0"/>
@@ -23984,74 +24052,6 @@
                           <a:cs typeface="Arial" pitchFamily="34" charset="-120"/>
                         </a:rPr>
                         <a:t>12.9%</a:t>
-                      </a:r>
-                      <a:endParaRPr lang="en-US" sz="830" dirty="0">
-                        <a:latin typeface="Arial" charset="0"/>
-                        <a:ea typeface="Arial" charset="0"/>
-                        <a:cs typeface="Arial" charset="0"/>
-                      </a:endParaRPr>
-                    </a:p>
-                  </a:txBody>
-                  <a:tcPr marL="50800" marR="50800" marT="25400" marB="25400" anchor="ctr">
-                    <a:lnL w="6350" cap="flat" cmpd="sng" algn="ctr">
-                      <a:solidFill>
-                        <a:srgbClr val="E3E3E3"/>
-                      </a:solidFill>
-                      <a:prstDash val="solid"/>
-                      <a:round/>
-                      <a:headEnd type="none" w="med" len="med"/>
-                      <a:tailEnd type="none" w="med" len="med"/>
-                    </a:lnL>
-                    <a:lnR w="6350" cap="flat" cmpd="sng" algn="ctr">
-                      <a:solidFill>
-                        <a:srgbClr val="E3E3E3"/>
-                      </a:solidFill>
-                      <a:prstDash val="solid"/>
-                      <a:round/>
-                      <a:headEnd type="none" w="med" len="med"/>
-                      <a:tailEnd type="none" w="med" len="med"/>
-                    </a:lnR>
-                    <a:lnT w="6350" cap="flat" cmpd="sng" algn="ctr">
-                      <a:solidFill>
-                        <a:srgbClr val="E3E3E3"/>
-                      </a:solidFill>
-                      <a:prstDash val="solid"/>
-                      <a:round/>
-                      <a:headEnd type="none" w="med" len="med"/>
-                      <a:tailEnd type="none" w="med" len="med"/>
-                    </a:lnT>
-                    <a:lnB w="6350" cap="flat" cmpd="sng" algn="ctr">
-                      <a:solidFill>
-                        <a:srgbClr val="E3E3E3"/>
-                      </a:solidFill>
-                      <a:prstDash val="solid"/>
-                      <a:round/>
-                      <a:headEnd type="none" w="med" len="med"/>
-                      <a:tailEnd type="none" w="med" len="med"/>
-                    </a:lnB>
-                    <a:solidFill>
-                      <a:srgbClr val="FFFFFF"/>
-                    </a:solidFill>
-                  </a:tcPr>
-                </a:tc>
-                <a:tc>
-                  <a:txBody>
-                    <a:bodyPr/>
-                    <a:lstStyle/>
-                    <a:p>
-                      <a:pPr algn="ctr" indent="0" marL="0">
-                        <a:buNone/>
-                      </a:pPr>
-                      <a:r>
-                        <a:rPr lang="en-US" sz="830" dirty="0">
-                          <a:solidFill>
-                            <a:srgbClr val="262626"/>
-                          </a:solidFill>
-                          <a:latin typeface="Arial" pitchFamily="34" charset="0"/>
-                          <a:ea typeface="Arial" pitchFamily="34" charset="-122"/>
-                          <a:cs typeface="Arial" pitchFamily="34" charset="-120"/>
-                        </a:rPr>
-                        <a:t>13.1%</a:t>
                       </a:r>
                       <a:endParaRPr lang="en-US" sz="830" dirty="0">
                         <a:latin typeface="Arial" charset="0"/>
@@ -24189,7 +24189,7 @@
                           <a:ea typeface="Arial" pitchFamily="34" charset="-122"/>
                           <a:cs typeface="Arial" pitchFamily="34" charset="-120"/>
                         </a:rPr>
-                        <a:t>15.4%</a:t>
+                        <a:t>15.2%</a:t>
                       </a:r>
                       <a:endParaRPr lang="en-US" sz="830" dirty="0">
                         <a:latin typeface="Arial" charset="0"/>
@@ -24257,7 +24257,7 @@
                           <a:ea typeface="Arial" pitchFamily="34" charset="-122"/>
                           <a:cs typeface="Arial" pitchFamily="34" charset="-120"/>
                         </a:rPr>
-                        <a:t>13.5%</a:t>
+                        <a:t>16.6%</a:t>
                       </a:r>
                       <a:endParaRPr lang="en-US" sz="830" dirty="0">
                         <a:latin typeface="Arial" charset="0"/>
@@ -24325,7 +24325,7 @@
                           <a:ea typeface="Arial" pitchFamily="34" charset="-122"/>
                           <a:cs typeface="Arial" pitchFamily="34" charset="-120"/>
                         </a:rPr>
-                        <a:t>14.9%</a:t>
+                        <a:t>13.4%</a:t>
                       </a:r>
                       <a:endParaRPr lang="en-US" sz="830" dirty="0">
                         <a:latin typeface="Arial" charset="0"/>
@@ -24393,7 +24393,7 @@
                           <a:ea typeface="Arial" pitchFamily="34" charset="-122"/>
                           <a:cs typeface="Arial" pitchFamily="34" charset="-120"/>
                         </a:rPr>
-                        <a:t>15.9%</a:t>
+                        <a:t>15.4%</a:t>
                       </a:r>
                       <a:endParaRPr lang="en-US" sz="830" dirty="0">
                         <a:latin typeface="Arial" charset="0"/>
@@ -24531,7 +24531,7 @@
                           <a:ea typeface="Arial" pitchFamily="34" charset="-122"/>
                           <a:cs typeface="Arial" pitchFamily="34" charset="-120"/>
                         </a:rPr>
-                        <a:t>56%</a:t>
+                        <a:t>79%</a:t>
                       </a:r>
                       <a:endParaRPr lang="en-US" sz="830" dirty="0">
                         <a:latin typeface="Arial" charset="0"/>
@@ -24599,7 +24599,7 @@
                           <a:ea typeface="Arial" pitchFamily="34" charset="-122"/>
                           <a:cs typeface="Arial" pitchFamily="34" charset="-120"/>
                         </a:rPr>
-                        <a:t>50%</a:t>
+                        <a:t>67%</a:t>
                       </a:r>
                       <a:endParaRPr lang="en-US" sz="830" dirty="0">
                         <a:latin typeface="Arial" charset="0"/>
@@ -24667,7 +24667,7 @@
                           <a:ea typeface="Arial" pitchFamily="34" charset="-122"/>
                           <a:cs typeface="Arial" pitchFamily="34" charset="-120"/>
                         </a:rPr>
-                        <a:t>55%</a:t>
+                        <a:t>51%</a:t>
                       </a:r>
                       <a:endParaRPr lang="en-US" sz="830" dirty="0">
                         <a:latin typeface="Arial" charset="0"/>
@@ -24735,7 +24735,7 @@
                           <a:ea typeface="Arial" pitchFamily="34" charset="-122"/>
                           <a:cs typeface="Arial" pitchFamily="34" charset="-120"/>
                         </a:rPr>
-                        <a:t>59%</a:t>
+                        <a:t>58%</a:t>
                       </a:r>
                       <a:endParaRPr lang="en-US" sz="830" dirty="0">
                         <a:latin typeface="Arial" charset="0"/>
@@ -24873,7 +24873,7 @@
                           <a:ea typeface="Arial" pitchFamily="34" charset="-122"/>
                           <a:cs typeface="Arial" pitchFamily="34" charset="-120"/>
                         </a:rPr>
-                        <a:t>21%</a:t>
+                        <a:t>1%</a:t>
                       </a:r>
                       <a:endParaRPr lang="en-US" sz="830" dirty="0">
                         <a:latin typeface="Arial" charset="0"/>
@@ -24941,7 +24941,7 @@
                           <a:ea typeface="Arial" pitchFamily="34" charset="-122"/>
                           <a:cs typeface="Arial" pitchFamily="34" charset="-120"/>
                         </a:rPr>
-                        <a:t>32%</a:t>
+                        <a:t>9%</a:t>
                       </a:r>
                       <a:endParaRPr lang="en-US" sz="830" dirty="0">
                         <a:latin typeface="Arial" charset="0"/>
@@ -25009,7 +25009,7 @@
                           <a:ea typeface="Arial" pitchFamily="34" charset="-122"/>
                           <a:cs typeface="Arial" pitchFamily="34" charset="-120"/>
                         </a:rPr>
-                        <a:t>23%</a:t>
+                        <a:t>33%</a:t>
                       </a:r>
                       <a:endParaRPr lang="en-US" sz="830" dirty="0">
                         <a:latin typeface="Arial" charset="0"/>
@@ -25077,7 +25077,7 @@
                           <a:ea typeface="Arial" pitchFamily="34" charset="-122"/>
                           <a:cs typeface="Arial" pitchFamily="34" charset="-120"/>
                         </a:rPr>
-                        <a:t>16%</a:t>
+                        <a:t>22%</a:t>
                       </a:r>
                       <a:endParaRPr lang="en-US" sz="830" dirty="0">
                         <a:latin typeface="Arial" charset="0"/>
@@ -25191,7 +25191,7 @@
                 <a:ea typeface="Arial" pitchFamily="34" charset="-122"/>
                 <a:cs typeface="Arial" pitchFamily="34" charset="-120"/>
               </a:rPr>
-              <a:t>49%</a:t>
+              <a:t>78%</a:t>
             </a:r>
             <a:endParaRPr lang="en-US" sz="2210" dirty="0"/>
           </a:p>
@@ -25294,7 +25294,7 @@
                 <a:ea typeface="Arial" pitchFamily="34" charset="-122"/>
                 <a:cs typeface="Arial" pitchFamily="34" charset="-120"/>
               </a:rPr>
-              <a:t>21%</a:t>
+              <a:t>13.3%</a:t>
             </a:r>
             <a:endParaRPr lang="en-US" sz="2210" dirty="0"/>
           </a:p>
@@ -25333,7 +25333,7 @@
                 <a:ea typeface="Arial" pitchFamily="34" charset="-122"/>
                 <a:cs typeface="Arial" pitchFamily="34" charset="-120"/>
               </a:rPr>
-              <a:t>chance of a loss: never called, repaid at the basket level</a:t>
+              <a:t>median return a year on the team outlook</a:t>
             </a:r>
             <a:endParaRPr lang="en-US" sz="920" dirty="0"/>
           </a:p>
@@ -25397,7 +25397,7 @@
                 <a:ea typeface="Arial" pitchFamily="34" charset="-122"/>
                 <a:cs typeface="Arial" pitchFamily="34" charset="-120"/>
               </a:rPr>
-              <a:t>56%</a:t>
+              <a:t>33%</a:t>
             </a:r>
             <a:endParaRPr lang="en-US" sz="2210" dirty="0"/>
           </a:p>
@@ -25436,7 +25436,7 @@
                 <a:ea typeface="Arial" pitchFamily="34" charset="-122"/>
                 <a:cs typeface="Arial" pitchFamily="34" charset="-120"/>
               </a:rPr>
-              <a:t>average repayment in those paths</a:t>
+              <a:t>chance of a loss if markets go nowhere</a:t>
             </a:r>
             <a:endParaRPr lang="en-US" sz="920" dirty="0"/>
           </a:p>
@@ -26137,7 +26137,7 @@
                           <a:ea typeface="Arial" pitchFamily="34" charset="-122"/>
                           <a:cs typeface="Arial" pitchFamily="34" charset="-120"/>
                         </a:rPr>
-                        <a:t>Never called: repaid at the basket level (~21% of paths, 56% back on average)</a:t>
+                        <a:t>Never called: repaid at the basket level (0.8% on the team outlook; 33% if markets go nowhere)</a:t>
                       </a:r>
                       <a:endParaRPr lang="en-US" sz="780" dirty="0">
                         <a:latin typeface="Arial" charset="0"/>
@@ -26343,7 +26343,7 @@
                           <a:ea typeface="Arial" pitchFamily="34" charset="-122"/>
                           <a:cs typeface="Arial" pitchFamily="34" charset="-120"/>
                         </a:rPr>
-                        <a:t>Basket +80% still pays 12.75% p.a. and is called at Y1</a:t>
+                        <a:t>Team median is 2.8× in 5 years; the note pays 12.75% p.a. and is usually called by Y1</a:t>
                       </a:r>
                       <a:endParaRPr lang="en-US" sz="780" dirty="0">
                         <a:latin typeface="Arial" charset="0"/>
@@ -26411,7 +26411,7 @@
                           <a:ea typeface="Arial" pitchFamily="34" charset="-122"/>
                           <a:cs typeface="Arial" pitchFamily="34" charset="-120"/>
                         </a:rPr>
-                        <a:t>Rest of family wealth keeps direct equity exposure</a:t>
+                        <a:t>Coupons lock in gains if the rally stalls; rest of family wealth keeps direct equity exposure</a:t>
                       </a:r>
                       <a:endParaRPr lang="en-US" sz="780" dirty="0">
                         <a:latin typeface="Arial" charset="0"/>
@@ -27285,7 +27285,7 @@
                 <a:ea typeface="Arial" pitchFamily="34" charset="-122"/>
                 <a:cs typeface="Arial" pitchFamily="34" charset="-120"/>
               </a:rPr>
-              <a:t>Coupon value moves with basket vol and correlation (fair 12.9%–15.5% for vol ±3pts): managed with listed index options and correlation trades</a:t>
+              <a:t>Coupon value moves with basket vol and correlation (fair 12.9%–15.6% for vol ±3pts): managed with listed index options and correlation trades</a:t>
             </a:r>
             <a:endParaRPr lang="en-US" sz="780" dirty="0"/>
           </a:p>
@@ -27544,7 +27544,7 @@
                 <a:ea typeface="Arial" pitchFamily="34" charset="-122"/>
                 <a:cs typeface="Arial" pitchFamily="34" charset="-120"/>
               </a:rPr>
-              <a:t>base 14.1% · vol ±3pts 12.9%–15.5% · corr ±0.15 13.2%–15.0% · equity drift −1/−2% 15.5%–17.3%. The 12.75% offer stays fundable in every case.</a:t>
+              <a:t>base 14.1% · vol ±3pts 12.9%–15.6% · corr ±0.15 13.2%–15.1% · equity drift −1/−2% 15.6%–17.4%. The 12.75% offer stays fundable in every case.</a:t>
             </a:r>
             <a:endParaRPr lang="en-US" sz="830" dirty="0"/>
           </a:p>
@@ -27881,7 +27881,7 @@
                 <a:ea typeface="Arial" pitchFamily="34" charset="-122"/>
                 <a:cs typeface="Arial" pitchFamily="34" charset="-120"/>
               </a:rPr>
-              <a:t>Inputs to refresh on Bloomberg at trade date (BVOL / OVDV for vols, CORR for correlations)</a:t>
+              <a:t>Vols and expected returns from the team risk/return app (slides 4–5); correlations and dividends to refresh on Bloomberg</a:t>
             </a:r>
             <a:endParaRPr lang="en-US" sz="850" dirty="0"/>
           </a:p>
@@ -28278,7 +28278,7 @@
                           <a:ea typeface="Arial" pitchFamily="34" charset="-122"/>
                           <a:cs typeface="Arial" pitchFamily="34" charset="-120"/>
                         </a:rPr>
-                        <a:t>2644 JP</a:t>
+                        <a:t>EWY US</a:t>
                       </a:r>
                       <a:endParaRPr lang="en-US" sz="830" dirty="0">
                         <a:latin typeface="Arial" charset="0"/>
@@ -28414,7 +28414,7 @@
                           <a:ea typeface="Arial" pitchFamily="34" charset="-122"/>
                           <a:cs typeface="Arial" pitchFamily="34" charset="-120"/>
                         </a:rPr>
-                        <a:t>EWY US</a:t>
+                        <a:t>2644 JP</a:t>
                       </a:r>
                       <a:endParaRPr lang="en-US" sz="830" dirty="0">
                         <a:latin typeface="Arial" charset="0"/>
@@ -28688,7 +28688,7 @@
                           <a:ea typeface="Arial" pitchFamily="34" charset="-122"/>
                           <a:cs typeface="Arial" pitchFamily="34" charset="-120"/>
                         </a:rPr>
-                        <a:t>32%</a:t>
+                        <a:t>18%</a:t>
                       </a:r>
                       <a:endParaRPr lang="en-US" sz="830" dirty="0">
                         <a:latin typeface="Arial" charset="0"/>
@@ -28892,7 +28892,7 @@
                           <a:ea typeface="Arial" pitchFamily="34" charset="-122"/>
                           <a:cs typeface="Arial" pitchFamily="34" charset="-120"/>
                         </a:rPr>
-                        <a:t>0.70</a:t>
+                        <a:t>0.80</a:t>
                       </a:r>
                       <a:endParaRPr lang="en-US" sz="830" dirty="0">
                         <a:latin typeface="Arial" charset="0"/>
@@ -29028,7 +29028,7 @@
                           <a:ea typeface="Arial" pitchFamily="34" charset="-122"/>
                           <a:cs typeface="Arial" pitchFamily="34" charset="-120"/>
                         </a:rPr>
-                        <a:t>0.80</a:t>
+                        <a:t>0.70</a:t>
                       </a:r>
                       <a:endParaRPr lang="en-US" sz="830" dirty="0">
                         <a:latin typeface="Arial" charset="0"/>
@@ -29097,6 +29097,1234 @@
                           <a:cs typeface="Arial" pitchFamily="34" charset="-120"/>
                         </a:rPr>
                         <a:t>0.60</a:t>
+                      </a:r>
+                      <a:endParaRPr lang="en-US" sz="830" dirty="0">
+                        <a:latin typeface="Arial" charset="0"/>
+                        <a:ea typeface="Arial" charset="0"/>
+                        <a:cs typeface="Arial" charset="0"/>
+                      </a:endParaRPr>
+                    </a:p>
+                  </a:txBody>
+                  <a:tcPr marL="38100" marR="38100" marT="25400" marB="25400" anchor="ctr">
+                    <a:lnL w="6350" cap="flat" cmpd="sng" algn="ctr">
+                      <a:solidFill>
+                        <a:srgbClr val="E3E3E3"/>
+                      </a:solidFill>
+                      <a:prstDash val="solid"/>
+                      <a:round/>
+                      <a:headEnd type="none" w="med" len="med"/>
+                      <a:tailEnd type="none" w="med" len="med"/>
+                    </a:lnL>
+                    <a:lnR w="6350" cap="flat" cmpd="sng" algn="ctr">
+                      <a:solidFill>
+                        <a:srgbClr val="E3E3E3"/>
+                      </a:solidFill>
+                      <a:prstDash val="solid"/>
+                      <a:round/>
+                      <a:headEnd type="none" w="med" len="med"/>
+                      <a:tailEnd type="none" w="med" len="med"/>
+                    </a:lnR>
+                    <a:lnT w="6350" cap="flat" cmpd="sng" algn="ctr">
+                      <a:solidFill>
+                        <a:srgbClr val="E3E3E3"/>
+                      </a:solidFill>
+                      <a:prstDash val="solid"/>
+                      <a:round/>
+                      <a:headEnd type="none" w="med" len="med"/>
+                      <a:tailEnd type="none" w="med" len="med"/>
+                    </a:lnT>
+                    <a:lnB w="6350" cap="flat" cmpd="sng" algn="ctr">
+                      <a:solidFill>
+                        <a:srgbClr val="E3E3E3"/>
+                      </a:solidFill>
+                      <a:prstDash val="solid"/>
+                      <a:round/>
+                      <a:headEnd type="none" w="med" len="med"/>
+                      <a:tailEnd type="none" w="med" len="med"/>
+                    </a:lnB>
+                    <a:solidFill>
+                      <a:srgbClr val="FFFFFF"/>
+                    </a:solidFill>
+                  </a:tcPr>
+                </a:tc>
+              </a:tr>
+              <a:tr h="267462">
+                <a:tc>
+                  <a:txBody>
+                    <a:bodyPr/>
+                    <a:lstStyle/>
+                    <a:p>
+                      <a:pPr algn="ctr" indent="0" marL="0">
+                        <a:buNone/>
+                      </a:pPr>
+                      <a:r>
+                        <a:rPr lang="en-US" sz="830" b="1" dirty="0">
+                          <a:solidFill>
+                            <a:srgbClr val="262626"/>
+                          </a:solidFill>
+                          <a:latin typeface="Arial" pitchFamily="34" charset="0"/>
+                          <a:ea typeface="Arial" pitchFamily="34" charset="-122"/>
+                          <a:cs typeface="Arial" pitchFamily="34" charset="-120"/>
+                        </a:rPr>
+                        <a:t>EWY US</a:t>
+                      </a:r>
+                      <a:endParaRPr lang="en-US" sz="830" dirty="0">
+                        <a:latin typeface="Arial" charset="0"/>
+                        <a:ea typeface="Arial" charset="0"/>
+                        <a:cs typeface="Arial" charset="0"/>
+                      </a:endParaRPr>
+                    </a:p>
+                  </a:txBody>
+                  <a:tcPr marL="38100" marR="38100" marT="25400" marB="25400" anchor="ctr">
+                    <a:lnL w="6350" cap="flat" cmpd="sng" algn="ctr">
+                      <a:solidFill>
+                        <a:srgbClr val="E3E3E3"/>
+                      </a:solidFill>
+                      <a:prstDash val="solid"/>
+                      <a:round/>
+                      <a:headEnd type="none" w="med" len="med"/>
+                      <a:tailEnd type="none" w="med" len="med"/>
+                    </a:lnL>
+                    <a:lnR w="6350" cap="flat" cmpd="sng" algn="ctr">
+                      <a:solidFill>
+                        <a:srgbClr val="E3E3E3"/>
+                      </a:solidFill>
+                      <a:prstDash val="solid"/>
+                      <a:round/>
+                      <a:headEnd type="none" w="med" len="med"/>
+                      <a:tailEnd type="none" w="med" len="med"/>
+                    </a:lnR>
+                    <a:lnT w="6350" cap="flat" cmpd="sng" algn="ctr">
+                      <a:solidFill>
+                        <a:srgbClr val="E3E3E3"/>
+                      </a:solidFill>
+                      <a:prstDash val="solid"/>
+                      <a:round/>
+                      <a:headEnd type="none" w="med" len="med"/>
+                      <a:tailEnd type="none" w="med" len="med"/>
+                    </a:lnT>
+                    <a:lnB w="6350" cap="flat" cmpd="sng" algn="ctr">
+                      <a:solidFill>
+                        <a:srgbClr val="E3E3E3"/>
+                      </a:solidFill>
+                      <a:prstDash val="solid"/>
+                      <a:round/>
+                      <a:headEnd type="none" w="med" len="med"/>
+                      <a:tailEnd type="none" w="med" len="med"/>
+                    </a:lnB>
+                    <a:solidFill>
+                      <a:srgbClr val="FFFFFF"/>
+                    </a:solidFill>
+                  </a:tcPr>
+                </a:tc>
+                <a:tc>
+                  <a:txBody>
+                    <a:bodyPr/>
+                    <a:lstStyle/>
+                    <a:p>
+                      <a:pPr algn="ctr" indent="0" marL="0">
+                        <a:buNone/>
+                      </a:pPr>
+                      <a:r>
+                        <a:rPr lang="en-US" sz="830" dirty="0">
+                          <a:solidFill>
+                            <a:srgbClr val="262626"/>
+                          </a:solidFill>
+                          <a:latin typeface="Arial" pitchFamily="34" charset="0"/>
+                          <a:ea typeface="Arial" pitchFamily="34" charset="-122"/>
+                          <a:cs typeface="Arial" pitchFamily="34" charset="-120"/>
+                        </a:rPr>
+                        <a:t>20%</a:t>
+                      </a:r>
+                      <a:endParaRPr lang="en-US" sz="830" dirty="0">
+                        <a:latin typeface="Arial" charset="0"/>
+                        <a:ea typeface="Arial" charset="0"/>
+                        <a:cs typeface="Arial" charset="0"/>
+                      </a:endParaRPr>
+                    </a:p>
+                  </a:txBody>
+                  <a:tcPr marL="38100" marR="38100" marT="25400" marB="25400" anchor="ctr">
+                    <a:lnL w="6350" cap="flat" cmpd="sng" algn="ctr">
+                      <a:solidFill>
+                        <a:srgbClr val="E3E3E3"/>
+                      </a:solidFill>
+                      <a:prstDash val="solid"/>
+                      <a:round/>
+                      <a:headEnd type="none" w="med" len="med"/>
+                      <a:tailEnd type="none" w="med" len="med"/>
+                    </a:lnL>
+                    <a:lnR w="6350" cap="flat" cmpd="sng" algn="ctr">
+                      <a:solidFill>
+                        <a:srgbClr val="E3E3E3"/>
+                      </a:solidFill>
+                      <a:prstDash val="solid"/>
+                      <a:round/>
+                      <a:headEnd type="none" w="med" len="med"/>
+                      <a:tailEnd type="none" w="med" len="med"/>
+                    </a:lnR>
+                    <a:lnT w="6350" cap="flat" cmpd="sng" algn="ctr">
+                      <a:solidFill>
+                        <a:srgbClr val="E3E3E3"/>
+                      </a:solidFill>
+                      <a:prstDash val="solid"/>
+                      <a:round/>
+                      <a:headEnd type="none" w="med" len="med"/>
+                      <a:tailEnd type="none" w="med" len="med"/>
+                    </a:lnT>
+                    <a:lnB w="6350" cap="flat" cmpd="sng" algn="ctr">
+                      <a:solidFill>
+                        <a:srgbClr val="E3E3E3"/>
+                      </a:solidFill>
+                      <a:prstDash val="solid"/>
+                      <a:round/>
+                      <a:headEnd type="none" w="med" len="med"/>
+                      <a:tailEnd type="none" w="med" len="med"/>
+                    </a:lnB>
+                    <a:solidFill>
+                      <a:srgbClr val="FFFFFF"/>
+                    </a:solidFill>
+                  </a:tcPr>
+                </a:tc>
+                <a:tc>
+                  <a:txBody>
+                    <a:bodyPr/>
+                    <a:lstStyle/>
+                    <a:p>
+                      <a:pPr algn="ctr" indent="0" marL="0">
+                        <a:buNone/>
+                      </a:pPr>
+                      <a:r>
+                        <a:rPr lang="en-US" sz="830" dirty="0">
+                          <a:solidFill>
+                            <a:srgbClr val="262626"/>
+                          </a:solidFill>
+                          <a:latin typeface="Arial" pitchFamily="34" charset="0"/>
+                          <a:ea typeface="Arial" pitchFamily="34" charset="-122"/>
+                          <a:cs typeface="Arial" pitchFamily="34" charset="-120"/>
+                        </a:rPr>
+                        <a:t>49%</a:t>
+                      </a:r>
+                      <a:endParaRPr lang="en-US" sz="830" dirty="0">
+                        <a:latin typeface="Arial" charset="0"/>
+                        <a:ea typeface="Arial" charset="0"/>
+                        <a:cs typeface="Arial" charset="0"/>
+                      </a:endParaRPr>
+                    </a:p>
+                  </a:txBody>
+                  <a:tcPr marL="38100" marR="38100" marT="25400" marB="25400" anchor="ctr">
+                    <a:lnL w="6350" cap="flat" cmpd="sng" algn="ctr">
+                      <a:solidFill>
+                        <a:srgbClr val="E3E3E3"/>
+                      </a:solidFill>
+                      <a:prstDash val="solid"/>
+                      <a:round/>
+                      <a:headEnd type="none" w="med" len="med"/>
+                      <a:tailEnd type="none" w="med" len="med"/>
+                    </a:lnL>
+                    <a:lnR w="6350" cap="flat" cmpd="sng" algn="ctr">
+                      <a:solidFill>
+                        <a:srgbClr val="E3E3E3"/>
+                      </a:solidFill>
+                      <a:prstDash val="solid"/>
+                      <a:round/>
+                      <a:headEnd type="none" w="med" len="med"/>
+                      <a:tailEnd type="none" w="med" len="med"/>
+                    </a:lnR>
+                    <a:lnT w="6350" cap="flat" cmpd="sng" algn="ctr">
+                      <a:solidFill>
+                        <a:srgbClr val="E3E3E3"/>
+                      </a:solidFill>
+                      <a:prstDash val="solid"/>
+                      <a:round/>
+                      <a:headEnd type="none" w="med" len="med"/>
+                      <a:tailEnd type="none" w="med" len="med"/>
+                    </a:lnT>
+                    <a:lnB w="6350" cap="flat" cmpd="sng" algn="ctr">
+                      <a:solidFill>
+                        <a:srgbClr val="E3E3E3"/>
+                      </a:solidFill>
+                      <a:prstDash val="solid"/>
+                      <a:round/>
+                      <a:headEnd type="none" w="med" len="med"/>
+                      <a:tailEnd type="none" w="med" len="med"/>
+                    </a:lnB>
+                    <a:solidFill>
+                      <a:srgbClr val="FFFFFF"/>
+                    </a:solidFill>
+                  </a:tcPr>
+                </a:tc>
+                <a:tc>
+                  <a:txBody>
+                    <a:bodyPr/>
+                    <a:lstStyle/>
+                    <a:p>
+                      <a:pPr algn="ctr" indent="0" marL="0">
+                        <a:buNone/>
+                      </a:pPr>
+                      <a:r>
+                        <a:rPr lang="en-US" sz="830" dirty="0">
+                          <a:solidFill>
+                            <a:srgbClr val="262626"/>
+                          </a:solidFill>
+                          <a:latin typeface="Arial" pitchFamily="34" charset="0"/>
+                          <a:ea typeface="Arial" pitchFamily="34" charset="-122"/>
+                          <a:cs typeface="Arial" pitchFamily="34" charset="-120"/>
+                        </a:rPr>
+                        <a:t>1.2%</a:t>
+                      </a:r>
+                      <a:endParaRPr lang="en-US" sz="830" dirty="0">
+                        <a:latin typeface="Arial" charset="0"/>
+                        <a:ea typeface="Arial" charset="0"/>
+                        <a:cs typeface="Arial" charset="0"/>
+                      </a:endParaRPr>
+                    </a:p>
+                  </a:txBody>
+                  <a:tcPr marL="38100" marR="38100" marT="25400" marB="25400" anchor="ctr">
+                    <a:lnL w="6350" cap="flat" cmpd="sng" algn="ctr">
+                      <a:solidFill>
+                        <a:srgbClr val="E3E3E3"/>
+                      </a:solidFill>
+                      <a:prstDash val="solid"/>
+                      <a:round/>
+                      <a:headEnd type="none" w="med" len="med"/>
+                      <a:tailEnd type="none" w="med" len="med"/>
+                    </a:lnL>
+                    <a:lnR w="6350" cap="flat" cmpd="sng" algn="ctr">
+                      <a:solidFill>
+                        <a:srgbClr val="E3E3E3"/>
+                      </a:solidFill>
+                      <a:prstDash val="solid"/>
+                      <a:round/>
+                      <a:headEnd type="none" w="med" len="med"/>
+                      <a:tailEnd type="none" w="med" len="med"/>
+                    </a:lnR>
+                    <a:lnT w="6350" cap="flat" cmpd="sng" algn="ctr">
+                      <a:solidFill>
+                        <a:srgbClr val="E3E3E3"/>
+                      </a:solidFill>
+                      <a:prstDash val="solid"/>
+                      <a:round/>
+                      <a:headEnd type="none" w="med" len="med"/>
+                      <a:tailEnd type="none" w="med" len="med"/>
+                    </a:lnT>
+                    <a:lnB w="6350" cap="flat" cmpd="sng" algn="ctr">
+                      <a:solidFill>
+                        <a:srgbClr val="E3E3E3"/>
+                      </a:solidFill>
+                      <a:prstDash val="solid"/>
+                      <a:round/>
+                      <a:headEnd type="none" w="med" len="med"/>
+                      <a:tailEnd type="none" w="med" len="med"/>
+                    </a:lnB>
+                    <a:solidFill>
+                      <a:srgbClr val="FFFFFF"/>
+                    </a:solidFill>
+                  </a:tcPr>
+                </a:tc>
+                <a:tc>
+                  <a:txBody>
+                    <a:bodyPr/>
+                    <a:lstStyle/>
+                    <a:p>
+                      <a:pPr algn="ctr" indent="0" marL="0">
+                        <a:buNone/>
+                      </a:pPr>
+                      <a:r>
+                        <a:rPr lang="en-US" sz="830" dirty="0">
+                          <a:solidFill>
+                            <a:srgbClr val="262626"/>
+                          </a:solidFill>
+                          <a:latin typeface="Arial" pitchFamily="34" charset="0"/>
+                          <a:ea typeface="Arial" pitchFamily="34" charset="-122"/>
+                          <a:cs typeface="Arial" pitchFamily="34" charset="-120"/>
+                        </a:rPr>
+                        <a:t>0.80</a:t>
+                      </a:r>
+                      <a:endParaRPr lang="en-US" sz="830" dirty="0">
+                        <a:latin typeface="Arial" charset="0"/>
+                        <a:ea typeface="Arial" charset="0"/>
+                        <a:cs typeface="Arial" charset="0"/>
+                      </a:endParaRPr>
+                    </a:p>
+                  </a:txBody>
+                  <a:tcPr marL="38100" marR="38100" marT="25400" marB="25400" anchor="ctr">
+                    <a:lnL w="6350" cap="flat" cmpd="sng" algn="ctr">
+                      <a:solidFill>
+                        <a:srgbClr val="E3E3E3"/>
+                      </a:solidFill>
+                      <a:prstDash val="solid"/>
+                      <a:round/>
+                      <a:headEnd type="none" w="med" len="med"/>
+                      <a:tailEnd type="none" w="med" len="med"/>
+                    </a:lnL>
+                    <a:lnR w="6350" cap="flat" cmpd="sng" algn="ctr">
+                      <a:solidFill>
+                        <a:srgbClr val="E3E3E3"/>
+                      </a:solidFill>
+                      <a:prstDash val="solid"/>
+                      <a:round/>
+                      <a:headEnd type="none" w="med" len="med"/>
+                      <a:tailEnd type="none" w="med" len="med"/>
+                    </a:lnR>
+                    <a:lnT w="6350" cap="flat" cmpd="sng" algn="ctr">
+                      <a:solidFill>
+                        <a:srgbClr val="E3E3E3"/>
+                      </a:solidFill>
+                      <a:prstDash val="solid"/>
+                      <a:round/>
+                      <a:headEnd type="none" w="med" len="med"/>
+                      <a:tailEnd type="none" w="med" len="med"/>
+                    </a:lnT>
+                    <a:lnB w="6350" cap="flat" cmpd="sng" algn="ctr">
+                      <a:solidFill>
+                        <a:srgbClr val="E3E3E3"/>
+                      </a:solidFill>
+                      <a:prstDash val="solid"/>
+                      <a:round/>
+                      <a:headEnd type="none" w="med" len="med"/>
+                      <a:tailEnd type="none" w="med" len="med"/>
+                    </a:lnB>
+                    <a:solidFill>
+                      <a:srgbClr val="FFFFFF"/>
+                    </a:solidFill>
+                  </a:tcPr>
+                </a:tc>
+                <a:tc>
+                  <a:txBody>
+                    <a:bodyPr/>
+                    <a:lstStyle/>
+                    <a:p>
+                      <a:pPr algn="ctr" indent="0" marL="0">
+                        <a:buNone/>
+                      </a:pPr>
+                      <a:r>
+                        <a:rPr lang="en-US" sz="830" dirty="0">
+                          <a:solidFill>
+                            <a:srgbClr val="262626"/>
+                          </a:solidFill>
+                          <a:latin typeface="Arial" pitchFamily="34" charset="0"/>
+                          <a:ea typeface="Arial" pitchFamily="34" charset="-122"/>
+                          <a:cs typeface="Arial" pitchFamily="34" charset="-120"/>
+                        </a:rPr>
+                        <a:t>1.00</a:t>
+                      </a:r>
+                      <a:endParaRPr lang="en-US" sz="830" dirty="0">
+                        <a:latin typeface="Arial" charset="0"/>
+                        <a:ea typeface="Arial" charset="0"/>
+                        <a:cs typeface="Arial" charset="0"/>
+                      </a:endParaRPr>
+                    </a:p>
+                  </a:txBody>
+                  <a:tcPr marL="38100" marR="38100" marT="25400" marB="25400" anchor="ctr">
+                    <a:lnL w="6350" cap="flat" cmpd="sng" algn="ctr">
+                      <a:solidFill>
+                        <a:srgbClr val="E3E3E3"/>
+                      </a:solidFill>
+                      <a:prstDash val="solid"/>
+                      <a:round/>
+                      <a:headEnd type="none" w="med" len="med"/>
+                      <a:tailEnd type="none" w="med" len="med"/>
+                    </a:lnL>
+                    <a:lnR w="6350" cap="flat" cmpd="sng" algn="ctr">
+                      <a:solidFill>
+                        <a:srgbClr val="E3E3E3"/>
+                      </a:solidFill>
+                      <a:prstDash val="solid"/>
+                      <a:round/>
+                      <a:headEnd type="none" w="med" len="med"/>
+                      <a:tailEnd type="none" w="med" len="med"/>
+                    </a:lnR>
+                    <a:lnT w="6350" cap="flat" cmpd="sng" algn="ctr">
+                      <a:solidFill>
+                        <a:srgbClr val="E3E3E3"/>
+                      </a:solidFill>
+                      <a:prstDash val="solid"/>
+                      <a:round/>
+                      <a:headEnd type="none" w="med" len="med"/>
+                      <a:tailEnd type="none" w="med" len="med"/>
+                    </a:lnT>
+                    <a:lnB w="6350" cap="flat" cmpd="sng" algn="ctr">
+                      <a:solidFill>
+                        <a:srgbClr val="E3E3E3"/>
+                      </a:solidFill>
+                      <a:prstDash val="solid"/>
+                      <a:round/>
+                      <a:headEnd type="none" w="med" len="med"/>
+                      <a:tailEnd type="none" w="med" len="med"/>
+                    </a:lnB>
+                    <a:solidFill>
+                      <a:srgbClr val="FFFFFF"/>
+                    </a:solidFill>
+                  </a:tcPr>
+                </a:tc>
+                <a:tc>
+                  <a:txBody>
+                    <a:bodyPr/>
+                    <a:lstStyle/>
+                    <a:p>
+                      <a:pPr algn="ctr" indent="0" marL="0">
+                        <a:buNone/>
+                      </a:pPr>
+                      <a:r>
+                        <a:rPr lang="en-US" sz="830" dirty="0">
+                          <a:solidFill>
+                            <a:srgbClr val="262626"/>
+                          </a:solidFill>
+                          <a:latin typeface="Arial" pitchFamily="34" charset="0"/>
+                          <a:ea typeface="Arial" pitchFamily="34" charset="-122"/>
+                          <a:cs typeface="Arial" pitchFamily="34" charset="-120"/>
+                        </a:rPr>
+                        <a:t>0.70</a:t>
+                      </a:r>
+                      <a:endParaRPr lang="en-US" sz="830" dirty="0">
+                        <a:latin typeface="Arial" charset="0"/>
+                        <a:ea typeface="Arial" charset="0"/>
+                        <a:cs typeface="Arial" charset="0"/>
+                      </a:endParaRPr>
+                    </a:p>
+                  </a:txBody>
+                  <a:tcPr marL="38100" marR="38100" marT="25400" marB="25400" anchor="ctr">
+                    <a:lnL w="6350" cap="flat" cmpd="sng" algn="ctr">
+                      <a:solidFill>
+                        <a:srgbClr val="E3E3E3"/>
+                      </a:solidFill>
+                      <a:prstDash val="solid"/>
+                      <a:round/>
+                      <a:headEnd type="none" w="med" len="med"/>
+                      <a:tailEnd type="none" w="med" len="med"/>
+                    </a:lnL>
+                    <a:lnR w="6350" cap="flat" cmpd="sng" algn="ctr">
+                      <a:solidFill>
+                        <a:srgbClr val="E3E3E3"/>
+                      </a:solidFill>
+                      <a:prstDash val="solid"/>
+                      <a:round/>
+                      <a:headEnd type="none" w="med" len="med"/>
+                      <a:tailEnd type="none" w="med" len="med"/>
+                    </a:lnR>
+                    <a:lnT w="6350" cap="flat" cmpd="sng" algn="ctr">
+                      <a:solidFill>
+                        <a:srgbClr val="E3E3E3"/>
+                      </a:solidFill>
+                      <a:prstDash val="solid"/>
+                      <a:round/>
+                      <a:headEnd type="none" w="med" len="med"/>
+                      <a:tailEnd type="none" w="med" len="med"/>
+                    </a:lnT>
+                    <a:lnB w="6350" cap="flat" cmpd="sng" algn="ctr">
+                      <a:solidFill>
+                        <a:srgbClr val="E3E3E3"/>
+                      </a:solidFill>
+                      <a:prstDash val="solid"/>
+                      <a:round/>
+                      <a:headEnd type="none" w="med" len="med"/>
+                      <a:tailEnd type="none" w="med" len="med"/>
+                    </a:lnB>
+                    <a:solidFill>
+                      <a:srgbClr val="FFFFFF"/>
+                    </a:solidFill>
+                  </a:tcPr>
+                </a:tc>
+                <a:tc>
+                  <a:txBody>
+                    <a:bodyPr/>
+                    <a:lstStyle/>
+                    <a:p>
+                      <a:pPr algn="ctr" indent="0" marL="0">
+                        <a:buNone/>
+                      </a:pPr>
+                      <a:r>
+                        <a:rPr lang="en-US" sz="830" dirty="0">
+                          <a:solidFill>
+                            <a:srgbClr val="262626"/>
+                          </a:solidFill>
+                          <a:latin typeface="Arial" pitchFamily="34" charset="0"/>
+                          <a:ea typeface="Arial" pitchFamily="34" charset="-122"/>
+                          <a:cs typeface="Arial" pitchFamily="34" charset="-120"/>
+                        </a:rPr>
+                        <a:t>0.55</a:t>
+                      </a:r>
+                      <a:endParaRPr lang="en-US" sz="830" dirty="0">
+                        <a:latin typeface="Arial" charset="0"/>
+                        <a:ea typeface="Arial" charset="0"/>
+                        <a:cs typeface="Arial" charset="0"/>
+                      </a:endParaRPr>
+                    </a:p>
+                  </a:txBody>
+                  <a:tcPr marL="38100" marR="38100" marT="25400" marB="25400" anchor="ctr">
+                    <a:lnL w="6350" cap="flat" cmpd="sng" algn="ctr">
+                      <a:solidFill>
+                        <a:srgbClr val="E3E3E3"/>
+                      </a:solidFill>
+                      <a:prstDash val="solid"/>
+                      <a:round/>
+                      <a:headEnd type="none" w="med" len="med"/>
+                      <a:tailEnd type="none" w="med" len="med"/>
+                    </a:lnL>
+                    <a:lnR w="6350" cap="flat" cmpd="sng" algn="ctr">
+                      <a:solidFill>
+                        <a:srgbClr val="E3E3E3"/>
+                      </a:solidFill>
+                      <a:prstDash val="solid"/>
+                      <a:round/>
+                      <a:headEnd type="none" w="med" len="med"/>
+                      <a:tailEnd type="none" w="med" len="med"/>
+                    </a:lnR>
+                    <a:lnT w="6350" cap="flat" cmpd="sng" algn="ctr">
+                      <a:solidFill>
+                        <a:srgbClr val="E3E3E3"/>
+                      </a:solidFill>
+                      <a:prstDash val="solid"/>
+                      <a:round/>
+                      <a:headEnd type="none" w="med" len="med"/>
+                      <a:tailEnd type="none" w="med" len="med"/>
+                    </a:lnT>
+                    <a:lnB w="6350" cap="flat" cmpd="sng" algn="ctr">
+                      <a:solidFill>
+                        <a:srgbClr val="E3E3E3"/>
+                      </a:solidFill>
+                      <a:prstDash val="solid"/>
+                      <a:round/>
+                      <a:headEnd type="none" w="med" len="med"/>
+                      <a:tailEnd type="none" w="med" len="med"/>
+                    </a:lnB>
+                    <a:solidFill>
+                      <a:srgbClr val="FFFFFF"/>
+                    </a:solidFill>
+                  </a:tcPr>
+                </a:tc>
+                <a:tc>
+                  <a:txBody>
+                    <a:bodyPr/>
+                    <a:lstStyle/>
+                    <a:p>
+                      <a:pPr algn="ctr" indent="0" marL="0">
+                        <a:buNone/>
+                      </a:pPr>
+                      <a:r>
+                        <a:rPr lang="en-US" sz="830" dirty="0">
+                          <a:solidFill>
+                            <a:srgbClr val="262626"/>
+                          </a:solidFill>
+                          <a:latin typeface="Arial" pitchFamily="34" charset="0"/>
+                          <a:ea typeface="Arial" pitchFamily="34" charset="-122"/>
+                          <a:cs typeface="Arial" pitchFamily="34" charset="-120"/>
+                        </a:rPr>
+                        <a:t>0.55</a:t>
+                      </a:r>
+                      <a:endParaRPr lang="en-US" sz="830" dirty="0">
+                        <a:latin typeface="Arial" charset="0"/>
+                        <a:ea typeface="Arial" charset="0"/>
+                        <a:cs typeface="Arial" charset="0"/>
+                      </a:endParaRPr>
+                    </a:p>
+                  </a:txBody>
+                  <a:tcPr marL="38100" marR="38100" marT="25400" marB="25400" anchor="ctr">
+                    <a:lnL w="6350" cap="flat" cmpd="sng" algn="ctr">
+                      <a:solidFill>
+                        <a:srgbClr val="E3E3E3"/>
+                      </a:solidFill>
+                      <a:prstDash val="solid"/>
+                      <a:round/>
+                      <a:headEnd type="none" w="med" len="med"/>
+                      <a:tailEnd type="none" w="med" len="med"/>
+                    </a:lnL>
+                    <a:lnR w="6350" cap="flat" cmpd="sng" algn="ctr">
+                      <a:solidFill>
+                        <a:srgbClr val="E3E3E3"/>
+                      </a:solidFill>
+                      <a:prstDash val="solid"/>
+                      <a:round/>
+                      <a:headEnd type="none" w="med" len="med"/>
+                      <a:tailEnd type="none" w="med" len="med"/>
+                    </a:lnR>
+                    <a:lnT w="6350" cap="flat" cmpd="sng" algn="ctr">
+                      <a:solidFill>
+                        <a:srgbClr val="E3E3E3"/>
+                      </a:solidFill>
+                      <a:prstDash val="solid"/>
+                      <a:round/>
+                      <a:headEnd type="none" w="med" len="med"/>
+                      <a:tailEnd type="none" w="med" len="med"/>
+                    </a:lnT>
+                    <a:lnB w="6350" cap="flat" cmpd="sng" algn="ctr">
+                      <a:solidFill>
+                        <a:srgbClr val="E3E3E3"/>
+                      </a:solidFill>
+                      <a:prstDash val="solid"/>
+                      <a:round/>
+                      <a:headEnd type="none" w="med" len="med"/>
+                      <a:tailEnd type="none" w="med" len="med"/>
+                    </a:lnB>
+                    <a:solidFill>
+                      <a:srgbClr val="FFFFFF"/>
+                    </a:solidFill>
+                  </a:tcPr>
+                </a:tc>
+              </a:tr>
+              <a:tr h="267462">
+                <a:tc>
+                  <a:txBody>
+                    <a:bodyPr/>
+                    <a:lstStyle/>
+                    <a:p>
+                      <a:pPr algn="ctr" indent="0" marL="0">
+                        <a:buNone/>
+                      </a:pPr>
+                      <a:r>
+                        <a:rPr lang="en-US" sz="830" b="1" dirty="0">
+                          <a:solidFill>
+                            <a:srgbClr val="262626"/>
+                          </a:solidFill>
+                          <a:latin typeface="Arial" pitchFamily="34" charset="0"/>
+                          <a:ea typeface="Arial" pitchFamily="34" charset="-122"/>
+                          <a:cs typeface="Arial" pitchFamily="34" charset="-120"/>
+                        </a:rPr>
+                        <a:t>EWT US</a:t>
+                      </a:r>
+                      <a:endParaRPr lang="en-US" sz="830" dirty="0">
+                        <a:latin typeface="Arial" charset="0"/>
+                        <a:ea typeface="Arial" charset="0"/>
+                        <a:cs typeface="Arial" charset="0"/>
+                      </a:endParaRPr>
+                    </a:p>
+                  </a:txBody>
+                  <a:tcPr marL="38100" marR="38100" marT="25400" marB="25400" anchor="ctr">
+                    <a:lnL w="6350" cap="flat" cmpd="sng" algn="ctr">
+                      <a:solidFill>
+                        <a:srgbClr val="E3E3E3"/>
+                      </a:solidFill>
+                      <a:prstDash val="solid"/>
+                      <a:round/>
+                      <a:headEnd type="none" w="med" len="med"/>
+                      <a:tailEnd type="none" w="med" len="med"/>
+                    </a:lnL>
+                    <a:lnR w="6350" cap="flat" cmpd="sng" algn="ctr">
+                      <a:solidFill>
+                        <a:srgbClr val="E3E3E3"/>
+                      </a:solidFill>
+                      <a:prstDash val="solid"/>
+                      <a:round/>
+                      <a:headEnd type="none" w="med" len="med"/>
+                      <a:tailEnd type="none" w="med" len="med"/>
+                    </a:lnR>
+                    <a:lnT w="6350" cap="flat" cmpd="sng" algn="ctr">
+                      <a:solidFill>
+                        <a:srgbClr val="E3E3E3"/>
+                      </a:solidFill>
+                      <a:prstDash val="solid"/>
+                      <a:round/>
+                      <a:headEnd type="none" w="med" len="med"/>
+                      <a:tailEnd type="none" w="med" len="med"/>
+                    </a:lnT>
+                    <a:lnB w="6350" cap="flat" cmpd="sng" algn="ctr">
+                      <a:solidFill>
+                        <a:srgbClr val="E3E3E3"/>
+                      </a:solidFill>
+                      <a:prstDash val="solid"/>
+                      <a:round/>
+                      <a:headEnd type="none" w="med" len="med"/>
+                      <a:tailEnd type="none" w="med" len="med"/>
+                    </a:lnB>
+                    <a:solidFill>
+                      <a:srgbClr val="FFFFFF"/>
+                    </a:solidFill>
+                  </a:tcPr>
+                </a:tc>
+                <a:tc>
+                  <a:txBody>
+                    <a:bodyPr/>
+                    <a:lstStyle/>
+                    <a:p>
+                      <a:pPr algn="ctr" indent="0" marL="0">
+                        <a:buNone/>
+                      </a:pPr>
+                      <a:r>
+                        <a:rPr lang="en-US" sz="830" dirty="0">
+                          <a:solidFill>
+                            <a:srgbClr val="262626"/>
+                          </a:solidFill>
+                          <a:latin typeface="Arial" pitchFamily="34" charset="0"/>
+                          <a:ea typeface="Arial" pitchFamily="34" charset="-122"/>
+                          <a:cs typeface="Arial" pitchFamily="34" charset="-120"/>
+                        </a:rPr>
+                        <a:t>15%</a:t>
+                      </a:r>
+                      <a:endParaRPr lang="en-US" sz="830" dirty="0">
+                        <a:latin typeface="Arial" charset="0"/>
+                        <a:ea typeface="Arial" charset="0"/>
+                        <a:cs typeface="Arial" charset="0"/>
+                      </a:endParaRPr>
+                    </a:p>
+                  </a:txBody>
+                  <a:tcPr marL="38100" marR="38100" marT="25400" marB="25400" anchor="ctr">
+                    <a:lnL w="6350" cap="flat" cmpd="sng" algn="ctr">
+                      <a:solidFill>
+                        <a:srgbClr val="E3E3E3"/>
+                      </a:solidFill>
+                      <a:prstDash val="solid"/>
+                      <a:round/>
+                      <a:headEnd type="none" w="med" len="med"/>
+                      <a:tailEnd type="none" w="med" len="med"/>
+                    </a:lnL>
+                    <a:lnR w="6350" cap="flat" cmpd="sng" algn="ctr">
+                      <a:solidFill>
+                        <a:srgbClr val="E3E3E3"/>
+                      </a:solidFill>
+                      <a:prstDash val="solid"/>
+                      <a:round/>
+                      <a:headEnd type="none" w="med" len="med"/>
+                      <a:tailEnd type="none" w="med" len="med"/>
+                    </a:lnR>
+                    <a:lnT w="6350" cap="flat" cmpd="sng" algn="ctr">
+                      <a:solidFill>
+                        <a:srgbClr val="E3E3E3"/>
+                      </a:solidFill>
+                      <a:prstDash val="solid"/>
+                      <a:round/>
+                      <a:headEnd type="none" w="med" len="med"/>
+                      <a:tailEnd type="none" w="med" len="med"/>
+                    </a:lnT>
+                    <a:lnB w="6350" cap="flat" cmpd="sng" algn="ctr">
+                      <a:solidFill>
+                        <a:srgbClr val="E3E3E3"/>
+                      </a:solidFill>
+                      <a:prstDash val="solid"/>
+                      <a:round/>
+                      <a:headEnd type="none" w="med" len="med"/>
+                      <a:tailEnd type="none" w="med" len="med"/>
+                    </a:lnB>
+                    <a:solidFill>
+                      <a:srgbClr val="FFFFFF"/>
+                    </a:solidFill>
+                  </a:tcPr>
+                </a:tc>
+                <a:tc>
+                  <a:txBody>
+                    <a:bodyPr/>
+                    <a:lstStyle/>
+                    <a:p>
+                      <a:pPr algn="ctr" indent="0" marL="0">
+                        <a:buNone/>
+                      </a:pPr>
+                      <a:r>
+                        <a:rPr lang="en-US" sz="830" dirty="0">
+                          <a:solidFill>
+                            <a:srgbClr val="262626"/>
+                          </a:solidFill>
+                          <a:latin typeface="Arial" pitchFamily="34" charset="0"/>
+                          <a:ea typeface="Arial" pitchFamily="34" charset="-122"/>
+                          <a:cs typeface="Arial" pitchFamily="34" charset="-120"/>
+                        </a:rPr>
+                        <a:t>36%</a:t>
+                      </a:r>
+                      <a:endParaRPr lang="en-US" sz="830" dirty="0">
+                        <a:latin typeface="Arial" charset="0"/>
+                        <a:ea typeface="Arial" charset="0"/>
+                        <a:cs typeface="Arial" charset="0"/>
+                      </a:endParaRPr>
+                    </a:p>
+                  </a:txBody>
+                  <a:tcPr marL="38100" marR="38100" marT="25400" marB="25400" anchor="ctr">
+                    <a:lnL w="6350" cap="flat" cmpd="sng" algn="ctr">
+                      <a:solidFill>
+                        <a:srgbClr val="E3E3E3"/>
+                      </a:solidFill>
+                      <a:prstDash val="solid"/>
+                      <a:round/>
+                      <a:headEnd type="none" w="med" len="med"/>
+                      <a:tailEnd type="none" w="med" len="med"/>
+                    </a:lnL>
+                    <a:lnR w="6350" cap="flat" cmpd="sng" algn="ctr">
+                      <a:solidFill>
+                        <a:srgbClr val="E3E3E3"/>
+                      </a:solidFill>
+                      <a:prstDash val="solid"/>
+                      <a:round/>
+                      <a:headEnd type="none" w="med" len="med"/>
+                      <a:tailEnd type="none" w="med" len="med"/>
+                    </a:lnR>
+                    <a:lnT w="6350" cap="flat" cmpd="sng" algn="ctr">
+                      <a:solidFill>
+                        <a:srgbClr val="E3E3E3"/>
+                      </a:solidFill>
+                      <a:prstDash val="solid"/>
+                      <a:round/>
+                      <a:headEnd type="none" w="med" len="med"/>
+                      <a:tailEnd type="none" w="med" len="med"/>
+                    </a:lnT>
+                    <a:lnB w="6350" cap="flat" cmpd="sng" algn="ctr">
+                      <a:solidFill>
+                        <a:srgbClr val="E3E3E3"/>
+                      </a:solidFill>
+                      <a:prstDash val="solid"/>
+                      <a:round/>
+                      <a:headEnd type="none" w="med" len="med"/>
+                      <a:tailEnd type="none" w="med" len="med"/>
+                    </a:lnB>
+                    <a:solidFill>
+                      <a:srgbClr val="FFFFFF"/>
+                    </a:solidFill>
+                  </a:tcPr>
+                </a:tc>
+                <a:tc>
+                  <a:txBody>
+                    <a:bodyPr/>
+                    <a:lstStyle/>
+                    <a:p>
+                      <a:pPr algn="ctr" indent="0" marL="0">
+                        <a:buNone/>
+                      </a:pPr>
+                      <a:r>
+                        <a:rPr lang="en-US" sz="830" dirty="0">
+                          <a:solidFill>
+                            <a:srgbClr val="262626"/>
+                          </a:solidFill>
+                          <a:latin typeface="Arial" pitchFamily="34" charset="0"/>
+                          <a:ea typeface="Arial" pitchFamily="34" charset="-122"/>
+                          <a:cs typeface="Arial" pitchFamily="34" charset="-120"/>
+                        </a:rPr>
+                        <a:t>2.6%</a:t>
+                      </a:r>
+                      <a:endParaRPr lang="en-US" sz="830" dirty="0">
+                        <a:latin typeface="Arial" charset="0"/>
+                        <a:ea typeface="Arial" charset="0"/>
+                        <a:cs typeface="Arial" charset="0"/>
+                      </a:endParaRPr>
+                    </a:p>
+                  </a:txBody>
+                  <a:tcPr marL="38100" marR="38100" marT="25400" marB="25400" anchor="ctr">
+                    <a:lnL w="6350" cap="flat" cmpd="sng" algn="ctr">
+                      <a:solidFill>
+                        <a:srgbClr val="E3E3E3"/>
+                      </a:solidFill>
+                      <a:prstDash val="solid"/>
+                      <a:round/>
+                      <a:headEnd type="none" w="med" len="med"/>
+                      <a:tailEnd type="none" w="med" len="med"/>
+                    </a:lnL>
+                    <a:lnR w="6350" cap="flat" cmpd="sng" algn="ctr">
+                      <a:solidFill>
+                        <a:srgbClr val="E3E3E3"/>
+                      </a:solidFill>
+                      <a:prstDash val="solid"/>
+                      <a:round/>
+                      <a:headEnd type="none" w="med" len="med"/>
+                      <a:tailEnd type="none" w="med" len="med"/>
+                    </a:lnR>
+                    <a:lnT w="6350" cap="flat" cmpd="sng" algn="ctr">
+                      <a:solidFill>
+                        <a:srgbClr val="E3E3E3"/>
+                      </a:solidFill>
+                      <a:prstDash val="solid"/>
+                      <a:round/>
+                      <a:headEnd type="none" w="med" len="med"/>
+                      <a:tailEnd type="none" w="med" len="med"/>
+                    </a:lnT>
+                    <a:lnB w="6350" cap="flat" cmpd="sng" algn="ctr">
+                      <a:solidFill>
+                        <a:srgbClr val="E3E3E3"/>
+                      </a:solidFill>
+                      <a:prstDash val="solid"/>
+                      <a:round/>
+                      <a:headEnd type="none" w="med" len="med"/>
+                      <a:tailEnd type="none" w="med" len="med"/>
+                    </a:lnB>
+                    <a:solidFill>
+                      <a:srgbClr val="FFFFFF"/>
+                    </a:solidFill>
+                  </a:tcPr>
+                </a:tc>
+                <a:tc>
+                  <a:txBody>
+                    <a:bodyPr/>
+                    <a:lstStyle/>
+                    <a:p>
+                      <a:pPr algn="ctr" indent="0" marL="0">
+                        <a:buNone/>
+                      </a:pPr>
+                      <a:r>
+                        <a:rPr lang="en-US" sz="830" dirty="0">
+                          <a:solidFill>
+                            <a:srgbClr val="262626"/>
+                          </a:solidFill>
+                          <a:latin typeface="Arial" pitchFamily="34" charset="0"/>
+                          <a:ea typeface="Arial" pitchFamily="34" charset="-122"/>
+                          <a:cs typeface="Arial" pitchFamily="34" charset="-120"/>
+                        </a:rPr>
+                        <a:t>0.85</a:t>
+                      </a:r>
+                      <a:endParaRPr lang="en-US" sz="830" dirty="0">
+                        <a:latin typeface="Arial" charset="0"/>
+                        <a:ea typeface="Arial" charset="0"/>
+                        <a:cs typeface="Arial" charset="0"/>
+                      </a:endParaRPr>
+                    </a:p>
+                  </a:txBody>
+                  <a:tcPr marL="38100" marR="38100" marT="25400" marB="25400" anchor="ctr">
+                    <a:lnL w="6350" cap="flat" cmpd="sng" algn="ctr">
+                      <a:solidFill>
+                        <a:srgbClr val="E3E3E3"/>
+                      </a:solidFill>
+                      <a:prstDash val="solid"/>
+                      <a:round/>
+                      <a:headEnd type="none" w="med" len="med"/>
+                      <a:tailEnd type="none" w="med" len="med"/>
+                    </a:lnL>
+                    <a:lnR w="6350" cap="flat" cmpd="sng" algn="ctr">
+                      <a:solidFill>
+                        <a:srgbClr val="E3E3E3"/>
+                      </a:solidFill>
+                      <a:prstDash val="solid"/>
+                      <a:round/>
+                      <a:headEnd type="none" w="med" len="med"/>
+                      <a:tailEnd type="none" w="med" len="med"/>
+                    </a:lnR>
+                    <a:lnT w="6350" cap="flat" cmpd="sng" algn="ctr">
+                      <a:solidFill>
+                        <a:srgbClr val="E3E3E3"/>
+                      </a:solidFill>
+                      <a:prstDash val="solid"/>
+                      <a:round/>
+                      <a:headEnd type="none" w="med" len="med"/>
+                      <a:tailEnd type="none" w="med" len="med"/>
+                    </a:lnT>
+                    <a:lnB w="6350" cap="flat" cmpd="sng" algn="ctr">
+                      <a:solidFill>
+                        <a:srgbClr val="E3E3E3"/>
+                      </a:solidFill>
+                      <a:prstDash val="solid"/>
+                      <a:round/>
+                      <a:headEnd type="none" w="med" len="med"/>
+                      <a:tailEnd type="none" w="med" len="med"/>
+                    </a:lnB>
+                    <a:solidFill>
+                      <a:srgbClr val="FFFFFF"/>
+                    </a:solidFill>
+                  </a:tcPr>
+                </a:tc>
+                <a:tc>
+                  <a:txBody>
+                    <a:bodyPr/>
+                    <a:lstStyle/>
+                    <a:p>
+                      <a:pPr algn="ctr" indent="0" marL="0">
+                        <a:buNone/>
+                      </a:pPr>
+                      <a:r>
+                        <a:rPr lang="en-US" sz="830" dirty="0">
+                          <a:solidFill>
+                            <a:srgbClr val="262626"/>
+                          </a:solidFill>
+                          <a:latin typeface="Arial" pitchFamily="34" charset="0"/>
+                          <a:ea typeface="Arial" pitchFamily="34" charset="-122"/>
+                          <a:cs typeface="Arial" pitchFamily="34" charset="-120"/>
+                        </a:rPr>
+                        <a:t>0.70</a:t>
+                      </a:r>
+                      <a:endParaRPr lang="en-US" sz="830" dirty="0">
+                        <a:latin typeface="Arial" charset="0"/>
+                        <a:ea typeface="Arial" charset="0"/>
+                        <a:cs typeface="Arial" charset="0"/>
+                      </a:endParaRPr>
+                    </a:p>
+                  </a:txBody>
+                  <a:tcPr marL="38100" marR="38100" marT="25400" marB="25400" anchor="ctr">
+                    <a:lnL w="6350" cap="flat" cmpd="sng" algn="ctr">
+                      <a:solidFill>
+                        <a:srgbClr val="E3E3E3"/>
+                      </a:solidFill>
+                      <a:prstDash val="solid"/>
+                      <a:round/>
+                      <a:headEnd type="none" w="med" len="med"/>
+                      <a:tailEnd type="none" w="med" len="med"/>
+                    </a:lnL>
+                    <a:lnR w="6350" cap="flat" cmpd="sng" algn="ctr">
+                      <a:solidFill>
+                        <a:srgbClr val="E3E3E3"/>
+                      </a:solidFill>
+                      <a:prstDash val="solid"/>
+                      <a:round/>
+                      <a:headEnd type="none" w="med" len="med"/>
+                      <a:tailEnd type="none" w="med" len="med"/>
+                    </a:lnR>
+                    <a:lnT w="6350" cap="flat" cmpd="sng" algn="ctr">
+                      <a:solidFill>
+                        <a:srgbClr val="E3E3E3"/>
+                      </a:solidFill>
+                      <a:prstDash val="solid"/>
+                      <a:round/>
+                      <a:headEnd type="none" w="med" len="med"/>
+                      <a:tailEnd type="none" w="med" len="med"/>
+                    </a:lnT>
+                    <a:lnB w="6350" cap="flat" cmpd="sng" algn="ctr">
+                      <a:solidFill>
+                        <a:srgbClr val="E3E3E3"/>
+                      </a:solidFill>
+                      <a:prstDash val="solid"/>
+                      <a:round/>
+                      <a:headEnd type="none" w="med" len="med"/>
+                      <a:tailEnd type="none" w="med" len="med"/>
+                    </a:lnB>
+                    <a:solidFill>
+                      <a:srgbClr val="FFFFFF"/>
+                    </a:solidFill>
+                  </a:tcPr>
+                </a:tc>
+                <a:tc>
+                  <a:txBody>
+                    <a:bodyPr/>
+                    <a:lstStyle/>
+                    <a:p>
+                      <a:pPr algn="ctr" indent="0" marL="0">
+                        <a:buNone/>
+                      </a:pPr>
+                      <a:r>
+                        <a:rPr lang="en-US" sz="830" dirty="0">
+                          <a:solidFill>
+                            <a:srgbClr val="262626"/>
+                          </a:solidFill>
+                          <a:latin typeface="Arial" pitchFamily="34" charset="0"/>
+                          <a:ea typeface="Arial" pitchFamily="34" charset="-122"/>
+                          <a:cs typeface="Arial" pitchFamily="34" charset="-120"/>
+                        </a:rPr>
+                        <a:t>1.00</a:t>
+                      </a:r>
+                      <a:endParaRPr lang="en-US" sz="830" dirty="0">
+                        <a:latin typeface="Arial" charset="0"/>
+                        <a:ea typeface="Arial" charset="0"/>
+                        <a:cs typeface="Arial" charset="0"/>
+                      </a:endParaRPr>
+                    </a:p>
+                  </a:txBody>
+                  <a:tcPr marL="38100" marR="38100" marT="25400" marB="25400" anchor="ctr">
+                    <a:lnL w="6350" cap="flat" cmpd="sng" algn="ctr">
+                      <a:solidFill>
+                        <a:srgbClr val="E3E3E3"/>
+                      </a:solidFill>
+                      <a:prstDash val="solid"/>
+                      <a:round/>
+                      <a:headEnd type="none" w="med" len="med"/>
+                      <a:tailEnd type="none" w="med" len="med"/>
+                    </a:lnL>
+                    <a:lnR w="6350" cap="flat" cmpd="sng" algn="ctr">
+                      <a:solidFill>
+                        <a:srgbClr val="E3E3E3"/>
+                      </a:solidFill>
+                      <a:prstDash val="solid"/>
+                      <a:round/>
+                      <a:headEnd type="none" w="med" len="med"/>
+                      <a:tailEnd type="none" w="med" len="med"/>
+                    </a:lnR>
+                    <a:lnT w="6350" cap="flat" cmpd="sng" algn="ctr">
+                      <a:solidFill>
+                        <a:srgbClr val="E3E3E3"/>
+                      </a:solidFill>
+                      <a:prstDash val="solid"/>
+                      <a:round/>
+                      <a:headEnd type="none" w="med" len="med"/>
+                      <a:tailEnd type="none" w="med" len="med"/>
+                    </a:lnT>
+                    <a:lnB w="6350" cap="flat" cmpd="sng" algn="ctr">
+                      <a:solidFill>
+                        <a:srgbClr val="E3E3E3"/>
+                      </a:solidFill>
+                      <a:prstDash val="solid"/>
+                      <a:round/>
+                      <a:headEnd type="none" w="med" len="med"/>
+                      <a:tailEnd type="none" w="med" len="med"/>
+                    </a:lnB>
+                    <a:solidFill>
+                      <a:srgbClr val="FFFFFF"/>
+                    </a:solidFill>
+                  </a:tcPr>
+                </a:tc>
+                <a:tc>
+                  <a:txBody>
+                    <a:bodyPr/>
+                    <a:lstStyle/>
+                    <a:p>
+                      <a:pPr algn="ctr" indent="0" marL="0">
+                        <a:buNone/>
+                      </a:pPr>
+                      <a:r>
+                        <a:rPr lang="en-US" sz="830" dirty="0">
+                          <a:solidFill>
+                            <a:srgbClr val="262626"/>
+                          </a:solidFill>
+                          <a:latin typeface="Arial" pitchFamily="34" charset="0"/>
+                          <a:ea typeface="Arial" pitchFamily="34" charset="-122"/>
+                          <a:cs typeface="Arial" pitchFamily="34" charset="-120"/>
+                        </a:rPr>
+                        <a:t>0.60</a:t>
+                      </a:r>
+                      <a:endParaRPr lang="en-US" sz="830" dirty="0">
+                        <a:latin typeface="Arial" charset="0"/>
+                        <a:ea typeface="Arial" charset="0"/>
+                        <a:cs typeface="Arial" charset="0"/>
+                      </a:endParaRPr>
+                    </a:p>
+                  </a:txBody>
+                  <a:tcPr marL="38100" marR="38100" marT="25400" marB="25400" anchor="ctr">
+                    <a:lnL w="6350" cap="flat" cmpd="sng" algn="ctr">
+                      <a:solidFill>
+                        <a:srgbClr val="E3E3E3"/>
+                      </a:solidFill>
+                      <a:prstDash val="solid"/>
+                      <a:round/>
+                      <a:headEnd type="none" w="med" len="med"/>
+                      <a:tailEnd type="none" w="med" len="med"/>
+                    </a:lnL>
+                    <a:lnR w="6350" cap="flat" cmpd="sng" algn="ctr">
+                      <a:solidFill>
+                        <a:srgbClr val="E3E3E3"/>
+                      </a:solidFill>
+                      <a:prstDash val="solid"/>
+                      <a:round/>
+                      <a:headEnd type="none" w="med" len="med"/>
+                      <a:tailEnd type="none" w="med" len="med"/>
+                    </a:lnR>
+                    <a:lnT w="6350" cap="flat" cmpd="sng" algn="ctr">
+                      <a:solidFill>
+                        <a:srgbClr val="E3E3E3"/>
+                      </a:solidFill>
+                      <a:prstDash val="solid"/>
+                      <a:round/>
+                      <a:headEnd type="none" w="med" len="med"/>
+                      <a:tailEnd type="none" w="med" len="med"/>
+                    </a:lnT>
+                    <a:lnB w="6350" cap="flat" cmpd="sng" algn="ctr">
+                      <a:solidFill>
+                        <a:srgbClr val="E3E3E3"/>
+                      </a:solidFill>
+                      <a:prstDash val="solid"/>
+                      <a:round/>
+                      <a:headEnd type="none" w="med" len="med"/>
+                      <a:tailEnd type="none" w="med" len="med"/>
+                    </a:lnB>
+                    <a:solidFill>
+                      <a:srgbClr val="FFFFFF"/>
+                    </a:solidFill>
+                  </a:tcPr>
+                </a:tc>
+                <a:tc>
+                  <a:txBody>
+                    <a:bodyPr/>
+                    <a:lstStyle/>
+                    <a:p>
+                      <a:pPr algn="ctr" indent="0" marL="0">
+                        <a:buNone/>
+                      </a:pPr>
+                      <a:r>
+                        <a:rPr lang="en-US" sz="830" dirty="0">
+                          <a:solidFill>
+                            <a:srgbClr val="262626"/>
+                          </a:solidFill>
+                          <a:latin typeface="Arial" pitchFamily="34" charset="0"/>
+                          <a:ea typeface="Arial" pitchFamily="34" charset="-122"/>
+                          <a:cs typeface="Arial" pitchFamily="34" charset="-120"/>
+                        </a:rPr>
+                        <a:t>0.75</a:t>
                       </a:r>
                       <a:endParaRPr lang="en-US" sz="830" dirty="0">
                         <a:latin typeface="Arial" charset="0"/>
@@ -29302,7 +30530,7 @@
                           <a:ea typeface="Arial" pitchFamily="34" charset="-122"/>
                           <a:cs typeface="Arial" pitchFamily="34" charset="-120"/>
                         </a:rPr>
-                        <a:t>38%</a:t>
+                        <a:t>26%</a:t>
                       </a:r>
                       <a:endParaRPr lang="en-US" sz="830" dirty="0">
                         <a:latin typeface="Arial" charset="0"/>
@@ -29506,7 +30734,7 @@
                           <a:ea typeface="Arial" pitchFamily="34" charset="-122"/>
                           <a:cs typeface="Arial" pitchFamily="34" charset="-120"/>
                         </a:rPr>
-                        <a:t>1.00</a:t>
+                        <a:t>0.55</a:t>
                       </a:r>
                       <a:endParaRPr lang="en-US" sz="830" dirty="0">
                         <a:latin typeface="Arial" charset="0"/>
@@ -29642,7 +30870,7 @@
                           <a:ea typeface="Arial" pitchFamily="34" charset="-122"/>
                           <a:cs typeface="Arial" pitchFamily="34" charset="-120"/>
                         </a:rPr>
-                        <a:t>0.55</a:t>
+                        <a:t>1.00</a:t>
                       </a:r>
                       <a:endParaRPr lang="en-US" sz="830" dirty="0">
                         <a:latin typeface="Arial" charset="0"/>
@@ -29711,1234 +30939,6 @@
                           <a:cs typeface="Arial" pitchFamily="34" charset="-120"/>
                         </a:rPr>
                         <a:t>0.45</a:t>
-                      </a:r>
-                      <a:endParaRPr lang="en-US" sz="830" dirty="0">
-                        <a:latin typeface="Arial" charset="0"/>
-                        <a:ea typeface="Arial" charset="0"/>
-                        <a:cs typeface="Arial" charset="0"/>
-                      </a:endParaRPr>
-                    </a:p>
-                  </a:txBody>
-                  <a:tcPr marL="38100" marR="38100" marT="25400" marB="25400" anchor="ctr">
-                    <a:lnL w="6350" cap="flat" cmpd="sng" algn="ctr">
-                      <a:solidFill>
-                        <a:srgbClr val="E3E3E3"/>
-                      </a:solidFill>
-                      <a:prstDash val="solid"/>
-                      <a:round/>
-                      <a:headEnd type="none" w="med" len="med"/>
-                      <a:tailEnd type="none" w="med" len="med"/>
-                    </a:lnL>
-                    <a:lnR w="6350" cap="flat" cmpd="sng" algn="ctr">
-                      <a:solidFill>
-                        <a:srgbClr val="E3E3E3"/>
-                      </a:solidFill>
-                      <a:prstDash val="solid"/>
-                      <a:round/>
-                      <a:headEnd type="none" w="med" len="med"/>
-                      <a:tailEnd type="none" w="med" len="med"/>
-                    </a:lnR>
-                    <a:lnT w="6350" cap="flat" cmpd="sng" algn="ctr">
-                      <a:solidFill>
-                        <a:srgbClr val="E3E3E3"/>
-                      </a:solidFill>
-                      <a:prstDash val="solid"/>
-                      <a:round/>
-                      <a:headEnd type="none" w="med" len="med"/>
-                      <a:tailEnd type="none" w="med" len="med"/>
-                    </a:lnT>
-                    <a:lnB w="6350" cap="flat" cmpd="sng" algn="ctr">
-                      <a:solidFill>
-                        <a:srgbClr val="E3E3E3"/>
-                      </a:solidFill>
-                      <a:prstDash val="solid"/>
-                      <a:round/>
-                      <a:headEnd type="none" w="med" len="med"/>
-                      <a:tailEnd type="none" w="med" len="med"/>
-                    </a:lnB>
-                    <a:solidFill>
-                      <a:srgbClr val="FFFFFF"/>
-                    </a:solidFill>
-                  </a:tcPr>
-                </a:tc>
-              </a:tr>
-              <a:tr h="267462">
-                <a:tc>
-                  <a:txBody>
-                    <a:bodyPr/>
-                    <a:lstStyle/>
-                    <a:p>
-                      <a:pPr algn="ctr" indent="0" marL="0">
-                        <a:buNone/>
-                      </a:pPr>
-                      <a:r>
-                        <a:rPr lang="en-US" sz="830" b="1" dirty="0">
-                          <a:solidFill>
-                            <a:srgbClr val="262626"/>
-                          </a:solidFill>
-                          <a:latin typeface="Arial" pitchFamily="34" charset="0"/>
-                          <a:ea typeface="Arial" pitchFamily="34" charset="-122"/>
-                          <a:cs typeface="Arial" pitchFamily="34" charset="-120"/>
-                        </a:rPr>
-                        <a:t>EWT US</a:t>
-                      </a:r>
-                      <a:endParaRPr lang="en-US" sz="830" dirty="0">
-                        <a:latin typeface="Arial" charset="0"/>
-                        <a:ea typeface="Arial" charset="0"/>
-                        <a:cs typeface="Arial" charset="0"/>
-                      </a:endParaRPr>
-                    </a:p>
-                  </a:txBody>
-                  <a:tcPr marL="38100" marR="38100" marT="25400" marB="25400" anchor="ctr">
-                    <a:lnL w="6350" cap="flat" cmpd="sng" algn="ctr">
-                      <a:solidFill>
-                        <a:srgbClr val="E3E3E3"/>
-                      </a:solidFill>
-                      <a:prstDash val="solid"/>
-                      <a:round/>
-                      <a:headEnd type="none" w="med" len="med"/>
-                      <a:tailEnd type="none" w="med" len="med"/>
-                    </a:lnL>
-                    <a:lnR w="6350" cap="flat" cmpd="sng" algn="ctr">
-                      <a:solidFill>
-                        <a:srgbClr val="E3E3E3"/>
-                      </a:solidFill>
-                      <a:prstDash val="solid"/>
-                      <a:round/>
-                      <a:headEnd type="none" w="med" len="med"/>
-                      <a:tailEnd type="none" w="med" len="med"/>
-                    </a:lnR>
-                    <a:lnT w="6350" cap="flat" cmpd="sng" algn="ctr">
-                      <a:solidFill>
-                        <a:srgbClr val="E3E3E3"/>
-                      </a:solidFill>
-                      <a:prstDash val="solid"/>
-                      <a:round/>
-                      <a:headEnd type="none" w="med" len="med"/>
-                      <a:tailEnd type="none" w="med" len="med"/>
-                    </a:lnT>
-                    <a:lnB w="6350" cap="flat" cmpd="sng" algn="ctr">
-                      <a:solidFill>
-                        <a:srgbClr val="E3E3E3"/>
-                      </a:solidFill>
-                      <a:prstDash val="solid"/>
-                      <a:round/>
-                      <a:headEnd type="none" w="med" len="med"/>
-                      <a:tailEnd type="none" w="med" len="med"/>
-                    </a:lnB>
-                    <a:solidFill>
-                      <a:srgbClr val="FFFFFF"/>
-                    </a:solidFill>
-                  </a:tcPr>
-                </a:tc>
-                <a:tc>
-                  <a:txBody>
-                    <a:bodyPr/>
-                    <a:lstStyle/>
-                    <a:p>
-                      <a:pPr algn="ctr" indent="0" marL="0">
-                        <a:buNone/>
-                      </a:pPr>
-                      <a:r>
-                        <a:rPr lang="en-US" sz="830" dirty="0">
-                          <a:solidFill>
-                            <a:srgbClr val="262626"/>
-                          </a:solidFill>
-                          <a:latin typeface="Arial" pitchFamily="34" charset="0"/>
-                          <a:ea typeface="Arial" pitchFamily="34" charset="-122"/>
-                          <a:cs typeface="Arial" pitchFamily="34" charset="-120"/>
-                        </a:rPr>
-                        <a:t>15%</a:t>
-                      </a:r>
-                      <a:endParaRPr lang="en-US" sz="830" dirty="0">
-                        <a:latin typeface="Arial" charset="0"/>
-                        <a:ea typeface="Arial" charset="0"/>
-                        <a:cs typeface="Arial" charset="0"/>
-                      </a:endParaRPr>
-                    </a:p>
-                  </a:txBody>
-                  <a:tcPr marL="38100" marR="38100" marT="25400" marB="25400" anchor="ctr">
-                    <a:lnL w="6350" cap="flat" cmpd="sng" algn="ctr">
-                      <a:solidFill>
-                        <a:srgbClr val="E3E3E3"/>
-                      </a:solidFill>
-                      <a:prstDash val="solid"/>
-                      <a:round/>
-                      <a:headEnd type="none" w="med" len="med"/>
-                      <a:tailEnd type="none" w="med" len="med"/>
-                    </a:lnL>
-                    <a:lnR w="6350" cap="flat" cmpd="sng" algn="ctr">
-                      <a:solidFill>
-                        <a:srgbClr val="E3E3E3"/>
-                      </a:solidFill>
-                      <a:prstDash val="solid"/>
-                      <a:round/>
-                      <a:headEnd type="none" w="med" len="med"/>
-                      <a:tailEnd type="none" w="med" len="med"/>
-                    </a:lnR>
-                    <a:lnT w="6350" cap="flat" cmpd="sng" algn="ctr">
-                      <a:solidFill>
-                        <a:srgbClr val="E3E3E3"/>
-                      </a:solidFill>
-                      <a:prstDash val="solid"/>
-                      <a:round/>
-                      <a:headEnd type="none" w="med" len="med"/>
-                      <a:tailEnd type="none" w="med" len="med"/>
-                    </a:lnT>
-                    <a:lnB w="6350" cap="flat" cmpd="sng" algn="ctr">
-                      <a:solidFill>
-                        <a:srgbClr val="E3E3E3"/>
-                      </a:solidFill>
-                      <a:prstDash val="solid"/>
-                      <a:round/>
-                      <a:headEnd type="none" w="med" len="med"/>
-                      <a:tailEnd type="none" w="med" len="med"/>
-                    </a:lnB>
-                    <a:solidFill>
-                      <a:srgbClr val="FFFFFF"/>
-                    </a:solidFill>
-                  </a:tcPr>
-                </a:tc>
-                <a:tc>
-                  <a:txBody>
-                    <a:bodyPr/>
-                    <a:lstStyle/>
-                    <a:p>
-                      <a:pPr algn="ctr" indent="0" marL="0">
-                        <a:buNone/>
-                      </a:pPr>
-                      <a:r>
-                        <a:rPr lang="en-US" sz="830" dirty="0">
-                          <a:solidFill>
-                            <a:srgbClr val="262626"/>
-                          </a:solidFill>
-                          <a:latin typeface="Arial" pitchFamily="34" charset="0"/>
-                          <a:ea typeface="Arial" pitchFamily="34" charset="-122"/>
-                          <a:cs typeface="Arial" pitchFamily="34" charset="-120"/>
-                        </a:rPr>
-                        <a:t>26%</a:t>
-                      </a:r>
-                      <a:endParaRPr lang="en-US" sz="830" dirty="0">
-                        <a:latin typeface="Arial" charset="0"/>
-                        <a:ea typeface="Arial" charset="0"/>
-                        <a:cs typeface="Arial" charset="0"/>
-                      </a:endParaRPr>
-                    </a:p>
-                  </a:txBody>
-                  <a:tcPr marL="38100" marR="38100" marT="25400" marB="25400" anchor="ctr">
-                    <a:lnL w="6350" cap="flat" cmpd="sng" algn="ctr">
-                      <a:solidFill>
-                        <a:srgbClr val="E3E3E3"/>
-                      </a:solidFill>
-                      <a:prstDash val="solid"/>
-                      <a:round/>
-                      <a:headEnd type="none" w="med" len="med"/>
-                      <a:tailEnd type="none" w="med" len="med"/>
-                    </a:lnL>
-                    <a:lnR w="6350" cap="flat" cmpd="sng" algn="ctr">
-                      <a:solidFill>
-                        <a:srgbClr val="E3E3E3"/>
-                      </a:solidFill>
-                      <a:prstDash val="solid"/>
-                      <a:round/>
-                      <a:headEnd type="none" w="med" len="med"/>
-                      <a:tailEnd type="none" w="med" len="med"/>
-                    </a:lnR>
-                    <a:lnT w="6350" cap="flat" cmpd="sng" algn="ctr">
-                      <a:solidFill>
-                        <a:srgbClr val="E3E3E3"/>
-                      </a:solidFill>
-                      <a:prstDash val="solid"/>
-                      <a:round/>
-                      <a:headEnd type="none" w="med" len="med"/>
-                      <a:tailEnd type="none" w="med" len="med"/>
-                    </a:lnT>
-                    <a:lnB w="6350" cap="flat" cmpd="sng" algn="ctr">
-                      <a:solidFill>
-                        <a:srgbClr val="E3E3E3"/>
-                      </a:solidFill>
-                      <a:prstDash val="solid"/>
-                      <a:round/>
-                      <a:headEnd type="none" w="med" len="med"/>
-                      <a:tailEnd type="none" w="med" len="med"/>
-                    </a:lnB>
-                    <a:solidFill>
-                      <a:srgbClr val="FFFFFF"/>
-                    </a:solidFill>
-                  </a:tcPr>
-                </a:tc>
-                <a:tc>
-                  <a:txBody>
-                    <a:bodyPr/>
-                    <a:lstStyle/>
-                    <a:p>
-                      <a:pPr algn="ctr" indent="0" marL="0">
-                        <a:buNone/>
-                      </a:pPr>
-                      <a:r>
-                        <a:rPr lang="en-US" sz="830" dirty="0">
-                          <a:solidFill>
-                            <a:srgbClr val="262626"/>
-                          </a:solidFill>
-                          <a:latin typeface="Arial" pitchFamily="34" charset="0"/>
-                          <a:ea typeface="Arial" pitchFamily="34" charset="-122"/>
-                          <a:cs typeface="Arial" pitchFamily="34" charset="-120"/>
-                        </a:rPr>
-                        <a:t>2.6%</a:t>
-                      </a:r>
-                      <a:endParaRPr lang="en-US" sz="830" dirty="0">
-                        <a:latin typeface="Arial" charset="0"/>
-                        <a:ea typeface="Arial" charset="0"/>
-                        <a:cs typeface="Arial" charset="0"/>
-                      </a:endParaRPr>
-                    </a:p>
-                  </a:txBody>
-                  <a:tcPr marL="38100" marR="38100" marT="25400" marB="25400" anchor="ctr">
-                    <a:lnL w="6350" cap="flat" cmpd="sng" algn="ctr">
-                      <a:solidFill>
-                        <a:srgbClr val="E3E3E3"/>
-                      </a:solidFill>
-                      <a:prstDash val="solid"/>
-                      <a:round/>
-                      <a:headEnd type="none" w="med" len="med"/>
-                      <a:tailEnd type="none" w="med" len="med"/>
-                    </a:lnL>
-                    <a:lnR w="6350" cap="flat" cmpd="sng" algn="ctr">
-                      <a:solidFill>
-                        <a:srgbClr val="E3E3E3"/>
-                      </a:solidFill>
-                      <a:prstDash val="solid"/>
-                      <a:round/>
-                      <a:headEnd type="none" w="med" len="med"/>
-                      <a:tailEnd type="none" w="med" len="med"/>
-                    </a:lnR>
-                    <a:lnT w="6350" cap="flat" cmpd="sng" algn="ctr">
-                      <a:solidFill>
-                        <a:srgbClr val="E3E3E3"/>
-                      </a:solidFill>
-                      <a:prstDash val="solid"/>
-                      <a:round/>
-                      <a:headEnd type="none" w="med" len="med"/>
-                      <a:tailEnd type="none" w="med" len="med"/>
-                    </a:lnT>
-                    <a:lnB w="6350" cap="flat" cmpd="sng" algn="ctr">
-                      <a:solidFill>
-                        <a:srgbClr val="E3E3E3"/>
-                      </a:solidFill>
-                      <a:prstDash val="solid"/>
-                      <a:round/>
-                      <a:headEnd type="none" w="med" len="med"/>
-                      <a:tailEnd type="none" w="med" len="med"/>
-                    </a:lnB>
-                    <a:solidFill>
-                      <a:srgbClr val="FFFFFF"/>
-                    </a:solidFill>
-                  </a:tcPr>
-                </a:tc>
-                <a:tc>
-                  <a:txBody>
-                    <a:bodyPr/>
-                    <a:lstStyle/>
-                    <a:p>
-                      <a:pPr algn="ctr" indent="0" marL="0">
-                        <a:buNone/>
-                      </a:pPr>
-                      <a:r>
-                        <a:rPr lang="en-US" sz="830" dirty="0">
-                          <a:solidFill>
-                            <a:srgbClr val="262626"/>
-                          </a:solidFill>
-                          <a:latin typeface="Arial" pitchFamily="34" charset="0"/>
-                          <a:ea typeface="Arial" pitchFamily="34" charset="-122"/>
-                          <a:cs typeface="Arial" pitchFamily="34" charset="-120"/>
-                        </a:rPr>
-                        <a:t>0.85</a:t>
-                      </a:r>
-                      <a:endParaRPr lang="en-US" sz="830" dirty="0">
-                        <a:latin typeface="Arial" charset="0"/>
-                        <a:ea typeface="Arial" charset="0"/>
-                        <a:cs typeface="Arial" charset="0"/>
-                      </a:endParaRPr>
-                    </a:p>
-                  </a:txBody>
-                  <a:tcPr marL="38100" marR="38100" marT="25400" marB="25400" anchor="ctr">
-                    <a:lnL w="6350" cap="flat" cmpd="sng" algn="ctr">
-                      <a:solidFill>
-                        <a:srgbClr val="E3E3E3"/>
-                      </a:solidFill>
-                      <a:prstDash val="solid"/>
-                      <a:round/>
-                      <a:headEnd type="none" w="med" len="med"/>
-                      <a:tailEnd type="none" w="med" len="med"/>
-                    </a:lnL>
-                    <a:lnR w="6350" cap="flat" cmpd="sng" algn="ctr">
-                      <a:solidFill>
-                        <a:srgbClr val="E3E3E3"/>
-                      </a:solidFill>
-                      <a:prstDash val="solid"/>
-                      <a:round/>
-                      <a:headEnd type="none" w="med" len="med"/>
-                      <a:tailEnd type="none" w="med" len="med"/>
-                    </a:lnR>
-                    <a:lnT w="6350" cap="flat" cmpd="sng" algn="ctr">
-                      <a:solidFill>
-                        <a:srgbClr val="E3E3E3"/>
-                      </a:solidFill>
-                      <a:prstDash val="solid"/>
-                      <a:round/>
-                      <a:headEnd type="none" w="med" len="med"/>
-                      <a:tailEnd type="none" w="med" len="med"/>
-                    </a:lnT>
-                    <a:lnB w="6350" cap="flat" cmpd="sng" algn="ctr">
-                      <a:solidFill>
-                        <a:srgbClr val="E3E3E3"/>
-                      </a:solidFill>
-                      <a:prstDash val="solid"/>
-                      <a:round/>
-                      <a:headEnd type="none" w="med" len="med"/>
-                      <a:tailEnd type="none" w="med" len="med"/>
-                    </a:lnB>
-                    <a:solidFill>
-                      <a:srgbClr val="FFFFFF"/>
-                    </a:solidFill>
-                  </a:tcPr>
-                </a:tc>
-                <a:tc>
-                  <a:txBody>
-                    <a:bodyPr/>
-                    <a:lstStyle/>
-                    <a:p>
-                      <a:pPr algn="ctr" indent="0" marL="0">
-                        <a:buNone/>
-                      </a:pPr>
-                      <a:r>
-                        <a:rPr lang="en-US" sz="830" dirty="0">
-                          <a:solidFill>
-                            <a:srgbClr val="262626"/>
-                          </a:solidFill>
-                          <a:latin typeface="Arial" pitchFamily="34" charset="0"/>
-                          <a:ea typeface="Arial" pitchFamily="34" charset="-122"/>
-                          <a:cs typeface="Arial" pitchFamily="34" charset="-120"/>
-                        </a:rPr>
-                        <a:t>0.60</a:t>
-                      </a:r>
-                      <a:endParaRPr lang="en-US" sz="830" dirty="0">
-                        <a:latin typeface="Arial" charset="0"/>
-                        <a:ea typeface="Arial" charset="0"/>
-                        <a:cs typeface="Arial" charset="0"/>
-                      </a:endParaRPr>
-                    </a:p>
-                  </a:txBody>
-                  <a:tcPr marL="38100" marR="38100" marT="25400" marB="25400" anchor="ctr">
-                    <a:lnL w="6350" cap="flat" cmpd="sng" algn="ctr">
-                      <a:solidFill>
-                        <a:srgbClr val="E3E3E3"/>
-                      </a:solidFill>
-                      <a:prstDash val="solid"/>
-                      <a:round/>
-                      <a:headEnd type="none" w="med" len="med"/>
-                      <a:tailEnd type="none" w="med" len="med"/>
-                    </a:lnL>
-                    <a:lnR w="6350" cap="flat" cmpd="sng" algn="ctr">
-                      <a:solidFill>
-                        <a:srgbClr val="E3E3E3"/>
-                      </a:solidFill>
-                      <a:prstDash val="solid"/>
-                      <a:round/>
-                      <a:headEnd type="none" w="med" len="med"/>
-                      <a:tailEnd type="none" w="med" len="med"/>
-                    </a:lnR>
-                    <a:lnT w="6350" cap="flat" cmpd="sng" algn="ctr">
-                      <a:solidFill>
-                        <a:srgbClr val="E3E3E3"/>
-                      </a:solidFill>
-                      <a:prstDash val="solid"/>
-                      <a:round/>
-                      <a:headEnd type="none" w="med" len="med"/>
-                      <a:tailEnd type="none" w="med" len="med"/>
-                    </a:lnT>
-                    <a:lnB w="6350" cap="flat" cmpd="sng" algn="ctr">
-                      <a:solidFill>
-                        <a:srgbClr val="E3E3E3"/>
-                      </a:solidFill>
-                      <a:prstDash val="solid"/>
-                      <a:round/>
-                      <a:headEnd type="none" w="med" len="med"/>
-                      <a:tailEnd type="none" w="med" len="med"/>
-                    </a:lnB>
-                    <a:solidFill>
-                      <a:srgbClr val="FFFFFF"/>
-                    </a:solidFill>
-                  </a:tcPr>
-                </a:tc>
-                <a:tc>
-                  <a:txBody>
-                    <a:bodyPr/>
-                    <a:lstStyle/>
-                    <a:p>
-                      <a:pPr algn="ctr" indent="0" marL="0">
-                        <a:buNone/>
-                      </a:pPr>
-                      <a:r>
-                        <a:rPr lang="en-US" sz="830" dirty="0">
-                          <a:solidFill>
-                            <a:srgbClr val="262626"/>
-                          </a:solidFill>
-                          <a:latin typeface="Arial" pitchFamily="34" charset="0"/>
-                          <a:ea typeface="Arial" pitchFamily="34" charset="-122"/>
-                          <a:cs typeface="Arial" pitchFamily="34" charset="-120"/>
-                        </a:rPr>
-                        <a:t>1.00</a:t>
-                      </a:r>
-                      <a:endParaRPr lang="en-US" sz="830" dirty="0">
-                        <a:latin typeface="Arial" charset="0"/>
-                        <a:ea typeface="Arial" charset="0"/>
-                        <a:cs typeface="Arial" charset="0"/>
-                      </a:endParaRPr>
-                    </a:p>
-                  </a:txBody>
-                  <a:tcPr marL="38100" marR="38100" marT="25400" marB="25400" anchor="ctr">
-                    <a:lnL w="6350" cap="flat" cmpd="sng" algn="ctr">
-                      <a:solidFill>
-                        <a:srgbClr val="E3E3E3"/>
-                      </a:solidFill>
-                      <a:prstDash val="solid"/>
-                      <a:round/>
-                      <a:headEnd type="none" w="med" len="med"/>
-                      <a:tailEnd type="none" w="med" len="med"/>
-                    </a:lnL>
-                    <a:lnR w="6350" cap="flat" cmpd="sng" algn="ctr">
-                      <a:solidFill>
-                        <a:srgbClr val="E3E3E3"/>
-                      </a:solidFill>
-                      <a:prstDash val="solid"/>
-                      <a:round/>
-                      <a:headEnd type="none" w="med" len="med"/>
-                      <a:tailEnd type="none" w="med" len="med"/>
-                    </a:lnR>
-                    <a:lnT w="6350" cap="flat" cmpd="sng" algn="ctr">
-                      <a:solidFill>
-                        <a:srgbClr val="E3E3E3"/>
-                      </a:solidFill>
-                      <a:prstDash val="solid"/>
-                      <a:round/>
-                      <a:headEnd type="none" w="med" len="med"/>
-                      <a:tailEnd type="none" w="med" len="med"/>
-                    </a:lnT>
-                    <a:lnB w="6350" cap="flat" cmpd="sng" algn="ctr">
-                      <a:solidFill>
-                        <a:srgbClr val="E3E3E3"/>
-                      </a:solidFill>
-                      <a:prstDash val="solid"/>
-                      <a:round/>
-                      <a:headEnd type="none" w="med" len="med"/>
-                      <a:tailEnd type="none" w="med" len="med"/>
-                    </a:lnB>
-                    <a:solidFill>
-                      <a:srgbClr val="FFFFFF"/>
-                    </a:solidFill>
-                  </a:tcPr>
-                </a:tc>
-                <a:tc>
-                  <a:txBody>
-                    <a:bodyPr/>
-                    <a:lstStyle/>
-                    <a:p>
-                      <a:pPr algn="ctr" indent="0" marL="0">
-                        <a:buNone/>
-                      </a:pPr>
-                      <a:r>
-                        <a:rPr lang="en-US" sz="830" dirty="0">
-                          <a:solidFill>
-                            <a:srgbClr val="262626"/>
-                          </a:solidFill>
-                          <a:latin typeface="Arial" pitchFamily="34" charset="0"/>
-                          <a:ea typeface="Arial" pitchFamily="34" charset="-122"/>
-                          <a:cs typeface="Arial" pitchFamily="34" charset="-120"/>
-                        </a:rPr>
-                        <a:t>0.70</a:t>
-                      </a:r>
-                      <a:endParaRPr lang="en-US" sz="830" dirty="0">
-                        <a:latin typeface="Arial" charset="0"/>
-                        <a:ea typeface="Arial" charset="0"/>
-                        <a:cs typeface="Arial" charset="0"/>
-                      </a:endParaRPr>
-                    </a:p>
-                  </a:txBody>
-                  <a:tcPr marL="38100" marR="38100" marT="25400" marB="25400" anchor="ctr">
-                    <a:lnL w="6350" cap="flat" cmpd="sng" algn="ctr">
-                      <a:solidFill>
-                        <a:srgbClr val="E3E3E3"/>
-                      </a:solidFill>
-                      <a:prstDash val="solid"/>
-                      <a:round/>
-                      <a:headEnd type="none" w="med" len="med"/>
-                      <a:tailEnd type="none" w="med" len="med"/>
-                    </a:lnL>
-                    <a:lnR w="6350" cap="flat" cmpd="sng" algn="ctr">
-                      <a:solidFill>
-                        <a:srgbClr val="E3E3E3"/>
-                      </a:solidFill>
-                      <a:prstDash val="solid"/>
-                      <a:round/>
-                      <a:headEnd type="none" w="med" len="med"/>
-                      <a:tailEnd type="none" w="med" len="med"/>
-                    </a:lnR>
-                    <a:lnT w="6350" cap="flat" cmpd="sng" algn="ctr">
-                      <a:solidFill>
-                        <a:srgbClr val="E3E3E3"/>
-                      </a:solidFill>
-                      <a:prstDash val="solid"/>
-                      <a:round/>
-                      <a:headEnd type="none" w="med" len="med"/>
-                      <a:tailEnd type="none" w="med" len="med"/>
-                    </a:lnT>
-                    <a:lnB w="6350" cap="flat" cmpd="sng" algn="ctr">
-                      <a:solidFill>
-                        <a:srgbClr val="E3E3E3"/>
-                      </a:solidFill>
-                      <a:prstDash val="solid"/>
-                      <a:round/>
-                      <a:headEnd type="none" w="med" len="med"/>
-                      <a:tailEnd type="none" w="med" len="med"/>
-                    </a:lnB>
-                    <a:solidFill>
-                      <a:srgbClr val="FFFFFF"/>
-                    </a:solidFill>
-                  </a:tcPr>
-                </a:tc>
-                <a:tc>
-                  <a:txBody>
-                    <a:bodyPr/>
-                    <a:lstStyle/>
-                    <a:p>
-                      <a:pPr algn="ctr" indent="0" marL="0">
-                        <a:buNone/>
-                      </a:pPr>
-                      <a:r>
-                        <a:rPr lang="en-US" sz="830" dirty="0">
-                          <a:solidFill>
-                            <a:srgbClr val="262626"/>
-                          </a:solidFill>
-                          <a:latin typeface="Arial" pitchFamily="34" charset="0"/>
-                          <a:ea typeface="Arial" pitchFamily="34" charset="-122"/>
-                          <a:cs typeface="Arial" pitchFamily="34" charset="-120"/>
-                        </a:rPr>
-                        <a:t>0.75</a:t>
-                      </a:r>
-                      <a:endParaRPr lang="en-US" sz="830" dirty="0">
-                        <a:latin typeface="Arial" charset="0"/>
-                        <a:ea typeface="Arial" charset="0"/>
-                        <a:cs typeface="Arial" charset="0"/>
-                      </a:endParaRPr>
-                    </a:p>
-                  </a:txBody>
-                  <a:tcPr marL="38100" marR="38100" marT="25400" marB="25400" anchor="ctr">
-                    <a:lnL w="6350" cap="flat" cmpd="sng" algn="ctr">
-                      <a:solidFill>
-                        <a:srgbClr val="E3E3E3"/>
-                      </a:solidFill>
-                      <a:prstDash val="solid"/>
-                      <a:round/>
-                      <a:headEnd type="none" w="med" len="med"/>
-                      <a:tailEnd type="none" w="med" len="med"/>
-                    </a:lnL>
-                    <a:lnR w="6350" cap="flat" cmpd="sng" algn="ctr">
-                      <a:solidFill>
-                        <a:srgbClr val="E3E3E3"/>
-                      </a:solidFill>
-                      <a:prstDash val="solid"/>
-                      <a:round/>
-                      <a:headEnd type="none" w="med" len="med"/>
-                      <a:tailEnd type="none" w="med" len="med"/>
-                    </a:lnR>
-                    <a:lnT w="6350" cap="flat" cmpd="sng" algn="ctr">
-                      <a:solidFill>
-                        <a:srgbClr val="E3E3E3"/>
-                      </a:solidFill>
-                      <a:prstDash val="solid"/>
-                      <a:round/>
-                      <a:headEnd type="none" w="med" len="med"/>
-                      <a:tailEnd type="none" w="med" len="med"/>
-                    </a:lnT>
-                    <a:lnB w="6350" cap="flat" cmpd="sng" algn="ctr">
-                      <a:solidFill>
-                        <a:srgbClr val="E3E3E3"/>
-                      </a:solidFill>
-                      <a:prstDash val="solid"/>
-                      <a:round/>
-                      <a:headEnd type="none" w="med" len="med"/>
-                      <a:tailEnd type="none" w="med" len="med"/>
-                    </a:lnB>
-                    <a:solidFill>
-                      <a:srgbClr val="FFFFFF"/>
-                    </a:solidFill>
-                  </a:tcPr>
-                </a:tc>
-              </a:tr>
-              <a:tr h="267462">
-                <a:tc>
-                  <a:txBody>
-                    <a:bodyPr/>
-                    <a:lstStyle/>
-                    <a:p>
-                      <a:pPr algn="ctr" indent="0" marL="0">
-                        <a:buNone/>
-                      </a:pPr>
-                      <a:r>
-                        <a:rPr lang="en-US" sz="830" b="1" dirty="0">
-                          <a:solidFill>
-                            <a:srgbClr val="262626"/>
-                          </a:solidFill>
-                          <a:latin typeface="Arial" pitchFamily="34" charset="0"/>
-                          <a:ea typeface="Arial" pitchFamily="34" charset="-122"/>
-                          <a:cs typeface="Arial" pitchFamily="34" charset="-120"/>
-                        </a:rPr>
-                        <a:t>EWY US</a:t>
-                      </a:r>
-                      <a:endParaRPr lang="en-US" sz="830" dirty="0">
-                        <a:latin typeface="Arial" charset="0"/>
-                        <a:ea typeface="Arial" charset="0"/>
-                        <a:cs typeface="Arial" charset="0"/>
-                      </a:endParaRPr>
-                    </a:p>
-                  </a:txBody>
-                  <a:tcPr marL="38100" marR="38100" marT="25400" marB="25400" anchor="ctr">
-                    <a:lnL w="6350" cap="flat" cmpd="sng" algn="ctr">
-                      <a:solidFill>
-                        <a:srgbClr val="E3E3E3"/>
-                      </a:solidFill>
-                      <a:prstDash val="solid"/>
-                      <a:round/>
-                      <a:headEnd type="none" w="med" len="med"/>
-                      <a:tailEnd type="none" w="med" len="med"/>
-                    </a:lnL>
-                    <a:lnR w="6350" cap="flat" cmpd="sng" algn="ctr">
-                      <a:solidFill>
-                        <a:srgbClr val="E3E3E3"/>
-                      </a:solidFill>
-                      <a:prstDash val="solid"/>
-                      <a:round/>
-                      <a:headEnd type="none" w="med" len="med"/>
-                      <a:tailEnd type="none" w="med" len="med"/>
-                    </a:lnR>
-                    <a:lnT w="6350" cap="flat" cmpd="sng" algn="ctr">
-                      <a:solidFill>
-                        <a:srgbClr val="E3E3E3"/>
-                      </a:solidFill>
-                      <a:prstDash val="solid"/>
-                      <a:round/>
-                      <a:headEnd type="none" w="med" len="med"/>
-                      <a:tailEnd type="none" w="med" len="med"/>
-                    </a:lnT>
-                    <a:lnB w="6350" cap="flat" cmpd="sng" algn="ctr">
-                      <a:solidFill>
-                        <a:srgbClr val="E3E3E3"/>
-                      </a:solidFill>
-                      <a:prstDash val="solid"/>
-                      <a:round/>
-                      <a:headEnd type="none" w="med" len="med"/>
-                      <a:tailEnd type="none" w="med" len="med"/>
-                    </a:lnB>
-                    <a:solidFill>
-                      <a:srgbClr val="FFFFFF"/>
-                    </a:solidFill>
-                  </a:tcPr>
-                </a:tc>
-                <a:tc>
-                  <a:txBody>
-                    <a:bodyPr/>
-                    <a:lstStyle/>
-                    <a:p>
-                      <a:pPr algn="ctr" indent="0" marL="0">
-                        <a:buNone/>
-                      </a:pPr>
-                      <a:r>
-                        <a:rPr lang="en-US" sz="830" dirty="0">
-                          <a:solidFill>
-                            <a:srgbClr val="262626"/>
-                          </a:solidFill>
-                          <a:latin typeface="Arial" pitchFamily="34" charset="0"/>
-                          <a:ea typeface="Arial" pitchFamily="34" charset="-122"/>
-                          <a:cs typeface="Arial" pitchFamily="34" charset="-120"/>
-                        </a:rPr>
-                        <a:t>20%</a:t>
-                      </a:r>
-                      <a:endParaRPr lang="en-US" sz="830" dirty="0">
-                        <a:latin typeface="Arial" charset="0"/>
-                        <a:ea typeface="Arial" charset="0"/>
-                        <a:cs typeface="Arial" charset="0"/>
-                      </a:endParaRPr>
-                    </a:p>
-                  </a:txBody>
-                  <a:tcPr marL="38100" marR="38100" marT="25400" marB="25400" anchor="ctr">
-                    <a:lnL w="6350" cap="flat" cmpd="sng" algn="ctr">
-                      <a:solidFill>
-                        <a:srgbClr val="E3E3E3"/>
-                      </a:solidFill>
-                      <a:prstDash val="solid"/>
-                      <a:round/>
-                      <a:headEnd type="none" w="med" len="med"/>
-                      <a:tailEnd type="none" w="med" len="med"/>
-                    </a:lnL>
-                    <a:lnR w="6350" cap="flat" cmpd="sng" algn="ctr">
-                      <a:solidFill>
-                        <a:srgbClr val="E3E3E3"/>
-                      </a:solidFill>
-                      <a:prstDash val="solid"/>
-                      <a:round/>
-                      <a:headEnd type="none" w="med" len="med"/>
-                      <a:tailEnd type="none" w="med" len="med"/>
-                    </a:lnR>
-                    <a:lnT w="6350" cap="flat" cmpd="sng" algn="ctr">
-                      <a:solidFill>
-                        <a:srgbClr val="E3E3E3"/>
-                      </a:solidFill>
-                      <a:prstDash val="solid"/>
-                      <a:round/>
-                      <a:headEnd type="none" w="med" len="med"/>
-                      <a:tailEnd type="none" w="med" len="med"/>
-                    </a:lnT>
-                    <a:lnB w="6350" cap="flat" cmpd="sng" algn="ctr">
-                      <a:solidFill>
-                        <a:srgbClr val="E3E3E3"/>
-                      </a:solidFill>
-                      <a:prstDash val="solid"/>
-                      <a:round/>
-                      <a:headEnd type="none" w="med" len="med"/>
-                      <a:tailEnd type="none" w="med" len="med"/>
-                    </a:lnB>
-                    <a:solidFill>
-                      <a:srgbClr val="FFFFFF"/>
-                    </a:solidFill>
-                  </a:tcPr>
-                </a:tc>
-                <a:tc>
-                  <a:txBody>
-                    <a:bodyPr/>
-                    <a:lstStyle/>
-                    <a:p>
-                      <a:pPr algn="ctr" indent="0" marL="0">
-                        <a:buNone/>
-                      </a:pPr>
-                      <a:r>
-                        <a:rPr lang="en-US" sz="830" dirty="0">
-                          <a:solidFill>
-                            <a:srgbClr val="262626"/>
-                          </a:solidFill>
-                          <a:latin typeface="Arial" pitchFamily="34" charset="0"/>
-                          <a:ea typeface="Arial" pitchFamily="34" charset="-122"/>
-                          <a:cs typeface="Arial" pitchFamily="34" charset="-120"/>
-                        </a:rPr>
-                        <a:t>30%</a:t>
-                      </a:r>
-                      <a:endParaRPr lang="en-US" sz="830" dirty="0">
-                        <a:latin typeface="Arial" charset="0"/>
-                        <a:ea typeface="Arial" charset="0"/>
-                        <a:cs typeface="Arial" charset="0"/>
-                      </a:endParaRPr>
-                    </a:p>
-                  </a:txBody>
-                  <a:tcPr marL="38100" marR="38100" marT="25400" marB="25400" anchor="ctr">
-                    <a:lnL w="6350" cap="flat" cmpd="sng" algn="ctr">
-                      <a:solidFill>
-                        <a:srgbClr val="E3E3E3"/>
-                      </a:solidFill>
-                      <a:prstDash val="solid"/>
-                      <a:round/>
-                      <a:headEnd type="none" w="med" len="med"/>
-                      <a:tailEnd type="none" w="med" len="med"/>
-                    </a:lnL>
-                    <a:lnR w="6350" cap="flat" cmpd="sng" algn="ctr">
-                      <a:solidFill>
-                        <a:srgbClr val="E3E3E3"/>
-                      </a:solidFill>
-                      <a:prstDash val="solid"/>
-                      <a:round/>
-                      <a:headEnd type="none" w="med" len="med"/>
-                      <a:tailEnd type="none" w="med" len="med"/>
-                    </a:lnR>
-                    <a:lnT w="6350" cap="flat" cmpd="sng" algn="ctr">
-                      <a:solidFill>
-                        <a:srgbClr val="E3E3E3"/>
-                      </a:solidFill>
-                      <a:prstDash val="solid"/>
-                      <a:round/>
-                      <a:headEnd type="none" w="med" len="med"/>
-                      <a:tailEnd type="none" w="med" len="med"/>
-                    </a:lnT>
-                    <a:lnB w="6350" cap="flat" cmpd="sng" algn="ctr">
-                      <a:solidFill>
-                        <a:srgbClr val="E3E3E3"/>
-                      </a:solidFill>
-                      <a:prstDash val="solid"/>
-                      <a:round/>
-                      <a:headEnd type="none" w="med" len="med"/>
-                      <a:tailEnd type="none" w="med" len="med"/>
-                    </a:lnB>
-                    <a:solidFill>
-                      <a:srgbClr val="FFFFFF"/>
-                    </a:solidFill>
-                  </a:tcPr>
-                </a:tc>
-                <a:tc>
-                  <a:txBody>
-                    <a:bodyPr/>
-                    <a:lstStyle/>
-                    <a:p>
-                      <a:pPr algn="ctr" indent="0" marL="0">
-                        <a:buNone/>
-                      </a:pPr>
-                      <a:r>
-                        <a:rPr lang="en-US" sz="830" dirty="0">
-                          <a:solidFill>
-                            <a:srgbClr val="262626"/>
-                          </a:solidFill>
-                          <a:latin typeface="Arial" pitchFamily="34" charset="0"/>
-                          <a:ea typeface="Arial" pitchFamily="34" charset="-122"/>
-                          <a:cs typeface="Arial" pitchFamily="34" charset="-120"/>
-                        </a:rPr>
-                        <a:t>1.2%</a:t>
-                      </a:r>
-                      <a:endParaRPr lang="en-US" sz="830" dirty="0">
-                        <a:latin typeface="Arial" charset="0"/>
-                        <a:ea typeface="Arial" charset="0"/>
-                        <a:cs typeface="Arial" charset="0"/>
-                      </a:endParaRPr>
-                    </a:p>
-                  </a:txBody>
-                  <a:tcPr marL="38100" marR="38100" marT="25400" marB="25400" anchor="ctr">
-                    <a:lnL w="6350" cap="flat" cmpd="sng" algn="ctr">
-                      <a:solidFill>
-                        <a:srgbClr val="E3E3E3"/>
-                      </a:solidFill>
-                      <a:prstDash val="solid"/>
-                      <a:round/>
-                      <a:headEnd type="none" w="med" len="med"/>
-                      <a:tailEnd type="none" w="med" len="med"/>
-                    </a:lnL>
-                    <a:lnR w="6350" cap="flat" cmpd="sng" algn="ctr">
-                      <a:solidFill>
-                        <a:srgbClr val="E3E3E3"/>
-                      </a:solidFill>
-                      <a:prstDash val="solid"/>
-                      <a:round/>
-                      <a:headEnd type="none" w="med" len="med"/>
-                      <a:tailEnd type="none" w="med" len="med"/>
-                    </a:lnR>
-                    <a:lnT w="6350" cap="flat" cmpd="sng" algn="ctr">
-                      <a:solidFill>
-                        <a:srgbClr val="E3E3E3"/>
-                      </a:solidFill>
-                      <a:prstDash val="solid"/>
-                      <a:round/>
-                      <a:headEnd type="none" w="med" len="med"/>
-                      <a:tailEnd type="none" w="med" len="med"/>
-                    </a:lnT>
-                    <a:lnB w="6350" cap="flat" cmpd="sng" algn="ctr">
-                      <a:solidFill>
-                        <a:srgbClr val="E3E3E3"/>
-                      </a:solidFill>
-                      <a:prstDash val="solid"/>
-                      <a:round/>
-                      <a:headEnd type="none" w="med" len="med"/>
-                      <a:tailEnd type="none" w="med" len="med"/>
-                    </a:lnB>
-                    <a:solidFill>
-                      <a:srgbClr val="FFFFFF"/>
-                    </a:solidFill>
-                  </a:tcPr>
-                </a:tc>
-                <a:tc>
-                  <a:txBody>
-                    <a:bodyPr/>
-                    <a:lstStyle/>
-                    <a:p>
-                      <a:pPr algn="ctr" indent="0" marL="0">
-                        <a:buNone/>
-                      </a:pPr>
-                      <a:r>
-                        <a:rPr lang="en-US" sz="830" dirty="0">
-                          <a:solidFill>
-                            <a:srgbClr val="262626"/>
-                          </a:solidFill>
-                          <a:latin typeface="Arial" pitchFamily="34" charset="0"/>
-                          <a:ea typeface="Arial" pitchFamily="34" charset="-122"/>
-                          <a:cs typeface="Arial" pitchFamily="34" charset="-120"/>
-                        </a:rPr>
-                        <a:t>0.80</a:t>
-                      </a:r>
-                      <a:endParaRPr lang="en-US" sz="830" dirty="0">
-                        <a:latin typeface="Arial" charset="0"/>
-                        <a:ea typeface="Arial" charset="0"/>
-                        <a:cs typeface="Arial" charset="0"/>
-                      </a:endParaRPr>
-                    </a:p>
-                  </a:txBody>
-                  <a:tcPr marL="38100" marR="38100" marT="25400" marB="25400" anchor="ctr">
-                    <a:lnL w="6350" cap="flat" cmpd="sng" algn="ctr">
-                      <a:solidFill>
-                        <a:srgbClr val="E3E3E3"/>
-                      </a:solidFill>
-                      <a:prstDash val="solid"/>
-                      <a:round/>
-                      <a:headEnd type="none" w="med" len="med"/>
-                      <a:tailEnd type="none" w="med" len="med"/>
-                    </a:lnL>
-                    <a:lnR w="6350" cap="flat" cmpd="sng" algn="ctr">
-                      <a:solidFill>
-                        <a:srgbClr val="E3E3E3"/>
-                      </a:solidFill>
-                      <a:prstDash val="solid"/>
-                      <a:round/>
-                      <a:headEnd type="none" w="med" len="med"/>
-                      <a:tailEnd type="none" w="med" len="med"/>
-                    </a:lnR>
-                    <a:lnT w="6350" cap="flat" cmpd="sng" algn="ctr">
-                      <a:solidFill>
-                        <a:srgbClr val="E3E3E3"/>
-                      </a:solidFill>
-                      <a:prstDash val="solid"/>
-                      <a:round/>
-                      <a:headEnd type="none" w="med" len="med"/>
-                      <a:tailEnd type="none" w="med" len="med"/>
-                    </a:lnT>
-                    <a:lnB w="6350" cap="flat" cmpd="sng" algn="ctr">
-                      <a:solidFill>
-                        <a:srgbClr val="E3E3E3"/>
-                      </a:solidFill>
-                      <a:prstDash val="solid"/>
-                      <a:round/>
-                      <a:headEnd type="none" w="med" len="med"/>
-                      <a:tailEnd type="none" w="med" len="med"/>
-                    </a:lnB>
-                    <a:solidFill>
-                      <a:srgbClr val="FFFFFF"/>
-                    </a:solidFill>
-                  </a:tcPr>
-                </a:tc>
-                <a:tc>
-                  <a:txBody>
-                    <a:bodyPr/>
-                    <a:lstStyle/>
-                    <a:p>
-                      <a:pPr algn="ctr" indent="0" marL="0">
-                        <a:buNone/>
-                      </a:pPr>
-                      <a:r>
-                        <a:rPr lang="en-US" sz="830" dirty="0">
-                          <a:solidFill>
-                            <a:srgbClr val="262626"/>
-                          </a:solidFill>
-                          <a:latin typeface="Arial" pitchFamily="34" charset="0"/>
-                          <a:ea typeface="Arial" pitchFamily="34" charset="-122"/>
-                          <a:cs typeface="Arial" pitchFamily="34" charset="-120"/>
-                        </a:rPr>
-                        <a:t>0.55</a:t>
-                      </a:r>
-                      <a:endParaRPr lang="en-US" sz="830" dirty="0">
-                        <a:latin typeface="Arial" charset="0"/>
-                        <a:ea typeface="Arial" charset="0"/>
-                        <a:cs typeface="Arial" charset="0"/>
-                      </a:endParaRPr>
-                    </a:p>
-                  </a:txBody>
-                  <a:tcPr marL="38100" marR="38100" marT="25400" marB="25400" anchor="ctr">
-                    <a:lnL w="6350" cap="flat" cmpd="sng" algn="ctr">
-                      <a:solidFill>
-                        <a:srgbClr val="E3E3E3"/>
-                      </a:solidFill>
-                      <a:prstDash val="solid"/>
-                      <a:round/>
-                      <a:headEnd type="none" w="med" len="med"/>
-                      <a:tailEnd type="none" w="med" len="med"/>
-                    </a:lnL>
-                    <a:lnR w="6350" cap="flat" cmpd="sng" algn="ctr">
-                      <a:solidFill>
-                        <a:srgbClr val="E3E3E3"/>
-                      </a:solidFill>
-                      <a:prstDash val="solid"/>
-                      <a:round/>
-                      <a:headEnd type="none" w="med" len="med"/>
-                      <a:tailEnd type="none" w="med" len="med"/>
-                    </a:lnR>
-                    <a:lnT w="6350" cap="flat" cmpd="sng" algn="ctr">
-                      <a:solidFill>
-                        <a:srgbClr val="E3E3E3"/>
-                      </a:solidFill>
-                      <a:prstDash val="solid"/>
-                      <a:round/>
-                      <a:headEnd type="none" w="med" len="med"/>
-                      <a:tailEnd type="none" w="med" len="med"/>
-                    </a:lnT>
-                    <a:lnB w="6350" cap="flat" cmpd="sng" algn="ctr">
-                      <a:solidFill>
-                        <a:srgbClr val="E3E3E3"/>
-                      </a:solidFill>
-                      <a:prstDash val="solid"/>
-                      <a:round/>
-                      <a:headEnd type="none" w="med" len="med"/>
-                      <a:tailEnd type="none" w="med" len="med"/>
-                    </a:lnB>
-                    <a:solidFill>
-                      <a:srgbClr val="FFFFFF"/>
-                    </a:solidFill>
-                  </a:tcPr>
-                </a:tc>
-                <a:tc>
-                  <a:txBody>
-                    <a:bodyPr/>
-                    <a:lstStyle/>
-                    <a:p>
-                      <a:pPr algn="ctr" indent="0" marL="0">
-                        <a:buNone/>
-                      </a:pPr>
-                      <a:r>
-                        <a:rPr lang="en-US" sz="830" dirty="0">
-                          <a:solidFill>
-                            <a:srgbClr val="262626"/>
-                          </a:solidFill>
-                          <a:latin typeface="Arial" pitchFamily="34" charset="0"/>
-                          <a:ea typeface="Arial" pitchFamily="34" charset="-122"/>
-                          <a:cs typeface="Arial" pitchFamily="34" charset="-120"/>
-                        </a:rPr>
-                        <a:t>0.70</a:t>
-                      </a:r>
-                      <a:endParaRPr lang="en-US" sz="830" dirty="0">
-                        <a:latin typeface="Arial" charset="0"/>
-                        <a:ea typeface="Arial" charset="0"/>
-                        <a:cs typeface="Arial" charset="0"/>
-                      </a:endParaRPr>
-                    </a:p>
-                  </a:txBody>
-                  <a:tcPr marL="38100" marR="38100" marT="25400" marB="25400" anchor="ctr">
-                    <a:lnL w="6350" cap="flat" cmpd="sng" algn="ctr">
-                      <a:solidFill>
-                        <a:srgbClr val="E3E3E3"/>
-                      </a:solidFill>
-                      <a:prstDash val="solid"/>
-                      <a:round/>
-                      <a:headEnd type="none" w="med" len="med"/>
-                      <a:tailEnd type="none" w="med" len="med"/>
-                    </a:lnL>
-                    <a:lnR w="6350" cap="flat" cmpd="sng" algn="ctr">
-                      <a:solidFill>
-                        <a:srgbClr val="E3E3E3"/>
-                      </a:solidFill>
-                      <a:prstDash val="solid"/>
-                      <a:round/>
-                      <a:headEnd type="none" w="med" len="med"/>
-                      <a:tailEnd type="none" w="med" len="med"/>
-                    </a:lnR>
-                    <a:lnT w="6350" cap="flat" cmpd="sng" algn="ctr">
-                      <a:solidFill>
-                        <a:srgbClr val="E3E3E3"/>
-                      </a:solidFill>
-                      <a:prstDash val="solid"/>
-                      <a:round/>
-                      <a:headEnd type="none" w="med" len="med"/>
-                      <a:tailEnd type="none" w="med" len="med"/>
-                    </a:lnT>
-                    <a:lnB w="6350" cap="flat" cmpd="sng" algn="ctr">
-                      <a:solidFill>
-                        <a:srgbClr val="E3E3E3"/>
-                      </a:solidFill>
-                      <a:prstDash val="solid"/>
-                      <a:round/>
-                      <a:headEnd type="none" w="med" len="med"/>
-                      <a:tailEnd type="none" w="med" len="med"/>
-                    </a:lnB>
-                    <a:solidFill>
-                      <a:srgbClr val="FFFFFF"/>
-                    </a:solidFill>
-                  </a:tcPr>
-                </a:tc>
-                <a:tc>
-                  <a:txBody>
-                    <a:bodyPr/>
-                    <a:lstStyle/>
-                    <a:p>
-                      <a:pPr algn="ctr" indent="0" marL="0">
-                        <a:buNone/>
-                      </a:pPr>
-                      <a:r>
-                        <a:rPr lang="en-US" sz="830" dirty="0">
-                          <a:solidFill>
-                            <a:srgbClr val="262626"/>
-                          </a:solidFill>
-                          <a:latin typeface="Arial" pitchFamily="34" charset="0"/>
-                          <a:ea typeface="Arial" pitchFamily="34" charset="-122"/>
-                          <a:cs typeface="Arial" pitchFamily="34" charset="-120"/>
-                        </a:rPr>
-                        <a:t>1.00</a:t>
-                      </a:r>
-                      <a:endParaRPr lang="en-US" sz="830" dirty="0">
-                        <a:latin typeface="Arial" charset="0"/>
-                        <a:ea typeface="Arial" charset="0"/>
-                        <a:cs typeface="Arial" charset="0"/>
-                      </a:endParaRPr>
-                    </a:p>
-                  </a:txBody>
-                  <a:tcPr marL="38100" marR="38100" marT="25400" marB="25400" anchor="ctr">
-                    <a:lnL w="6350" cap="flat" cmpd="sng" algn="ctr">
-                      <a:solidFill>
-                        <a:srgbClr val="E3E3E3"/>
-                      </a:solidFill>
-                      <a:prstDash val="solid"/>
-                      <a:round/>
-                      <a:headEnd type="none" w="med" len="med"/>
-                      <a:tailEnd type="none" w="med" len="med"/>
-                    </a:lnL>
-                    <a:lnR w="6350" cap="flat" cmpd="sng" algn="ctr">
-                      <a:solidFill>
-                        <a:srgbClr val="E3E3E3"/>
-                      </a:solidFill>
-                      <a:prstDash val="solid"/>
-                      <a:round/>
-                      <a:headEnd type="none" w="med" len="med"/>
-                      <a:tailEnd type="none" w="med" len="med"/>
-                    </a:lnR>
-                    <a:lnT w="6350" cap="flat" cmpd="sng" algn="ctr">
-                      <a:solidFill>
-                        <a:srgbClr val="E3E3E3"/>
-                      </a:solidFill>
-                      <a:prstDash val="solid"/>
-                      <a:round/>
-                      <a:headEnd type="none" w="med" len="med"/>
-                      <a:tailEnd type="none" w="med" len="med"/>
-                    </a:lnT>
-                    <a:lnB w="6350" cap="flat" cmpd="sng" algn="ctr">
-                      <a:solidFill>
-                        <a:srgbClr val="E3E3E3"/>
-                      </a:solidFill>
-                      <a:prstDash val="solid"/>
-                      <a:round/>
-                      <a:headEnd type="none" w="med" len="med"/>
-                      <a:tailEnd type="none" w="med" len="med"/>
-                    </a:lnB>
-                    <a:solidFill>
-                      <a:srgbClr val="FFFFFF"/>
-                    </a:solidFill>
-                  </a:tcPr>
-                </a:tc>
-                <a:tc>
-                  <a:txBody>
-                    <a:bodyPr/>
-                    <a:lstStyle/>
-                    <a:p>
-                      <a:pPr algn="ctr" indent="0" marL="0">
-                        <a:buNone/>
-                      </a:pPr>
-                      <a:r>
-                        <a:rPr lang="en-US" sz="830" dirty="0">
-                          <a:solidFill>
-                            <a:srgbClr val="262626"/>
-                          </a:solidFill>
-                          <a:latin typeface="Arial" pitchFamily="34" charset="0"/>
-                          <a:ea typeface="Arial" pitchFamily="34" charset="-122"/>
-                          <a:cs typeface="Arial" pitchFamily="34" charset="-120"/>
-                        </a:rPr>
-                        <a:t>0.55</a:t>
                       </a:r>
                       <a:endParaRPr lang="en-US" sz="830" dirty="0">
                         <a:latin typeface="Arial" charset="0"/>
@@ -31144,7 +31144,7 @@
                           <a:ea typeface="Arial" pitchFamily="34" charset="-122"/>
                           <a:cs typeface="Arial" pitchFamily="34" charset="-120"/>
                         </a:rPr>
-                        <a:t>18%</a:t>
+                        <a:t>37%</a:t>
                       </a:r>
                       <a:endParaRPr lang="en-US" sz="830" dirty="0">
                         <a:latin typeface="Arial" charset="0"/>
@@ -31348,7 +31348,7 @@
                           <a:ea typeface="Arial" pitchFamily="34" charset="-122"/>
                           <a:cs typeface="Arial" pitchFamily="34" charset="-120"/>
                         </a:rPr>
-                        <a:t>0.45</a:t>
+                        <a:t>0.55</a:t>
                       </a:r>
                       <a:endParaRPr lang="en-US" sz="830" dirty="0">
                         <a:latin typeface="Arial" charset="0"/>
@@ -31484,7 +31484,7 @@
                           <a:ea typeface="Arial" pitchFamily="34" charset="-122"/>
                           <a:cs typeface="Arial" pitchFamily="34" charset="-120"/>
                         </a:rPr>
-                        <a:t>0.55</a:t>
+                        <a:t>0.45</a:t>
                       </a:r>
                       <a:endParaRPr lang="en-US" sz="830" dirty="0">
                         <a:latin typeface="Arial" charset="0"/>
@@ -32166,7 +32166,7 @@
                           <a:ea typeface="Arial" pitchFamily="34" charset="-122"/>
                           <a:cs typeface="Arial" pitchFamily="34" charset="-120"/>
                         </a:rPr>
-                        <a:t>13.0%</a:t>
+                        <a:t>12.9%</a:t>
                       </a:r>
                       <a:endParaRPr lang="en-US" sz="830" dirty="0">
                         <a:latin typeface="Arial" charset="0"/>
@@ -32304,7 +32304,7 @@
                           <a:ea typeface="Arial" pitchFamily="34" charset="-122"/>
                           <a:cs typeface="Arial" pitchFamily="34" charset="-120"/>
                         </a:rPr>
-                        <a:t>12.0%</a:t>
+                        <a:t>11.9%</a:t>
                       </a:r>
                       <a:endParaRPr lang="en-US" sz="830" dirty="0">
                         <a:latin typeface="Arial" charset="0"/>
@@ -32580,7 +32580,7 @@
                           <a:ea typeface="Arial" pitchFamily="34" charset="-122"/>
                           <a:cs typeface="Arial" pitchFamily="34" charset="-120"/>
                         </a:rPr>
-                        <a:t>15.5%</a:t>
+                        <a:t>15.6%</a:t>
                       </a:r>
                       <a:endParaRPr lang="en-US" sz="830" dirty="0">
                         <a:latin typeface="Arial" charset="0"/>
@@ -32718,7 +32718,7 @@
                           <a:ea typeface="Arial" pitchFamily="34" charset="-122"/>
                           <a:cs typeface="Arial" pitchFamily="34" charset="-120"/>
                         </a:rPr>
-                        <a:t>17.3%</a:t>
+                        <a:t>17.4%</a:t>
                       </a:r>
                       <a:endParaRPr lang="en-US" sz="830" dirty="0">
                         <a:latin typeface="Arial" charset="0"/>
@@ -32856,7 +32856,7 @@
                           <a:ea typeface="Arial" pitchFamily="34" charset="-122"/>
                           <a:cs typeface="Arial" pitchFamily="34" charset="-120"/>
                         </a:rPr>
-                        <a:t>15.5% / 12.9%</a:t>
+                        <a:t>15.6% / 12.9%</a:t>
                       </a:r>
                       <a:endParaRPr lang="en-US" sz="830" dirty="0">
                         <a:latin typeface="Arial" charset="0"/>
@@ -36271,7 +36271,7 @@
                 <a:ea typeface="Arial" pitchFamily="34" charset="-122"/>
                 <a:cs typeface="Arial" pitchFamily="34" charset="-120"/>
               </a:rPr>
-              <a:t>100% repaid at autocall or maturity. Worth 89.4%</a:t>
+              <a:t>100% repaid at autocall or maturity. Worth 89.3%</a:t>
             </a:r>
             <a:endParaRPr lang="en-US" sz="780" dirty="0"/>
           </a:p>
@@ -36745,7 +36745,7 @@
                 <a:ea typeface="Arial" pitchFamily="34" charset="-122"/>
                 <a:cs typeface="Arial" pitchFamily="34" charset="-120"/>
               </a:rPr>
-              <a:t>If never called, the client bears the basket's fall below 100% at Y5. Worth −7.0%</a:t>
+              <a:t>If never called, the client bears the basket's fall below 100% at Y5. Worth −6.8%</a:t>
             </a:r>
             <a:endParaRPr lang="en-US" sz="780" dirty="0"/>
           </a:p>
@@ -36825,7 +36825,7 @@
                 <a:ea typeface="Arial" pitchFamily="34" charset="-122"/>
                 <a:cs typeface="Arial" pitchFamily="34" charset="-120"/>
               </a:rPr>
-              <a:t>Fair value 96.5% = principal 89.4% + coupons 14.1% − short put 7.0%.  </a:t>
+              <a:t>Fair value 96.5% = principal 89.3% + coupons 14.1% − short put 6.8%.  </a:t>
             </a:r>
             <a:pPr indent="0" marL="0">
               <a:buNone/>
@@ -37546,7 +37546,7 @@
                           <a:ea typeface="Arial" pitchFamily="34" charset="-122"/>
                           <a:cs typeface="Arial" pitchFamily="34" charset="-120"/>
                         </a:rPr>
-                        <a:t>21%</a:t>
+                        <a:t>0.8% (team outlook)</a:t>
                       </a:r>
                       <a:endParaRPr lang="en-US" sz="830" dirty="0">
                         <a:latin typeface="Arial" charset="0"/>
@@ -37684,7 +37684,7 @@
                           <a:ea typeface="Arial" pitchFamily="34" charset="-122"/>
                           <a:cs typeface="Arial" pitchFamily="34" charset="-120"/>
                         </a:rPr>
-                        <a:t>~7.8% fair coupon</a:t>
+                        <a:t>~7.9% fair coupon</a:t>
                       </a:r>
                       <a:endParaRPr lang="en-US" sz="830" dirty="0">
                         <a:latin typeface="Arial" charset="0"/>
@@ -37890,7 +37890,7 @@
                           <a:ea typeface="Arial" pitchFamily="34" charset="-122"/>
                           <a:cs typeface="Arial" pitchFamily="34" charset="-120"/>
                         </a:rPr>
-                        <a:t>9% p.a., paid at call</a:t>
+                        <a:t>13.6% fair, paid at call</a:t>
                       </a:r>
                       <a:endParaRPr lang="en-US" sz="830" dirty="0">
                         <a:latin typeface="Arial" charset="0"/>
@@ -37958,7 +37958,7 @@
                           <a:ea typeface="Arial" pitchFamily="34" charset="-122"/>
                           <a:cs typeface="Arial" pitchFamily="34" charset="-120"/>
                         </a:rPr>
-                        <a:t>14.3%</a:t>
+                        <a:t>14.0% (pricing)</a:t>
                       </a:r>
                       <a:endParaRPr lang="en-US" sz="830" dirty="0">
                         <a:latin typeface="Arial" charset="0"/>
@@ -38096,7 +38096,7 @@
                           <a:ea typeface="Arial" pitchFamily="34" charset="-122"/>
                           <a:cs typeface="Arial" pitchFamily="34" charset="-120"/>
                         </a:rPr>
-                        <a:t>84% of basket gain at Y5</a:t>
+                        <a:t>85% of basket gain at Y5</a:t>
                       </a:r>
                       <a:endParaRPr lang="en-US" sz="830" dirty="0">
                         <a:latin typeface="Arial" charset="0"/>
@@ -38292,7 +38292,7 @@
                 <a:ea typeface="Arial" pitchFamily="34" charset="-122"/>
                 <a:cs typeface="Arial" pitchFamily="34" charset="-120"/>
               </a:rPr>
-              <a:t>The snowball pays 9% but loses capital in ~14% of paths. Full protection pays only ~8%. The PPN pays nothing unless the basket ends above 100% after 5 years. Our note pays 12.75%, with money usually back within ~2 years, but takes the basket's fall if never called.</a:t>
+              <a:t>The snowball's fair coupon is 13.6%, but it loses capital in ~14% of paths (pricing measure). Full protection pays only ~8%. The PPN pays nothing unless the basket ends above 100% after 5 years. Our note pays 12.75%, with money usually back within ~1 year on the team outlook, but takes the basket's fall if never called.</a:t>
             </a:r>
             <a:endParaRPr lang="en-US" sz="830" dirty="0"/>
           </a:p>
@@ -39090,7 +39090,7 @@
                 <a:ea typeface="Arial" pitchFamily="34" charset="-122"/>
                 <a:cs typeface="Arial" pitchFamily="34" charset="-120"/>
               </a:rPr>
-              <a:t>Observation timeline and the three outcomes at maturity (building blocks in the appendix)</a:t>
+              <a:t>Observation timeline and the three possible outcomes (building blocks in the appendix)</a:t>
             </a:r>
             <a:endParaRPr lang="en-US" sz="1060" dirty="0"/>
           </a:p>
@@ -39820,7 +39820,7 @@
                 <a:ea typeface="Arial" pitchFamily="34" charset="-122"/>
                 <a:cs typeface="Arial" pitchFamily="34" charset="-120"/>
               </a:rPr>
-              <a:t>21%</a:t>
+              <a:t>0.8%</a:t>
             </a:r>
             <a:endParaRPr lang="en-US" sz="3500" dirty="0"/>
           </a:p>
@@ -39898,7 +39898,7 @@
                 <a:ea typeface="Arial" pitchFamily="34" charset="-122"/>
                 <a:cs typeface="Arial" pitchFamily="34" charset="-120"/>
               </a:rPr>
-              <a:t>If never called, repaid at the basket level (on average 56% back): the price of the higher coupon</a:t>
+              <a:t>On the team outlook (slides 4–5). If markets go nowhere it rises to 33%: never called, repaid at the basket level</a:t>
             </a:r>
             <a:endParaRPr lang="en-US" sz="970" dirty="0"/>
           </a:p>
@@ -39962,7 +39962,7 @@
                 <a:ea typeface="Arial" pitchFamily="34" charset="-122"/>
                 <a:cs typeface="Arial" pitchFamily="34" charset="-120"/>
               </a:rPr>
-              <a:t>49%</a:t>
+              <a:t>78%</a:t>
             </a:r>
             <a:endParaRPr lang="en-US" sz="3500" dirty="0"/>
           </a:p>
@@ -40040,7 +40040,7 @@
                 <a:ea typeface="Arial" pitchFamily="34" charset="-122"/>
                 <a:cs typeface="Arial" pitchFamily="34" charset="-120"/>
               </a:rPr>
-              <a:t>Risk-neutral. 79% called within 5 years; expected life 2.22 years</a:t>
+              <a:t>Team outlook. 99% called within 5 years; expected life 1.2 years</a:t>
             </a:r>
             <a:endParaRPr lang="en-US" sz="970" dirty="0"/>
           </a:p>
@@ -40121,7 +40121,7 @@
                 <a:ea typeface="Arial" pitchFamily="34" charset="-122"/>
                 <a:cs typeface="Arial" pitchFamily="34" charset="-120"/>
               </a:rPr>
-              <a:t>The family earns 12.75% a year in the 79% of paths where the basket gets back to its starting level; if it never does (21% of paths, risk-neutral), the note repays the basket's level at Year 5. Fair value is 96.5%, so issuing at par leaves Natixis 3.5% for hedging and margin.</a:t>
+              <a:t>On the team's outlook (slides 4–5) the note is called in 99% of paths, usually within 1.2 years, paying 12.75% a year; if the basket never gets back to its start (0.8%; 33% if markets go nowhere), the note repays the basket's level at Year 5. Fair value is 96.5%, so issuing at par leaves Natixis 3.5% for hedging and margin.</a:t>
             </a:r>
             <a:endParaRPr lang="en-US" sz="1060" dirty="0"/>
           </a:p>
@@ -40866,28 +40866,7 @@
                 <a:ea typeface="Arial" pitchFamily="34" charset="-122"/>
                 <a:cs typeface="Arial" pitchFamily="34" charset="-120"/>
               </a:rPr>
-              <a:t>Accepts limited liquidity on 5% of wealth</a:t>
-            </a:r>
-            <a:endParaRPr lang="en-US" sz="970" dirty="0"/>
-          </a:p>
-          <a:p>
-            <a:pPr marL="342900" indent="-342900">
-              <a:spcAft>
-                <a:spcPts val="300"/>
-              </a:spcAft>
-              <a:buSzPct val="100000"/>
-              <a:buChar char="•"/>
-            </a:pPr>
-            <a:r>
-              <a:rPr lang="en-US" sz="970" dirty="0">
-                <a:solidFill>
-                  <a:srgbClr val="FFFFFF"/>
-                </a:solidFill>
-                <a:latin typeface="Arial" pitchFamily="34" charset="0"/>
-                <a:ea typeface="Arial" pitchFamily="34" charset="-122"/>
-                <a:cs typeface="Arial" pitchFamily="34" charset="-120"/>
-              </a:rPr>
-              <a:t>Accepts equity risk on 5% of wealth</a:t>
+              <a:t>Accepts limited liquidity and equity risk on 5% of wealth</a:t>
             </a:r>
             <a:endParaRPr lang="en-US" sz="970" dirty="0"/>
           </a:p>
@@ -41419,7 +41398,7 @@
                           <a:ea typeface="Arial" pitchFamily="34" charset="-122"/>
                           <a:cs typeface="Arial" pitchFamily="34" charset="-120"/>
                         </a:rPr>
-                        <a:t>Diversified basket (not worst-of); capital back early in 79% of paths; BPCE-backed issuer</a:t>
+                        <a:t>Diversified basket at the low-risk edge of all mixes (slide 4); capital back early in 99% of paths; BPCE-backed issuer</a:t>
                       </a:r>
                       <a:endParaRPr lang="en-US" sz="870" dirty="0">
                         <a:latin typeface="Arial" charset="0"/>
@@ -41944,7 +41923,7 @@
                 <a:ea typeface="Arial" pitchFamily="34" charset="-122"/>
                 <a:cs typeface="Arial" pitchFamily="34" charset="-120"/>
               </a:rPr>
-              <a:t>Investment thesis: structural growth themes, and high rates and volatility that pay for a double-digit coupon</a:t>
+              <a:t>Market view: structural growth themes, and high rates and volatility that pay for a double-digit coupon</a:t>
             </a:r>
             <a:endParaRPr lang="en-US" sz="850" dirty="0"/>
           </a:p>
@@ -43930,7 +43909,7 @@
                 <a:ea typeface="Arial" pitchFamily="34" charset="-122"/>
                 <a:cs typeface="Arial" pitchFamily="34" charset="-120"/>
               </a:rPr>
-              <a:t>Fed median 4.125% to end-2027, cuts only from 2028; 12 dots see 4.375%.</a:t>
+              <a:t>Fed median 4.125% to end-2027, cuts only from 2028; 4.375% seen by 4 members for 2026 and 8 for 2027.</a:t>
             </a:r>
             <a:endParaRPr lang="en-US" sz="710" dirty="0"/>
           </a:p>
@@ -44434,7 +44413,7 @@
                 <a:ea typeface="Arial" pitchFamily="34" charset="-122"/>
                 <a:cs typeface="Arial" pitchFamily="34" charset="-120"/>
               </a:rPr>
-              <a:t>→ Diversified five-ETF basket; capping upside at the coupon costs little</a:t>
+              <a:t>→ Diversified five-ETF basket; coupons lock in gains if the rally stalls</a:t>
             </a:r>
             <a:endParaRPr lang="en-US" sz="680" dirty="0"/>
           </a:p>
@@ -48497,11 +48476,11 @@
             <a:avLst/>
           </a:prstGeom>
           <a:solidFill>
-            <a:srgbClr val="A6A6A6"/>
+            <a:srgbClr val="4F86AE"/>
           </a:solidFill>
           <a:ln w="12700">
             <a:solidFill>
-              <a:srgbClr val="A6A6A6"/>
+              <a:srgbClr val="4F86AE"/>
             </a:solidFill>
             <a:prstDash val="solid"/>
           </a:ln>
@@ -48540,7 +48519,7 @@
                 <a:ea typeface="Arial" pitchFamily="34" charset="-122"/>
                 <a:cs typeface="Arial" pitchFamily="34" charset="-120"/>
               </a:rPr>
-              <a:t>Japan Semiconductor (2644 JP)</a:t>
+              <a:t>iShares MSCI South Korea (EWY)</a:t>
             </a:r>
             <a:endParaRPr lang="en-US" sz="780" dirty="0"/>
           </a:p>
@@ -48625,11 +48604,11 @@
             <a:avLst/>
           </a:prstGeom>
           <a:solidFill>
-            <a:srgbClr val="4F86AE"/>
+            <a:srgbClr val="A6A6A6"/>
           </a:solidFill>
           <a:ln w="12700">
             <a:solidFill>
-              <a:srgbClr val="4F86AE"/>
+              <a:srgbClr val="A6A6A6"/>
             </a:solidFill>
             <a:prstDash val="solid"/>
           </a:ln>
@@ -48668,7 +48647,7 @@
                 <a:ea typeface="Arial" pitchFamily="34" charset="-122"/>
                 <a:cs typeface="Arial" pitchFamily="34" charset="-120"/>
               </a:rPr>
-              <a:t>iShares MSCI South Korea (EWY)</a:t>
+              <a:t>Japan Semiconductor (2644 JP)</a:t>
             </a:r>
             <a:endParaRPr lang="en-US" sz="780" dirty="0"/>
           </a:p>
@@ -49262,7 +49241,555 @@
                           <a:ea typeface="Arial" pitchFamily="34" charset="-122"/>
                           <a:cs typeface="Arial" pitchFamily="34" charset="-120"/>
                         </a:rPr>
-                        <a:t>32%</a:t>
+                        <a:t>18%</a:t>
+                      </a:r>
+                      <a:endParaRPr lang="en-US" sz="780" dirty="0">
+                        <a:latin typeface="Arial" charset="0"/>
+                        <a:ea typeface="Arial" charset="0"/>
+                        <a:cs typeface="Arial" charset="0"/>
+                      </a:endParaRPr>
+                    </a:p>
+                  </a:txBody>
+                  <a:tcPr marL="50800" marR="50800" marT="25400" marB="25400" anchor="ctr">
+                    <a:lnL w="6350" cap="flat" cmpd="sng" algn="ctr">
+                      <a:solidFill>
+                        <a:srgbClr val="E3E3E3"/>
+                      </a:solidFill>
+                      <a:prstDash val="solid"/>
+                      <a:round/>
+                      <a:headEnd type="none" w="med" len="med"/>
+                      <a:tailEnd type="none" w="med" len="med"/>
+                    </a:lnL>
+                    <a:lnR w="6350" cap="flat" cmpd="sng" algn="ctr">
+                      <a:solidFill>
+                        <a:srgbClr val="E3E3E3"/>
+                      </a:solidFill>
+                      <a:prstDash val="solid"/>
+                      <a:round/>
+                      <a:headEnd type="none" w="med" len="med"/>
+                      <a:tailEnd type="none" w="med" len="med"/>
+                    </a:lnR>
+                    <a:lnT w="6350" cap="flat" cmpd="sng" algn="ctr">
+                      <a:solidFill>
+                        <a:srgbClr val="E3E3E3"/>
+                      </a:solidFill>
+                      <a:prstDash val="solid"/>
+                      <a:round/>
+                      <a:headEnd type="none" w="med" len="med"/>
+                      <a:tailEnd type="none" w="med" len="med"/>
+                    </a:lnT>
+                    <a:lnB w="6350" cap="flat" cmpd="sng" algn="ctr">
+                      <a:solidFill>
+                        <a:srgbClr val="E3E3E3"/>
+                      </a:solidFill>
+                      <a:prstDash val="solid"/>
+                      <a:round/>
+                      <a:headEnd type="none" w="med" len="med"/>
+                      <a:tailEnd type="none" w="med" len="med"/>
+                    </a:lnB>
+                    <a:solidFill>
+                      <a:srgbClr val="FFFFFF"/>
+                    </a:solidFill>
+                  </a:tcPr>
+                </a:tc>
+              </a:tr>
+              <a:tr h="463601">
+                <a:tc>
+                  <a:txBody>
+                    <a:bodyPr/>
+                    <a:lstStyle/>
+                    <a:p>
+                      <a:pPr indent="0" marL="0">
+                        <a:buNone/>
+                      </a:pPr>
+                      <a:r>
+                        <a:rPr lang="en-US" sz="780" b="1" dirty="0">
+                          <a:solidFill>
+                            <a:srgbClr val="262626"/>
+                          </a:solidFill>
+                          <a:latin typeface="Arial" pitchFamily="34" charset="0"/>
+                          <a:ea typeface="Arial" pitchFamily="34" charset="-122"/>
+                          <a:cs typeface="Arial" pitchFamily="34" charset="-120"/>
+                        </a:rPr>
+                        <a:t>iShares MSCI South Korea (EWY)</a:t>
+                      </a:r>
+                      <a:endParaRPr lang="en-US" sz="780" dirty="0">
+                        <a:latin typeface="Arial" charset="0"/>
+                        <a:ea typeface="Arial" charset="0"/>
+                        <a:cs typeface="Arial" charset="0"/>
+                      </a:endParaRPr>
+                    </a:p>
+                  </a:txBody>
+                  <a:tcPr marL="50800" marR="50800" marT="25400" marB="25400" anchor="ctr">
+                    <a:lnL w="6350" cap="flat" cmpd="sng" algn="ctr">
+                      <a:solidFill>
+                        <a:srgbClr val="E3E3E3"/>
+                      </a:solidFill>
+                      <a:prstDash val="solid"/>
+                      <a:round/>
+                      <a:headEnd type="none" w="med" len="med"/>
+                      <a:tailEnd type="none" w="med" len="med"/>
+                    </a:lnL>
+                    <a:lnR w="6350" cap="flat" cmpd="sng" algn="ctr">
+                      <a:solidFill>
+                        <a:srgbClr val="E3E3E3"/>
+                      </a:solidFill>
+                      <a:prstDash val="solid"/>
+                      <a:round/>
+                      <a:headEnd type="none" w="med" len="med"/>
+                      <a:tailEnd type="none" w="med" len="med"/>
+                    </a:lnR>
+                    <a:lnT w="6350" cap="flat" cmpd="sng" algn="ctr">
+                      <a:solidFill>
+                        <a:srgbClr val="E3E3E3"/>
+                      </a:solidFill>
+                      <a:prstDash val="solid"/>
+                      <a:round/>
+                      <a:headEnd type="none" w="med" len="med"/>
+                      <a:tailEnd type="none" w="med" len="med"/>
+                    </a:lnT>
+                    <a:lnB w="6350" cap="flat" cmpd="sng" algn="ctr">
+                      <a:solidFill>
+                        <a:srgbClr val="E3E3E3"/>
+                      </a:solidFill>
+                      <a:prstDash val="solid"/>
+                      <a:round/>
+                      <a:headEnd type="none" w="med" len="med"/>
+                      <a:tailEnd type="none" w="med" len="med"/>
+                    </a:lnB>
+                    <a:solidFill>
+                      <a:srgbClr val="FFFFFF"/>
+                    </a:solidFill>
+                  </a:tcPr>
+                </a:tc>
+                <a:tc>
+                  <a:txBody>
+                    <a:bodyPr/>
+                    <a:lstStyle/>
+                    <a:p>
+                      <a:pPr indent="0" marL="0">
+                        <a:buNone/>
+                      </a:pPr>
+                      <a:r>
+                        <a:rPr lang="en-US" sz="780" dirty="0">
+                          <a:solidFill>
+                            <a:srgbClr val="262626"/>
+                          </a:solidFill>
+                          <a:latin typeface="Arial" pitchFamily="34" charset="0"/>
+                          <a:ea typeface="Arial" pitchFamily="34" charset="-122"/>
+                          <a:cs typeface="Arial" pitchFamily="34" charset="-120"/>
+                        </a:rPr>
+                        <a:t>20%</a:t>
+                      </a:r>
+                      <a:endParaRPr lang="en-US" sz="780" dirty="0">
+                        <a:latin typeface="Arial" charset="0"/>
+                        <a:ea typeface="Arial" charset="0"/>
+                        <a:cs typeface="Arial" charset="0"/>
+                      </a:endParaRPr>
+                    </a:p>
+                  </a:txBody>
+                  <a:tcPr marL="50800" marR="50800" marT="25400" marB="25400" anchor="ctr">
+                    <a:lnL w="6350" cap="flat" cmpd="sng" algn="ctr">
+                      <a:solidFill>
+                        <a:srgbClr val="E3E3E3"/>
+                      </a:solidFill>
+                      <a:prstDash val="solid"/>
+                      <a:round/>
+                      <a:headEnd type="none" w="med" len="med"/>
+                      <a:tailEnd type="none" w="med" len="med"/>
+                    </a:lnL>
+                    <a:lnR w="6350" cap="flat" cmpd="sng" algn="ctr">
+                      <a:solidFill>
+                        <a:srgbClr val="E3E3E3"/>
+                      </a:solidFill>
+                      <a:prstDash val="solid"/>
+                      <a:round/>
+                      <a:headEnd type="none" w="med" len="med"/>
+                      <a:tailEnd type="none" w="med" len="med"/>
+                    </a:lnR>
+                    <a:lnT w="6350" cap="flat" cmpd="sng" algn="ctr">
+                      <a:solidFill>
+                        <a:srgbClr val="E3E3E3"/>
+                      </a:solidFill>
+                      <a:prstDash val="solid"/>
+                      <a:round/>
+                      <a:headEnd type="none" w="med" len="med"/>
+                      <a:tailEnd type="none" w="med" len="med"/>
+                    </a:lnT>
+                    <a:lnB w="6350" cap="flat" cmpd="sng" algn="ctr">
+                      <a:solidFill>
+                        <a:srgbClr val="E3E3E3"/>
+                      </a:solidFill>
+                      <a:prstDash val="solid"/>
+                      <a:round/>
+                      <a:headEnd type="none" w="med" len="med"/>
+                      <a:tailEnd type="none" w="med" len="med"/>
+                    </a:lnB>
+                    <a:solidFill>
+                      <a:srgbClr val="FFFFFF"/>
+                    </a:solidFill>
+                  </a:tcPr>
+                </a:tc>
+                <a:tc>
+                  <a:txBody>
+                    <a:bodyPr/>
+                    <a:lstStyle/>
+                    <a:p>
+                      <a:pPr indent="0" marL="0">
+                        <a:buNone/>
+                      </a:pPr>
+                      <a:r>
+                        <a:rPr lang="en-US" sz="780" dirty="0">
+                          <a:solidFill>
+                            <a:srgbClr val="262626"/>
+                          </a:solidFill>
+                          <a:latin typeface="Arial" pitchFamily="34" charset="0"/>
+                          <a:ea typeface="Arial" pitchFamily="34" charset="-122"/>
+                          <a:cs typeface="Arial" pitchFamily="34" charset="-120"/>
+                        </a:rPr>
+                        <a:t>Korea large caps (Samsung + SK hynix ~44%): high-bandwidth memory for AI</a:t>
+                      </a:r>
+                      <a:endParaRPr lang="en-US" sz="780" dirty="0">
+                        <a:latin typeface="Arial" charset="0"/>
+                        <a:ea typeface="Arial" charset="0"/>
+                        <a:cs typeface="Arial" charset="0"/>
+                      </a:endParaRPr>
+                    </a:p>
+                  </a:txBody>
+                  <a:tcPr marL="50800" marR="50800" marT="25400" marB="25400" anchor="ctr">
+                    <a:lnL w="6350" cap="flat" cmpd="sng" algn="ctr">
+                      <a:solidFill>
+                        <a:srgbClr val="E3E3E3"/>
+                      </a:solidFill>
+                      <a:prstDash val="solid"/>
+                      <a:round/>
+                      <a:headEnd type="none" w="med" len="med"/>
+                      <a:tailEnd type="none" w="med" len="med"/>
+                    </a:lnL>
+                    <a:lnR w="6350" cap="flat" cmpd="sng" algn="ctr">
+                      <a:solidFill>
+                        <a:srgbClr val="E3E3E3"/>
+                      </a:solidFill>
+                      <a:prstDash val="solid"/>
+                      <a:round/>
+                      <a:headEnd type="none" w="med" len="med"/>
+                      <a:tailEnd type="none" w="med" len="med"/>
+                    </a:lnR>
+                    <a:lnT w="6350" cap="flat" cmpd="sng" algn="ctr">
+                      <a:solidFill>
+                        <a:srgbClr val="E3E3E3"/>
+                      </a:solidFill>
+                      <a:prstDash val="solid"/>
+                      <a:round/>
+                      <a:headEnd type="none" w="med" len="med"/>
+                      <a:tailEnd type="none" w="med" len="med"/>
+                    </a:lnT>
+                    <a:lnB w="6350" cap="flat" cmpd="sng" algn="ctr">
+                      <a:solidFill>
+                        <a:srgbClr val="E3E3E3"/>
+                      </a:solidFill>
+                      <a:prstDash val="solid"/>
+                      <a:round/>
+                      <a:headEnd type="none" w="med" len="med"/>
+                      <a:tailEnd type="none" w="med" len="med"/>
+                    </a:lnB>
+                    <a:solidFill>
+                      <a:srgbClr val="FFFFFF"/>
+                    </a:solidFill>
+                  </a:tcPr>
+                </a:tc>
+                <a:tc>
+                  <a:txBody>
+                    <a:bodyPr/>
+                    <a:lstStyle/>
+                    <a:p>
+                      <a:pPr indent="0" marL="0">
+                        <a:buNone/>
+                      </a:pPr>
+                      <a:r>
+                        <a:rPr lang="en-US" sz="780" dirty="0">
+                          <a:solidFill>
+                            <a:srgbClr val="262626"/>
+                          </a:solidFill>
+                          <a:latin typeface="Arial" pitchFamily="34" charset="0"/>
+                          <a:ea typeface="Arial" pitchFamily="34" charset="-122"/>
+                          <a:cs typeface="Arial" pitchFamily="34" charset="-120"/>
+                        </a:rPr>
+                        <a:t>49%</a:t>
+                      </a:r>
+                      <a:endParaRPr lang="en-US" sz="780" dirty="0">
+                        <a:latin typeface="Arial" charset="0"/>
+                        <a:ea typeface="Arial" charset="0"/>
+                        <a:cs typeface="Arial" charset="0"/>
+                      </a:endParaRPr>
+                    </a:p>
+                  </a:txBody>
+                  <a:tcPr marL="50800" marR="50800" marT="25400" marB="25400" anchor="ctr">
+                    <a:lnL w="6350" cap="flat" cmpd="sng" algn="ctr">
+                      <a:solidFill>
+                        <a:srgbClr val="E3E3E3"/>
+                      </a:solidFill>
+                      <a:prstDash val="solid"/>
+                      <a:round/>
+                      <a:headEnd type="none" w="med" len="med"/>
+                      <a:tailEnd type="none" w="med" len="med"/>
+                    </a:lnL>
+                    <a:lnR w="6350" cap="flat" cmpd="sng" algn="ctr">
+                      <a:solidFill>
+                        <a:srgbClr val="E3E3E3"/>
+                      </a:solidFill>
+                      <a:prstDash val="solid"/>
+                      <a:round/>
+                      <a:headEnd type="none" w="med" len="med"/>
+                      <a:tailEnd type="none" w="med" len="med"/>
+                    </a:lnR>
+                    <a:lnT w="6350" cap="flat" cmpd="sng" algn="ctr">
+                      <a:solidFill>
+                        <a:srgbClr val="E3E3E3"/>
+                      </a:solidFill>
+                      <a:prstDash val="solid"/>
+                      <a:round/>
+                      <a:headEnd type="none" w="med" len="med"/>
+                      <a:tailEnd type="none" w="med" len="med"/>
+                    </a:lnT>
+                    <a:lnB w="6350" cap="flat" cmpd="sng" algn="ctr">
+                      <a:solidFill>
+                        <a:srgbClr val="E3E3E3"/>
+                      </a:solidFill>
+                      <a:prstDash val="solid"/>
+                      <a:round/>
+                      <a:headEnd type="none" w="med" len="med"/>
+                      <a:tailEnd type="none" w="med" len="med"/>
+                    </a:lnB>
+                    <a:solidFill>
+                      <a:srgbClr val="FFFFFF"/>
+                    </a:solidFill>
+                  </a:tcPr>
+                </a:tc>
+              </a:tr>
+              <a:tr h="463601">
+                <a:tc>
+                  <a:txBody>
+                    <a:bodyPr/>
+                    <a:lstStyle/>
+                    <a:p>
+                      <a:pPr indent="0" marL="0">
+                        <a:buNone/>
+                      </a:pPr>
+                      <a:r>
+                        <a:rPr lang="en-US" sz="780" b="1" dirty="0">
+                          <a:solidFill>
+                            <a:srgbClr val="262626"/>
+                          </a:solidFill>
+                          <a:latin typeface="Arial" pitchFamily="34" charset="0"/>
+                          <a:ea typeface="Arial" pitchFamily="34" charset="-122"/>
+                          <a:cs typeface="Arial" pitchFamily="34" charset="-120"/>
+                        </a:rPr>
+                        <a:t>iShares MSCI Taiwan (EWT)</a:t>
+                      </a:r>
+                      <a:endParaRPr lang="en-US" sz="780" dirty="0">
+                        <a:latin typeface="Arial" charset="0"/>
+                        <a:ea typeface="Arial" charset="0"/>
+                        <a:cs typeface="Arial" charset="0"/>
+                      </a:endParaRPr>
+                    </a:p>
+                  </a:txBody>
+                  <a:tcPr marL="50800" marR="50800" marT="25400" marB="25400" anchor="ctr">
+                    <a:lnL w="6350" cap="flat" cmpd="sng" algn="ctr">
+                      <a:solidFill>
+                        <a:srgbClr val="E3E3E3"/>
+                      </a:solidFill>
+                      <a:prstDash val="solid"/>
+                      <a:round/>
+                      <a:headEnd type="none" w="med" len="med"/>
+                      <a:tailEnd type="none" w="med" len="med"/>
+                    </a:lnL>
+                    <a:lnR w="6350" cap="flat" cmpd="sng" algn="ctr">
+                      <a:solidFill>
+                        <a:srgbClr val="E3E3E3"/>
+                      </a:solidFill>
+                      <a:prstDash val="solid"/>
+                      <a:round/>
+                      <a:headEnd type="none" w="med" len="med"/>
+                      <a:tailEnd type="none" w="med" len="med"/>
+                    </a:lnR>
+                    <a:lnT w="6350" cap="flat" cmpd="sng" algn="ctr">
+                      <a:solidFill>
+                        <a:srgbClr val="E3E3E3"/>
+                      </a:solidFill>
+                      <a:prstDash val="solid"/>
+                      <a:round/>
+                      <a:headEnd type="none" w="med" len="med"/>
+                      <a:tailEnd type="none" w="med" len="med"/>
+                    </a:lnT>
+                    <a:lnB w="6350" cap="flat" cmpd="sng" algn="ctr">
+                      <a:solidFill>
+                        <a:srgbClr val="E3E3E3"/>
+                      </a:solidFill>
+                      <a:prstDash val="solid"/>
+                      <a:round/>
+                      <a:headEnd type="none" w="med" len="med"/>
+                      <a:tailEnd type="none" w="med" len="med"/>
+                    </a:lnB>
+                    <a:solidFill>
+                      <a:srgbClr val="FFFFFF"/>
+                    </a:solidFill>
+                  </a:tcPr>
+                </a:tc>
+                <a:tc>
+                  <a:txBody>
+                    <a:bodyPr/>
+                    <a:lstStyle/>
+                    <a:p>
+                      <a:pPr indent="0" marL="0">
+                        <a:buNone/>
+                      </a:pPr>
+                      <a:r>
+                        <a:rPr lang="en-US" sz="780" dirty="0">
+                          <a:solidFill>
+                            <a:srgbClr val="262626"/>
+                          </a:solidFill>
+                          <a:latin typeface="Arial" pitchFamily="34" charset="0"/>
+                          <a:ea typeface="Arial" pitchFamily="34" charset="-122"/>
+                          <a:cs typeface="Arial" pitchFamily="34" charset="-120"/>
+                        </a:rPr>
+                        <a:t>15%</a:t>
+                      </a:r>
+                      <a:endParaRPr lang="en-US" sz="780" dirty="0">
+                        <a:latin typeface="Arial" charset="0"/>
+                        <a:ea typeface="Arial" charset="0"/>
+                        <a:cs typeface="Arial" charset="0"/>
+                      </a:endParaRPr>
+                    </a:p>
+                  </a:txBody>
+                  <a:tcPr marL="50800" marR="50800" marT="25400" marB="25400" anchor="ctr">
+                    <a:lnL w="6350" cap="flat" cmpd="sng" algn="ctr">
+                      <a:solidFill>
+                        <a:srgbClr val="E3E3E3"/>
+                      </a:solidFill>
+                      <a:prstDash val="solid"/>
+                      <a:round/>
+                      <a:headEnd type="none" w="med" len="med"/>
+                      <a:tailEnd type="none" w="med" len="med"/>
+                    </a:lnL>
+                    <a:lnR w="6350" cap="flat" cmpd="sng" algn="ctr">
+                      <a:solidFill>
+                        <a:srgbClr val="E3E3E3"/>
+                      </a:solidFill>
+                      <a:prstDash val="solid"/>
+                      <a:round/>
+                      <a:headEnd type="none" w="med" len="med"/>
+                      <a:tailEnd type="none" w="med" len="med"/>
+                    </a:lnR>
+                    <a:lnT w="6350" cap="flat" cmpd="sng" algn="ctr">
+                      <a:solidFill>
+                        <a:srgbClr val="E3E3E3"/>
+                      </a:solidFill>
+                      <a:prstDash val="solid"/>
+                      <a:round/>
+                      <a:headEnd type="none" w="med" len="med"/>
+                      <a:tailEnd type="none" w="med" len="med"/>
+                    </a:lnT>
+                    <a:lnB w="6350" cap="flat" cmpd="sng" algn="ctr">
+                      <a:solidFill>
+                        <a:srgbClr val="E3E3E3"/>
+                      </a:solidFill>
+                      <a:prstDash val="solid"/>
+                      <a:round/>
+                      <a:headEnd type="none" w="med" len="med"/>
+                      <a:tailEnd type="none" w="med" len="med"/>
+                    </a:lnB>
+                    <a:solidFill>
+                      <a:srgbClr val="FFFFFF"/>
+                    </a:solidFill>
+                  </a:tcPr>
+                </a:tc>
+                <a:tc>
+                  <a:txBody>
+                    <a:bodyPr/>
+                    <a:lstStyle/>
+                    <a:p>
+                      <a:pPr indent="0" marL="0">
+                        <a:buNone/>
+                      </a:pPr>
+                      <a:r>
+                        <a:rPr lang="en-US" sz="780" dirty="0">
+                          <a:solidFill>
+                            <a:srgbClr val="262626"/>
+                          </a:solidFill>
+                          <a:latin typeface="Arial" pitchFamily="34" charset="0"/>
+                          <a:ea typeface="Arial" pitchFamily="34" charset="-122"/>
+                          <a:cs typeface="Arial" pitchFamily="34" charset="-120"/>
+                        </a:rPr>
+                        <a:t>Taiwan large caps (TSMC, MediaTek, Delta): AI foundry and server chain in the family's Greater China region</a:t>
+                      </a:r>
+                      <a:endParaRPr lang="en-US" sz="780" dirty="0">
+                        <a:latin typeface="Arial" charset="0"/>
+                        <a:ea typeface="Arial" charset="0"/>
+                        <a:cs typeface="Arial" charset="0"/>
+                      </a:endParaRPr>
+                    </a:p>
+                  </a:txBody>
+                  <a:tcPr marL="50800" marR="50800" marT="25400" marB="25400" anchor="ctr">
+                    <a:lnL w="6350" cap="flat" cmpd="sng" algn="ctr">
+                      <a:solidFill>
+                        <a:srgbClr val="E3E3E3"/>
+                      </a:solidFill>
+                      <a:prstDash val="solid"/>
+                      <a:round/>
+                      <a:headEnd type="none" w="med" len="med"/>
+                      <a:tailEnd type="none" w="med" len="med"/>
+                    </a:lnL>
+                    <a:lnR w="6350" cap="flat" cmpd="sng" algn="ctr">
+                      <a:solidFill>
+                        <a:srgbClr val="E3E3E3"/>
+                      </a:solidFill>
+                      <a:prstDash val="solid"/>
+                      <a:round/>
+                      <a:headEnd type="none" w="med" len="med"/>
+                      <a:tailEnd type="none" w="med" len="med"/>
+                    </a:lnR>
+                    <a:lnT w="6350" cap="flat" cmpd="sng" algn="ctr">
+                      <a:solidFill>
+                        <a:srgbClr val="E3E3E3"/>
+                      </a:solidFill>
+                      <a:prstDash val="solid"/>
+                      <a:round/>
+                      <a:headEnd type="none" w="med" len="med"/>
+                      <a:tailEnd type="none" w="med" len="med"/>
+                    </a:lnT>
+                    <a:lnB w="6350" cap="flat" cmpd="sng" algn="ctr">
+                      <a:solidFill>
+                        <a:srgbClr val="E3E3E3"/>
+                      </a:solidFill>
+                      <a:prstDash val="solid"/>
+                      <a:round/>
+                      <a:headEnd type="none" w="med" len="med"/>
+                      <a:tailEnd type="none" w="med" len="med"/>
+                    </a:lnB>
+                    <a:solidFill>
+                      <a:srgbClr val="FFFFFF"/>
+                    </a:solidFill>
+                  </a:tcPr>
+                </a:tc>
+                <a:tc>
+                  <a:txBody>
+                    <a:bodyPr/>
+                    <a:lstStyle/>
+                    <a:p>
+                      <a:pPr indent="0" marL="0">
+                        <a:buNone/>
+                      </a:pPr>
+                      <a:r>
+                        <a:rPr lang="en-US" sz="780" dirty="0">
+                          <a:solidFill>
+                            <a:srgbClr val="262626"/>
+                          </a:solidFill>
+                          <a:latin typeface="Arial" pitchFamily="34" charset="0"/>
+                          <a:ea typeface="Arial" pitchFamily="34" charset="-122"/>
+                          <a:cs typeface="Arial" pitchFamily="34" charset="-120"/>
+                        </a:rPr>
+                        <a:t>36%</a:t>
                       </a:r>
                       <a:endParaRPr lang="en-US" sz="780" dirty="0">
                         <a:latin typeface="Arial" charset="0"/>
@@ -49536,555 +50063,7 @@
                           <a:ea typeface="Arial" pitchFamily="34" charset="-122"/>
                           <a:cs typeface="Arial" pitchFamily="34" charset="-120"/>
                         </a:rPr>
-                        <a:t>38%</a:t>
-                      </a:r>
-                      <a:endParaRPr lang="en-US" sz="780" dirty="0">
-                        <a:latin typeface="Arial" charset="0"/>
-                        <a:ea typeface="Arial" charset="0"/>
-                        <a:cs typeface="Arial" charset="0"/>
-                      </a:endParaRPr>
-                    </a:p>
-                  </a:txBody>
-                  <a:tcPr marL="50800" marR="50800" marT="25400" marB="25400" anchor="ctr">
-                    <a:lnL w="6350" cap="flat" cmpd="sng" algn="ctr">
-                      <a:solidFill>
-                        <a:srgbClr val="E3E3E3"/>
-                      </a:solidFill>
-                      <a:prstDash val="solid"/>
-                      <a:round/>
-                      <a:headEnd type="none" w="med" len="med"/>
-                      <a:tailEnd type="none" w="med" len="med"/>
-                    </a:lnL>
-                    <a:lnR w="6350" cap="flat" cmpd="sng" algn="ctr">
-                      <a:solidFill>
-                        <a:srgbClr val="E3E3E3"/>
-                      </a:solidFill>
-                      <a:prstDash val="solid"/>
-                      <a:round/>
-                      <a:headEnd type="none" w="med" len="med"/>
-                      <a:tailEnd type="none" w="med" len="med"/>
-                    </a:lnR>
-                    <a:lnT w="6350" cap="flat" cmpd="sng" algn="ctr">
-                      <a:solidFill>
-                        <a:srgbClr val="E3E3E3"/>
-                      </a:solidFill>
-                      <a:prstDash val="solid"/>
-                      <a:round/>
-                      <a:headEnd type="none" w="med" len="med"/>
-                      <a:tailEnd type="none" w="med" len="med"/>
-                    </a:lnT>
-                    <a:lnB w="6350" cap="flat" cmpd="sng" algn="ctr">
-                      <a:solidFill>
-                        <a:srgbClr val="E3E3E3"/>
-                      </a:solidFill>
-                      <a:prstDash val="solid"/>
-                      <a:round/>
-                      <a:headEnd type="none" w="med" len="med"/>
-                      <a:tailEnd type="none" w="med" len="med"/>
-                    </a:lnB>
-                    <a:solidFill>
-                      <a:srgbClr val="FFFFFF"/>
-                    </a:solidFill>
-                  </a:tcPr>
-                </a:tc>
-              </a:tr>
-              <a:tr h="463601">
-                <a:tc>
-                  <a:txBody>
-                    <a:bodyPr/>
-                    <a:lstStyle/>
-                    <a:p>
-                      <a:pPr indent="0" marL="0">
-                        <a:buNone/>
-                      </a:pPr>
-                      <a:r>
-                        <a:rPr lang="en-US" sz="780" b="1" dirty="0">
-                          <a:solidFill>
-                            <a:srgbClr val="262626"/>
-                          </a:solidFill>
-                          <a:latin typeface="Arial" pitchFamily="34" charset="0"/>
-                          <a:ea typeface="Arial" pitchFamily="34" charset="-122"/>
-                          <a:cs typeface="Arial" pitchFamily="34" charset="-120"/>
-                        </a:rPr>
-                        <a:t>iShares MSCI Taiwan (EWT)</a:t>
-                      </a:r>
-                      <a:endParaRPr lang="en-US" sz="780" dirty="0">
-                        <a:latin typeface="Arial" charset="0"/>
-                        <a:ea typeface="Arial" charset="0"/>
-                        <a:cs typeface="Arial" charset="0"/>
-                      </a:endParaRPr>
-                    </a:p>
-                  </a:txBody>
-                  <a:tcPr marL="50800" marR="50800" marT="25400" marB="25400" anchor="ctr">
-                    <a:lnL w="6350" cap="flat" cmpd="sng" algn="ctr">
-                      <a:solidFill>
-                        <a:srgbClr val="E3E3E3"/>
-                      </a:solidFill>
-                      <a:prstDash val="solid"/>
-                      <a:round/>
-                      <a:headEnd type="none" w="med" len="med"/>
-                      <a:tailEnd type="none" w="med" len="med"/>
-                    </a:lnL>
-                    <a:lnR w="6350" cap="flat" cmpd="sng" algn="ctr">
-                      <a:solidFill>
-                        <a:srgbClr val="E3E3E3"/>
-                      </a:solidFill>
-                      <a:prstDash val="solid"/>
-                      <a:round/>
-                      <a:headEnd type="none" w="med" len="med"/>
-                      <a:tailEnd type="none" w="med" len="med"/>
-                    </a:lnR>
-                    <a:lnT w="6350" cap="flat" cmpd="sng" algn="ctr">
-                      <a:solidFill>
-                        <a:srgbClr val="E3E3E3"/>
-                      </a:solidFill>
-                      <a:prstDash val="solid"/>
-                      <a:round/>
-                      <a:headEnd type="none" w="med" len="med"/>
-                      <a:tailEnd type="none" w="med" len="med"/>
-                    </a:lnT>
-                    <a:lnB w="6350" cap="flat" cmpd="sng" algn="ctr">
-                      <a:solidFill>
-                        <a:srgbClr val="E3E3E3"/>
-                      </a:solidFill>
-                      <a:prstDash val="solid"/>
-                      <a:round/>
-                      <a:headEnd type="none" w="med" len="med"/>
-                      <a:tailEnd type="none" w="med" len="med"/>
-                    </a:lnB>
-                    <a:solidFill>
-                      <a:srgbClr val="FFFFFF"/>
-                    </a:solidFill>
-                  </a:tcPr>
-                </a:tc>
-                <a:tc>
-                  <a:txBody>
-                    <a:bodyPr/>
-                    <a:lstStyle/>
-                    <a:p>
-                      <a:pPr indent="0" marL="0">
-                        <a:buNone/>
-                      </a:pPr>
-                      <a:r>
-                        <a:rPr lang="en-US" sz="780" dirty="0">
-                          <a:solidFill>
-                            <a:srgbClr val="262626"/>
-                          </a:solidFill>
-                          <a:latin typeface="Arial" pitchFamily="34" charset="0"/>
-                          <a:ea typeface="Arial" pitchFamily="34" charset="-122"/>
-                          <a:cs typeface="Arial" pitchFamily="34" charset="-120"/>
-                        </a:rPr>
-                        <a:t>15%</a:t>
-                      </a:r>
-                      <a:endParaRPr lang="en-US" sz="780" dirty="0">
-                        <a:latin typeface="Arial" charset="0"/>
-                        <a:ea typeface="Arial" charset="0"/>
-                        <a:cs typeface="Arial" charset="0"/>
-                      </a:endParaRPr>
-                    </a:p>
-                  </a:txBody>
-                  <a:tcPr marL="50800" marR="50800" marT="25400" marB="25400" anchor="ctr">
-                    <a:lnL w="6350" cap="flat" cmpd="sng" algn="ctr">
-                      <a:solidFill>
-                        <a:srgbClr val="E3E3E3"/>
-                      </a:solidFill>
-                      <a:prstDash val="solid"/>
-                      <a:round/>
-                      <a:headEnd type="none" w="med" len="med"/>
-                      <a:tailEnd type="none" w="med" len="med"/>
-                    </a:lnL>
-                    <a:lnR w="6350" cap="flat" cmpd="sng" algn="ctr">
-                      <a:solidFill>
-                        <a:srgbClr val="E3E3E3"/>
-                      </a:solidFill>
-                      <a:prstDash val="solid"/>
-                      <a:round/>
-                      <a:headEnd type="none" w="med" len="med"/>
-                      <a:tailEnd type="none" w="med" len="med"/>
-                    </a:lnR>
-                    <a:lnT w="6350" cap="flat" cmpd="sng" algn="ctr">
-                      <a:solidFill>
-                        <a:srgbClr val="E3E3E3"/>
-                      </a:solidFill>
-                      <a:prstDash val="solid"/>
-                      <a:round/>
-                      <a:headEnd type="none" w="med" len="med"/>
-                      <a:tailEnd type="none" w="med" len="med"/>
-                    </a:lnT>
-                    <a:lnB w="6350" cap="flat" cmpd="sng" algn="ctr">
-                      <a:solidFill>
-                        <a:srgbClr val="E3E3E3"/>
-                      </a:solidFill>
-                      <a:prstDash val="solid"/>
-                      <a:round/>
-                      <a:headEnd type="none" w="med" len="med"/>
-                      <a:tailEnd type="none" w="med" len="med"/>
-                    </a:lnB>
-                    <a:solidFill>
-                      <a:srgbClr val="FFFFFF"/>
-                    </a:solidFill>
-                  </a:tcPr>
-                </a:tc>
-                <a:tc>
-                  <a:txBody>
-                    <a:bodyPr/>
-                    <a:lstStyle/>
-                    <a:p>
-                      <a:pPr indent="0" marL="0">
-                        <a:buNone/>
-                      </a:pPr>
-                      <a:r>
-                        <a:rPr lang="en-US" sz="780" dirty="0">
-                          <a:solidFill>
-                            <a:srgbClr val="262626"/>
-                          </a:solidFill>
-                          <a:latin typeface="Arial" pitchFamily="34" charset="0"/>
-                          <a:ea typeface="Arial" pitchFamily="34" charset="-122"/>
-                          <a:cs typeface="Arial" pitchFamily="34" charset="-120"/>
-                        </a:rPr>
-                        <a:t>Taiwan large caps (TSMC, MediaTek, Delta): AI foundry and server chain in the family's Greater China region</a:t>
-                      </a:r>
-                      <a:endParaRPr lang="en-US" sz="780" dirty="0">
-                        <a:latin typeface="Arial" charset="0"/>
-                        <a:ea typeface="Arial" charset="0"/>
-                        <a:cs typeface="Arial" charset="0"/>
-                      </a:endParaRPr>
-                    </a:p>
-                  </a:txBody>
-                  <a:tcPr marL="50800" marR="50800" marT="25400" marB="25400" anchor="ctr">
-                    <a:lnL w="6350" cap="flat" cmpd="sng" algn="ctr">
-                      <a:solidFill>
-                        <a:srgbClr val="E3E3E3"/>
-                      </a:solidFill>
-                      <a:prstDash val="solid"/>
-                      <a:round/>
-                      <a:headEnd type="none" w="med" len="med"/>
-                      <a:tailEnd type="none" w="med" len="med"/>
-                    </a:lnL>
-                    <a:lnR w="6350" cap="flat" cmpd="sng" algn="ctr">
-                      <a:solidFill>
-                        <a:srgbClr val="E3E3E3"/>
-                      </a:solidFill>
-                      <a:prstDash val="solid"/>
-                      <a:round/>
-                      <a:headEnd type="none" w="med" len="med"/>
-                      <a:tailEnd type="none" w="med" len="med"/>
-                    </a:lnR>
-                    <a:lnT w="6350" cap="flat" cmpd="sng" algn="ctr">
-                      <a:solidFill>
-                        <a:srgbClr val="E3E3E3"/>
-                      </a:solidFill>
-                      <a:prstDash val="solid"/>
-                      <a:round/>
-                      <a:headEnd type="none" w="med" len="med"/>
-                      <a:tailEnd type="none" w="med" len="med"/>
-                    </a:lnT>
-                    <a:lnB w="6350" cap="flat" cmpd="sng" algn="ctr">
-                      <a:solidFill>
-                        <a:srgbClr val="E3E3E3"/>
-                      </a:solidFill>
-                      <a:prstDash val="solid"/>
-                      <a:round/>
-                      <a:headEnd type="none" w="med" len="med"/>
-                      <a:tailEnd type="none" w="med" len="med"/>
-                    </a:lnB>
-                    <a:solidFill>
-                      <a:srgbClr val="FFFFFF"/>
-                    </a:solidFill>
-                  </a:tcPr>
-                </a:tc>
-                <a:tc>
-                  <a:txBody>
-                    <a:bodyPr/>
-                    <a:lstStyle/>
-                    <a:p>
-                      <a:pPr indent="0" marL="0">
-                        <a:buNone/>
-                      </a:pPr>
-                      <a:r>
-                        <a:rPr lang="en-US" sz="780" dirty="0">
-                          <a:solidFill>
-                            <a:srgbClr val="262626"/>
-                          </a:solidFill>
-                          <a:latin typeface="Arial" pitchFamily="34" charset="0"/>
-                          <a:ea typeface="Arial" pitchFamily="34" charset="-122"/>
-                          <a:cs typeface="Arial" pitchFamily="34" charset="-120"/>
-                        </a:rPr>
                         <a:t>26%</a:t>
-                      </a:r>
-                      <a:endParaRPr lang="en-US" sz="780" dirty="0">
-                        <a:latin typeface="Arial" charset="0"/>
-                        <a:ea typeface="Arial" charset="0"/>
-                        <a:cs typeface="Arial" charset="0"/>
-                      </a:endParaRPr>
-                    </a:p>
-                  </a:txBody>
-                  <a:tcPr marL="50800" marR="50800" marT="25400" marB="25400" anchor="ctr">
-                    <a:lnL w="6350" cap="flat" cmpd="sng" algn="ctr">
-                      <a:solidFill>
-                        <a:srgbClr val="E3E3E3"/>
-                      </a:solidFill>
-                      <a:prstDash val="solid"/>
-                      <a:round/>
-                      <a:headEnd type="none" w="med" len="med"/>
-                      <a:tailEnd type="none" w="med" len="med"/>
-                    </a:lnL>
-                    <a:lnR w="6350" cap="flat" cmpd="sng" algn="ctr">
-                      <a:solidFill>
-                        <a:srgbClr val="E3E3E3"/>
-                      </a:solidFill>
-                      <a:prstDash val="solid"/>
-                      <a:round/>
-                      <a:headEnd type="none" w="med" len="med"/>
-                      <a:tailEnd type="none" w="med" len="med"/>
-                    </a:lnR>
-                    <a:lnT w="6350" cap="flat" cmpd="sng" algn="ctr">
-                      <a:solidFill>
-                        <a:srgbClr val="E3E3E3"/>
-                      </a:solidFill>
-                      <a:prstDash val="solid"/>
-                      <a:round/>
-                      <a:headEnd type="none" w="med" len="med"/>
-                      <a:tailEnd type="none" w="med" len="med"/>
-                    </a:lnT>
-                    <a:lnB w="6350" cap="flat" cmpd="sng" algn="ctr">
-                      <a:solidFill>
-                        <a:srgbClr val="E3E3E3"/>
-                      </a:solidFill>
-                      <a:prstDash val="solid"/>
-                      <a:round/>
-                      <a:headEnd type="none" w="med" len="med"/>
-                      <a:tailEnd type="none" w="med" len="med"/>
-                    </a:lnB>
-                    <a:solidFill>
-                      <a:srgbClr val="FFFFFF"/>
-                    </a:solidFill>
-                  </a:tcPr>
-                </a:tc>
-              </a:tr>
-              <a:tr h="463601">
-                <a:tc>
-                  <a:txBody>
-                    <a:bodyPr/>
-                    <a:lstStyle/>
-                    <a:p>
-                      <a:pPr indent="0" marL="0">
-                        <a:buNone/>
-                      </a:pPr>
-                      <a:r>
-                        <a:rPr lang="en-US" sz="780" b="1" dirty="0">
-                          <a:solidFill>
-                            <a:srgbClr val="262626"/>
-                          </a:solidFill>
-                          <a:latin typeface="Arial" pitchFamily="34" charset="0"/>
-                          <a:ea typeface="Arial" pitchFamily="34" charset="-122"/>
-                          <a:cs typeface="Arial" pitchFamily="34" charset="-120"/>
-                        </a:rPr>
-                        <a:t>iShares MSCI South Korea (EWY)</a:t>
-                      </a:r>
-                      <a:endParaRPr lang="en-US" sz="780" dirty="0">
-                        <a:latin typeface="Arial" charset="0"/>
-                        <a:ea typeface="Arial" charset="0"/>
-                        <a:cs typeface="Arial" charset="0"/>
-                      </a:endParaRPr>
-                    </a:p>
-                  </a:txBody>
-                  <a:tcPr marL="50800" marR="50800" marT="25400" marB="25400" anchor="ctr">
-                    <a:lnL w="6350" cap="flat" cmpd="sng" algn="ctr">
-                      <a:solidFill>
-                        <a:srgbClr val="E3E3E3"/>
-                      </a:solidFill>
-                      <a:prstDash val="solid"/>
-                      <a:round/>
-                      <a:headEnd type="none" w="med" len="med"/>
-                      <a:tailEnd type="none" w="med" len="med"/>
-                    </a:lnL>
-                    <a:lnR w="6350" cap="flat" cmpd="sng" algn="ctr">
-                      <a:solidFill>
-                        <a:srgbClr val="E3E3E3"/>
-                      </a:solidFill>
-                      <a:prstDash val="solid"/>
-                      <a:round/>
-                      <a:headEnd type="none" w="med" len="med"/>
-                      <a:tailEnd type="none" w="med" len="med"/>
-                    </a:lnR>
-                    <a:lnT w="6350" cap="flat" cmpd="sng" algn="ctr">
-                      <a:solidFill>
-                        <a:srgbClr val="E3E3E3"/>
-                      </a:solidFill>
-                      <a:prstDash val="solid"/>
-                      <a:round/>
-                      <a:headEnd type="none" w="med" len="med"/>
-                      <a:tailEnd type="none" w="med" len="med"/>
-                    </a:lnT>
-                    <a:lnB w="6350" cap="flat" cmpd="sng" algn="ctr">
-                      <a:solidFill>
-                        <a:srgbClr val="E3E3E3"/>
-                      </a:solidFill>
-                      <a:prstDash val="solid"/>
-                      <a:round/>
-                      <a:headEnd type="none" w="med" len="med"/>
-                      <a:tailEnd type="none" w="med" len="med"/>
-                    </a:lnB>
-                    <a:solidFill>
-                      <a:srgbClr val="FFFFFF"/>
-                    </a:solidFill>
-                  </a:tcPr>
-                </a:tc>
-                <a:tc>
-                  <a:txBody>
-                    <a:bodyPr/>
-                    <a:lstStyle/>
-                    <a:p>
-                      <a:pPr indent="0" marL="0">
-                        <a:buNone/>
-                      </a:pPr>
-                      <a:r>
-                        <a:rPr lang="en-US" sz="780" dirty="0">
-                          <a:solidFill>
-                            <a:srgbClr val="262626"/>
-                          </a:solidFill>
-                          <a:latin typeface="Arial" pitchFamily="34" charset="0"/>
-                          <a:ea typeface="Arial" pitchFamily="34" charset="-122"/>
-                          <a:cs typeface="Arial" pitchFamily="34" charset="-120"/>
-                        </a:rPr>
-                        <a:t>20%</a:t>
-                      </a:r>
-                      <a:endParaRPr lang="en-US" sz="780" dirty="0">
-                        <a:latin typeface="Arial" charset="0"/>
-                        <a:ea typeface="Arial" charset="0"/>
-                        <a:cs typeface="Arial" charset="0"/>
-                      </a:endParaRPr>
-                    </a:p>
-                  </a:txBody>
-                  <a:tcPr marL="50800" marR="50800" marT="25400" marB="25400" anchor="ctr">
-                    <a:lnL w="6350" cap="flat" cmpd="sng" algn="ctr">
-                      <a:solidFill>
-                        <a:srgbClr val="E3E3E3"/>
-                      </a:solidFill>
-                      <a:prstDash val="solid"/>
-                      <a:round/>
-                      <a:headEnd type="none" w="med" len="med"/>
-                      <a:tailEnd type="none" w="med" len="med"/>
-                    </a:lnL>
-                    <a:lnR w="6350" cap="flat" cmpd="sng" algn="ctr">
-                      <a:solidFill>
-                        <a:srgbClr val="E3E3E3"/>
-                      </a:solidFill>
-                      <a:prstDash val="solid"/>
-                      <a:round/>
-                      <a:headEnd type="none" w="med" len="med"/>
-                      <a:tailEnd type="none" w="med" len="med"/>
-                    </a:lnR>
-                    <a:lnT w="6350" cap="flat" cmpd="sng" algn="ctr">
-                      <a:solidFill>
-                        <a:srgbClr val="E3E3E3"/>
-                      </a:solidFill>
-                      <a:prstDash val="solid"/>
-                      <a:round/>
-                      <a:headEnd type="none" w="med" len="med"/>
-                      <a:tailEnd type="none" w="med" len="med"/>
-                    </a:lnT>
-                    <a:lnB w="6350" cap="flat" cmpd="sng" algn="ctr">
-                      <a:solidFill>
-                        <a:srgbClr val="E3E3E3"/>
-                      </a:solidFill>
-                      <a:prstDash val="solid"/>
-                      <a:round/>
-                      <a:headEnd type="none" w="med" len="med"/>
-                      <a:tailEnd type="none" w="med" len="med"/>
-                    </a:lnB>
-                    <a:solidFill>
-                      <a:srgbClr val="FFFFFF"/>
-                    </a:solidFill>
-                  </a:tcPr>
-                </a:tc>
-                <a:tc>
-                  <a:txBody>
-                    <a:bodyPr/>
-                    <a:lstStyle/>
-                    <a:p>
-                      <a:pPr indent="0" marL="0">
-                        <a:buNone/>
-                      </a:pPr>
-                      <a:r>
-                        <a:rPr lang="en-US" sz="780" dirty="0">
-                          <a:solidFill>
-                            <a:srgbClr val="262626"/>
-                          </a:solidFill>
-                          <a:latin typeface="Arial" pitchFamily="34" charset="0"/>
-                          <a:ea typeface="Arial" pitchFamily="34" charset="-122"/>
-                          <a:cs typeface="Arial" pitchFamily="34" charset="-120"/>
-                        </a:rPr>
-                        <a:t>Korea large caps (Samsung + SK hynix ~44%): high-bandwidth memory for AI</a:t>
-                      </a:r>
-                      <a:endParaRPr lang="en-US" sz="780" dirty="0">
-                        <a:latin typeface="Arial" charset="0"/>
-                        <a:ea typeface="Arial" charset="0"/>
-                        <a:cs typeface="Arial" charset="0"/>
-                      </a:endParaRPr>
-                    </a:p>
-                  </a:txBody>
-                  <a:tcPr marL="50800" marR="50800" marT="25400" marB="25400" anchor="ctr">
-                    <a:lnL w="6350" cap="flat" cmpd="sng" algn="ctr">
-                      <a:solidFill>
-                        <a:srgbClr val="E3E3E3"/>
-                      </a:solidFill>
-                      <a:prstDash val="solid"/>
-                      <a:round/>
-                      <a:headEnd type="none" w="med" len="med"/>
-                      <a:tailEnd type="none" w="med" len="med"/>
-                    </a:lnL>
-                    <a:lnR w="6350" cap="flat" cmpd="sng" algn="ctr">
-                      <a:solidFill>
-                        <a:srgbClr val="E3E3E3"/>
-                      </a:solidFill>
-                      <a:prstDash val="solid"/>
-                      <a:round/>
-                      <a:headEnd type="none" w="med" len="med"/>
-                      <a:tailEnd type="none" w="med" len="med"/>
-                    </a:lnR>
-                    <a:lnT w="6350" cap="flat" cmpd="sng" algn="ctr">
-                      <a:solidFill>
-                        <a:srgbClr val="E3E3E3"/>
-                      </a:solidFill>
-                      <a:prstDash val="solid"/>
-                      <a:round/>
-                      <a:headEnd type="none" w="med" len="med"/>
-                      <a:tailEnd type="none" w="med" len="med"/>
-                    </a:lnT>
-                    <a:lnB w="6350" cap="flat" cmpd="sng" algn="ctr">
-                      <a:solidFill>
-                        <a:srgbClr val="E3E3E3"/>
-                      </a:solidFill>
-                      <a:prstDash val="solid"/>
-                      <a:round/>
-                      <a:headEnd type="none" w="med" len="med"/>
-                      <a:tailEnd type="none" w="med" len="med"/>
-                    </a:lnB>
-                    <a:solidFill>
-                      <a:srgbClr val="FFFFFF"/>
-                    </a:solidFill>
-                  </a:tcPr>
-                </a:tc>
-                <a:tc>
-                  <a:txBody>
-                    <a:bodyPr/>
-                    <a:lstStyle/>
-                    <a:p>
-                      <a:pPr indent="0" marL="0">
-                        <a:buNone/>
-                      </a:pPr>
-                      <a:r>
-                        <a:rPr lang="en-US" sz="780" dirty="0">
-                          <a:solidFill>
-                            <a:srgbClr val="262626"/>
-                          </a:solidFill>
-                          <a:latin typeface="Arial" pitchFamily="34" charset="0"/>
-                          <a:ea typeface="Arial" pitchFamily="34" charset="-122"/>
-                          <a:cs typeface="Arial" pitchFamily="34" charset="-120"/>
-                        </a:rPr>
-                        <a:t>30%</a:t>
                       </a:r>
                       <a:endParaRPr lang="en-US" sz="780" dirty="0">
                         <a:latin typeface="Arial" charset="0"/>
@@ -50358,7 +50337,7 @@
                           <a:ea typeface="Arial" pitchFamily="34" charset="-122"/>
                           <a:cs typeface="Arial" pitchFamily="34" charset="-120"/>
                         </a:rPr>
-                        <a:t>18%</a:t>
+                        <a:t>37%</a:t>
                       </a:r>
                       <a:endParaRPr lang="en-US" sz="780" dirty="0">
                         <a:latin typeface="Arial" charset="0"/>
@@ -50461,7 +50440,7 @@
                 <a:ea typeface="Arial" pitchFamily="34" charset="-122"/>
                 <a:cs typeface="Arial" pitchFamily="34" charset="-120"/>
               </a:rPr>
-              <a:t>a shock to one ETF is cushioned by the others: basket vol ~26% vs 18%–38% alone. Overlap (TSMC, Samsung, SK hynix sit in several ETFs) keeps correlations high (0.45–0.85).</a:t>
+              <a:t>a shock to one ETF is cushioned by the others: basket vol ~26% vs 18%–49% alone. Overlap (TSMC, Samsung, SK hynix sit in several ETFs) keeps correlations high (0.45–0.85).</a:t>
             </a:r>
             <a:endParaRPr lang="en-US" sz="870" dirty="0"/>
           </a:p>
@@ -50500,7 +50479,7 @@
                 <a:ea typeface="Arial" pitchFamily="34" charset="-122"/>
                 <a:cs typeface="Arial" pitchFamily="34" charset="-120"/>
               </a:rPr>
-              <a:t>*Assumed 5Y vols. USD 5M/day ETF rule: EWY, EWT, 2644, 00878 pass; 3119 is borderline (~USD 4–5M/day), verify the 6-month average on Bloomberg. 00878 distributes ~7.6% a year, which lowers its price path.</a:t>
+              <a:t>*Annualised vols from the team risk/return app (slide 4). Basket vol ~26% with Bloomberg-style correlations, the level the slide-5 Monte Carlo implies (the app's chart estimates ~17%). USD 5M/day ETF rule: EWY, EWT, 2644, 00878 pass; 3119 is borderline (~USD 4–5M/day), verify the 6-month average on Bloomberg. 00878 distributes ~7.6% a year, which lowers its price path.</a:t>
             </a:r>
             <a:endParaRPr lang="en-US" sz="680" dirty="0"/>
           </a:p>
